--- a/מצגת_nlp.pptx
+++ b/מצגת_nlp.pptx
@@ -4,6 +4,9 @@
   <p:sldMasterIdLst>
     <p:sldMasterId id="2147483648" r:id="rId1"/>
   </p:sldMasterIdLst>
+  <p:notesMasterIdLst>
+    <p:notesMasterId r:id="rId21"/>
+  </p:notesMasterIdLst>
   <p:sldIdLst>
     <p:sldId id="256" r:id="rId2"/>
     <p:sldId id="257" r:id="rId3"/>
@@ -25,11 +28,8 @@
     <p:sldId id="273" r:id="rId19"/>
     <p:sldId id="274" r:id="rId20"/>
   </p:sldIdLst>
-  <p:notesMasterIdLst>
-    <p:notesMasterId r:id="rId21"/>
-  </p:notesMasterIdLst>
-  <p:sldSz cx="12191695" cy="6858000"/>
-  <p:notesSz cx="6858000" cy="12191695"/>
+  <p:sldSz cx="12192000" cy="6858000"/>
+  <p:notesSz cx="6858000" cy="12192000"/>
   <p:defaultTextStyle>
     <a:lvl1pPr marL="0" algn="l" defTabSz="914400" rtl="0" eaLnBrk="1" latinLnBrk="0" hangingPunct="1">
       <a:defRPr sz="1800" kern="1200">
@@ -122,13 +122,20 @@
       </a:defRPr>
     </a:lvl9pPr>
   </p:defaultTextStyle>
+  <p:extLst>
+    <p:ext uri="{EFAFB233-063F-42B5-8137-9DF3F51BA10A}">
+      <p15:sldGuideLst xmlns:p15="http://schemas.microsoft.com/office/powerpoint/2012/main"/>
+    </p:ext>
+  </p:extLst>
 </p:presentation>
 </file>
 
 <file path=ppt/charts/chart1.xml><?xml version="1.0" encoding="utf-8"?>
-<c:chartSpace xmlns:c="http://schemas.openxmlformats.org/drawingml/2006/chart" xmlns:a="http://schemas.openxmlformats.org/drawingml/2006/main" xmlns:r="http://schemas.openxmlformats.org/officeDocument/2006/relationships">
+<c:chartSpace xmlns:c="http://schemas.openxmlformats.org/drawingml/2006/chart" xmlns:a="http://schemas.openxmlformats.org/drawingml/2006/main" xmlns:r="http://schemas.openxmlformats.org/officeDocument/2006/relationships" xmlns:c16r2="http://schemas.microsoft.com/office/drawing/2015/06/chart">
   <c:date1904 val="0"/>
+  <c:lang val="en-US"/>
   <c:roundedCorners val="1"/>
+  <c:style val="2"/>
   <c:chart>
     <c:autoTitleDeleted val="1"/>
     <c:plotArea>
@@ -158,51 +165,25 @@
             <a:effectLst/>
           </c:spPr>
           <c:invertIfNegative val="0"/>
-          <c:dLbls>
-            <c:numFmt formatCode="0.000" sourceLinked="0"/>
-            <c:txPr>
-              <a:bodyPr/>
-              <a:lstStyle/>
-              <a:p>
-                <a:pPr>
-                  <a:defRPr b="0" i="0" strike="noStrike" sz="1100" u="none">
-                    <a:solidFill>
-                      <a:srgbClr val="153139"/>
-                    </a:solidFill>
-                    <a:latin typeface="Arial"/>
-                  </a:defRPr>
-                </a:pPr>
-              </a:p>
-            </c:txPr>
-            <c:showLegendKey val="0"/>
-            <c:showVal val="1"/>
-            <c:showCatName val="0"/>
-            <c:showSerName val="0"/>
-            <c:showPercent val="0"/>
-            <c:showBubbleSize val="0"/>
-            <c:showLeaderLines val="0"/>
-          </c:dLbls>
           <c:dPt>
             <c:idx val="0"/>
             <c:invertIfNegative val="0"/>
             <c:bubble3D val="0"/>
-            <c:spPr>
-              <a:solidFill>
-                <a:srgbClr val="0E8A8F"/>
-              </a:solidFill>
-              <a:effectLst/>
-            </c:spPr>
+            <c:extLst>
+              <c:ext xmlns:c16="http://schemas.microsoft.com/office/drawing/2014/chart" uri="{C3380CC4-5D6E-409C-BE32-E72D297353CC}">
+                <c16:uniqueId val="{00000001-1735-EE48-98B9-57732B45EA4D}"/>
+              </c:ext>
+            </c:extLst>
           </c:dPt>
           <c:dPt>
             <c:idx val="1"/>
             <c:invertIfNegative val="0"/>
             <c:bubble3D val="0"/>
-            <c:spPr>
-              <a:solidFill>
-                <a:srgbClr val="0E8A8F"/>
-              </a:solidFill>
-              <a:effectLst/>
-            </c:spPr>
+            <c:extLst>
+              <c:ext xmlns:c16="http://schemas.microsoft.com/office/drawing/2014/chart" uri="{C3380CC4-5D6E-409C-BE32-E72D297353CC}">
+                <c16:uniqueId val="{00000003-1735-EE48-98B9-57732B45EA4D}"/>
+              </c:ext>
+            </c:extLst>
           </c:dPt>
           <c:dPt>
             <c:idx val="2"/>
@@ -214,6 +195,11 @@
               </a:solidFill>
               <a:effectLst/>
             </c:spPr>
+            <c:extLst>
+              <c:ext xmlns:c16="http://schemas.microsoft.com/office/drawing/2014/chart" uri="{C3380CC4-5D6E-409C-BE32-E72D297353CC}">
+                <c16:uniqueId val="{00000005-1735-EE48-98B9-57732B45EA4D}"/>
+              </c:ext>
+            </c:extLst>
           </c:dPt>
           <c:dPt>
             <c:idx val="3"/>
@@ -225,6 +211,11 @@
               </a:solidFill>
               <a:effectLst/>
             </c:spPr>
+            <c:extLst>
+              <c:ext xmlns:c16="http://schemas.microsoft.com/office/drawing/2014/chart" uri="{C3380CC4-5D6E-409C-BE32-E72D297353CC}">
+                <c16:uniqueId val="{00000007-1735-EE48-98B9-57732B45EA4D}"/>
+              </c:ext>
+            </c:extLst>
           </c:dPt>
           <c:dPt>
             <c:idx val="4"/>
@@ -236,31 +227,71 @@
               </a:solidFill>
               <a:effectLst/>
             </c:spPr>
+            <c:extLst>
+              <c:ext xmlns:c16="http://schemas.microsoft.com/office/drawing/2014/chart" uri="{C3380CC4-5D6E-409C-BE32-E72D297353CC}">
+                <c16:uniqueId val="{00000009-1735-EE48-98B9-57732B45EA4D}"/>
+              </c:ext>
+            </c:extLst>
           </c:dPt>
+          <c:dLbls>
+            <c:numFmt formatCode="0.000" sourceLinked="0"/>
+            <c:spPr>
+              <a:noFill/>
+              <a:ln>
+                <a:noFill/>
+              </a:ln>
+              <a:effectLst/>
+            </c:spPr>
+            <c:txPr>
+              <a:bodyPr/>
+              <a:lstStyle/>
+              <a:p>
+                <a:pPr>
+                  <a:defRPr sz="1100" b="0" i="0" u="none" strike="noStrike">
+                    <a:solidFill>
+                      <a:srgbClr val="153139"/>
+                    </a:solidFill>
+                    <a:latin typeface="Arial"/>
+                  </a:defRPr>
+                </a:pPr>
+                <a:endParaRPr lang="en-IL"/>
+              </a:p>
+            </c:txPr>
+            <c:showLegendKey val="0"/>
+            <c:showVal val="1"/>
+            <c:showCatName val="0"/>
+            <c:showSerName val="0"/>
+            <c:showPercent val="0"/>
+            <c:showBubbleSize val="0"/>
+            <c:showLeaderLines val="0"/>
+            <c:extLst>
+              <c:ext xmlns:c15="http://schemas.microsoft.com/office/drawing/2012/chart" uri="{CE6537A1-D6FC-4f65-9D91-7224C49458BB}">
+                <c15:showLeaderLines val="0"/>
+              </c:ext>
+            </c:extLst>
+          </c:dLbls>
           <c:cat>
-            <c:multiLvlStrRef>
+            <c:strRef>
               <c:f>Sheet1!$A$2:$A$6</c:f>
-              <c:multiLvlStrCache>
+              <c:strCache>
                 <c:ptCount val="5"/>
-                <c:lvl>
-                  <c:pt idx="0">
-                    <c:v>TF-IDF</c:v>
-                  </c:pt>
-                  <c:pt idx="1">
-                    <c:v>BM25</c:v>
-                  </c:pt>
-                  <c:pt idx="2">
-                    <c:v>AlephBERT</c:v>
-                  </c:pt>
-                  <c:pt idx="3">
-                    <c:v>Hybrid-RRF</c:v>
-                  </c:pt>
-                  <c:pt idx="4">
-                    <c:v>Hybrid-wtd</c:v>
-                  </c:pt>
-                </c:lvl>
-              </c:multiLvlStrCache>
-            </c:multiLvlStrRef>
+                <c:pt idx="0">
+                  <c:v>TF-IDF</c:v>
+                </c:pt>
+                <c:pt idx="1">
+                  <c:v>BM25</c:v>
+                </c:pt>
+                <c:pt idx="2">
+                  <c:v>AlephBERT</c:v>
+                </c:pt>
+                <c:pt idx="3">
+                  <c:v>Hybrid-RRF</c:v>
+                </c:pt>
+                <c:pt idx="4">
+                  <c:v>Hybrid-wtd</c:v>
+                </c:pt>
+              </c:strCache>
+            </c:strRef>
           </c:cat>
           <c:val>
             <c:numRef>
@@ -269,53 +300,40 @@
                 <c:formatCode>General</c:formatCode>
                 <c:ptCount val="5"/>
                 <c:pt idx="0">
-                  <c:v>0.618</c:v>
+                  <c:v>0.61799999999999999</c:v>
                 </c:pt>
                 <c:pt idx="1">
-                  <c:v>0.612</c:v>
+                  <c:v>0.61199999999999999</c:v>
                 </c:pt>
                 <c:pt idx="2">
-                  <c:v>0.579</c:v>
+                  <c:v>0.57899999999999996</c:v>
                 </c:pt>
                 <c:pt idx="3">
-                  <c:v>0.668</c:v>
+                  <c:v>0.66800000000000004</c:v>
                 </c:pt>
                 <c:pt idx="4">
-                  <c:v>0.653</c:v>
+                  <c:v>0.65300000000000002</c:v>
                 </c:pt>
               </c:numCache>
             </c:numRef>
           </c:val>
+          <c:extLst>
+            <c:ext xmlns:c16="http://schemas.microsoft.com/office/drawing/2014/chart" uri="{C3380CC4-5D6E-409C-BE32-E72D297353CC}">
+              <c16:uniqueId val="{0000000A-1735-EE48-98B9-57732B45EA4D}"/>
+            </c:ext>
+          </c:extLst>
         </c:ser>
         <c:dLbls>
-          <c:numFmt formatCode="0.000" sourceLinked="0"/>
-          <c:txPr>
-            <a:bodyPr/>
-            <a:lstStyle/>
-            <a:p>
-              <a:pPr>
-                <a:defRPr b="0" i="0" strike="noStrike" sz="1100" u="none">
-                  <a:solidFill>
-                    <a:srgbClr val="153139"/>
-                  </a:solidFill>
-                  <a:latin typeface="Arial"/>
-                </a:defRPr>
-              </a:pPr>
-            </a:p>
-          </c:txPr>
           <c:showLegendKey val="0"/>
           <c:showVal val="1"/>
           <c:showCatName val="0"/>
           <c:showSerName val="0"/>
           <c:showPercent val="0"/>
           <c:showBubbleSize val="0"/>
-          <c:showLeaderLines val="0"/>
         </c:dLbls>
         <c:gapWidth val="150"/>
-        <c:overlap val="0"/>
         <c:axId val="2094734554"/>
         <c:axId val="2094734552"/>
-        <c:axId val="2094734556"/>
       </c:barChart>
       <c:catAx>
         <c:axId val="2094734554"/>
@@ -356,6 +374,7 @@
         <c:crosses val="autoZero"/>
         <c:auto val="1"/>
         <c:lblAlgn val="ctr"/>
+        <c:lblOffset val="100"/>
         <c:noMultiLvlLbl val="1"/>
       </c:catAx>
       <c:valAx>
@@ -422,6 +441,7 @@
     </c:plotArea>
     <c:plotVisOnly val="1"/>
     <c:dispBlanksAs val="span"/>
+    <c:showDLblsOverMax val="1"/>
   </c:chart>
   <c:spPr>
     <a:solidFill>
@@ -439,14 +459,17 @@
 </file>
 
 <file path=ppt/charts/chart2.xml><?xml version="1.0" encoding="utf-8"?>
-<c:chartSpace xmlns:c="http://schemas.openxmlformats.org/drawingml/2006/chart" xmlns:a="http://schemas.openxmlformats.org/drawingml/2006/main" xmlns:r="http://schemas.openxmlformats.org/officeDocument/2006/relationships">
+<c:chartSpace xmlns:c="http://schemas.openxmlformats.org/drawingml/2006/chart" xmlns:a="http://schemas.openxmlformats.org/drawingml/2006/main" xmlns:r="http://schemas.openxmlformats.org/officeDocument/2006/relationships" xmlns:c16r2="http://schemas.microsoft.com/office/drawing/2015/06/chart">
   <c:date1904 val="0"/>
+  <c:lang val="en-US"/>
   <c:roundedCorners val="1"/>
+  <c:style val="2"/>
   <c:chart>
     <c:autoTitleDeleted val="1"/>
     <c:plotArea>
       <c:layout/>
       <c:lineChart>
+        <c:grouping val="standard"/>
         <c:varyColors val="0"/>
         <c:ser>
           <c:idx val="0"/>
@@ -463,9 +486,6 @@
             </c:strRef>
           </c:tx>
           <c:spPr>
-            <a:solidFill>
-              <a:srgbClr val="0E8A8F"/>
-            </a:solidFill>
             <a:ln w="38100" cap="flat">
               <a:solidFill>
                 <a:srgbClr val="0E8A8F"/>
@@ -475,31 +495,6 @@
             </a:ln>
             <a:effectLst/>
           </c:spPr>
-          <c:invertIfNegative val="0"/>
-          <c:dLbls>
-            <c:numFmt formatCode="#,##0" sourceLinked="0"/>
-            <c:txPr>
-              <a:bodyPr/>
-              <a:lstStyle/>
-              <a:p>
-                <a:pPr>
-                  <a:defRPr b="0" i="0" strike="noStrike" sz="1200" u="none">
-                    <a:solidFill>
-                      <a:srgbClr val="000000"/>
-                    </a:solidFill>
-                    <a:latin typeface="Arial"/>
-                  </a:defRPr>
-                </a:pPr>
-              </a:p>
-            </c:txPr>
-            <c:showLegendKey val="0"/>
-            <c:showVal val="0"/>
-            <c:showCatName val="0"/>
-            <c:showSerName val="0"/>
-            <c:showPercent val="0"/>
-            <c:showBubbleSize val="0"/>
-            <c:showLeaderLines val="0"/>
-          </c:dLbls>
           <c:marker>
             <c:symbol val="circle"/>
             <c:size val="6"/>
@@ -518,26 +513,24 @@
             </c:spPr>
           </c:marker>
           <c:cat>
-            <c:multiLvlStrRef>
+            <c:strRef>
               <c:f>Sheet1!$A$2:$A$5</c:f>
-              <c:multiLvlStrCache>
+              <c:strCache>
                 <c:ptCount val="4"/>
-                <c:lvl>
-                  <c:pt idx="0">
-                    <c:v>1</c:v>
-                  </c:pt>
-                  <c:pt idx="1">
-                    <c:v>3</c:v>
-                  </c:pt>
-                  <c:pt idx="2">
-                    <c:v>5</c:v>
-                  </c:pt>
-                  <c:pt idx="3">
-                    <c:v>10</c:v>
-                  </c:pt>
-                </c:lvl>
-              </c:multiLvlStrCache>
-            </c:multiLvlStrRef>
+                <c:pt idx="0">
+                  <c:v>1</c:v>
+                </c:pt>
+                <c:pt idx="1">
+                  <c:v>3</c:v>
+                </c:pt>
+                <c:pt idx="2">
+                  <c:v>5</c:v>
+                </c:pt>
+                <c:pt idx="3">
+                  <c:v>10</c:v>
+                </c:pt>
+              </c:strCache>
+            </c:strRef>
           </c:cat>
           <c:val>
             <c:numRef>
@@ -546,13 +539,13 @@
                 <c:formatCode>General</c:formatCode>
                 <c:ptCount val="4"/>
                 <c:pt idx="0">
-                  <c:v>0.475</c:v>
+                  <c:v>0.47499999999999998</c:v>
                 </c:pt>
                 <c:pt idx="1">
-                  <c:v>0.725</c:v>
+                  <c:v>0.72499999999999998</c:v>
                 </c:pt>
                 <c:pt idx="2">
-                  <c:v>0.825</c:v>
+                  <c:v>0.82499999999999996</c:v>
                 </c:pt>
                 <c:pt idx="3">
                   <c:v>0.85</c:v>
@@ -561,6 +554,11 @@
             </c:numRef>
           </c:val>
           <c:smooth val="0"/>
+          <c:extLst>
+            <c:ext xmlns:c16="http://schemas.microsoft.com/office/drawing/2014/chart" uri="{C3380CC4-5D6E-409C-BE32-E72D297353CC}">
+              <c16:uniqueId val="{00000000-A1E7-6D4F-A415-51E957160EA8}"/>
+            </c:ext>
+          </c:extLst>
         </c:ser>
         <c:ser>
           <c:idx val="1"/>
@@ -577,9 +575,6 @@
             </c:strRef>
           </c:tx>
           <c:spPr>
-            <a:solidFill>
-              <a:srgbClr val="E0852F"/>
-            </a:solidFill>
             <a:ln w="38100" cap="flat">
               <a:solidFill>
                 <a:srgbClr val="E0852F"/>
@@ -589,31 +584,6 @@
             </a:ln>
             <a:effectLst/>
           </c:spPr>
-          <c:invertIfNegative val="0"/>
-          <c:dLbls>
-            <c:numFmt formatCode="#,##0" sourceLinked="0"/>
-            <c:txPr>
-              <a:bodyPr/>
-              <a:lstStyle/>
-              <a:p>
-                <a:pPr>
-                  <a:defRPr b="0" i="0" strike="noStrike" sz="1200" u="none">
-                    <a:solidFill>
-                      <a:srgbClr val="000000"/>
-                    </a:solidFill>
-                    <a:latin typeface="Arial"/>
-                  </a:defRPr>
-                </a:pPr>
-              </a:p>
-            </c:txPr>
-            <c:showLegendKey val="0"/>
-            <c:showVal val="0"/>
-            <c:showCatName val="0"/>
-            <c:showSerName val="0"/>
-            <c:showPercent val="0"/>
-            <c:showBubbleSize val="0"/>
-            <c:showLeaderLines val="0"/>
-          </c:dLbls>
           <c:marker>
             <c:symbol val="circle"/>
             <c:size val="6"/>
@@ -632,26 +602,24 @@
             </c:spPr>
           </c:marker>
           <c:cat>
-            <c:multiLvlStrRef>
+            <c:strRef>
               <c:f>Sheet1!$A$2:$A$5</c:f>
-              <c:multiLvlStrCache>
+              <c:strCache>
                 <c:ptCount val="4"/>
-                <c:lvl>
-                  <c:pt idx="0">
-                    <c:v>1</c:v>
-                  </c:pt>
-                  <c:pt idx="1">
-                    <c:v>3</c:v>
-                  </c:pt>
-                  <c:pt idx="2">
-                    <c:v>5</c:v>
-                  </c:pt>
-                  <c:pt idx="3">
-                    <c:v>10</c:v>
-                  </c:pt>
-                </c:lvl>
-              </c:multiLvlStrCache>
-            </c:multiLvlStrRef>
+                <c:pt idx="0">
+                  <c:v>1</c:v>
+                </c:pt>
+                <c:pt idx="1">
+                  <c:v>3</c:v>
+                </c:pt>
+                <c:pt idx="2">
+                  <c:v>5</c:v>
+                </c:pt>
+                <c:pt idx="3">
+                  <c:v>10</c:v>
+                </c:pt>
+              </c:strCache>
+            </c:strRef>
           </c:cat>
           <c:val>
             <c:numRef>
@@ -660,21 +628,26 @@
                 <c:formatCode>General</c:formatCode>
                 <c:ptCount val="4"/>
                 <c:pt idx="0">
-                  <c:v>0.475</c:v>
+                  <c:v>0.47499999999999998</c:v>
                 </c:pt>
                 <c:pt idx="1">
                   <c:v>0.7</c:v>
                 </c:pt>
                 <c:pt idx="2">
-                  <c:v>0.725</c:v>
+                  <c:v>0.72499999999999998</c:v>
                 </c:pt>
                 <c:pt idx="3">
-                  <c:v>0.775</c:v>
+                  <c:v>0.77500000000000002</c:v>
                 </c:pt>
               </c:numCache>
             </c:numRef>
           </c:val>
           <c:smooth val="0"/>
+          <c:extLst>
+            <c:ext xmlns:c16="http://schemas.microsoft.com/office/drawing/2014/chart" uri="{C3380CC4-5D6E-409C-BE32-E72D297353CC}">
+              <c16:uniqueId val="{00000001-A1E7-6D4F-A415-51E957160EA8}"/>
+            </c:ext>
+          </c:extLst>
         </c:ser>
         <c:ser>
           <c:idx val="2"/>
@@ -691,9 +664,6 @@
             </c:strRef>
           </c:tx>
           <c:spPr>
-            <a:solidFill>
-              <a:srgbClr val="0B3B45"/>
-            </a:solidFill>
             <a:ln w="38100" cap="flat">
               <a:solidFill>
                 <a:srgbClr val="0B3B45"/>
@@ -703,31 +673,6 @@
             </a:ln>
             <a:effectLst/>
           </c:spPr>
-          <c:invertIfNegative val="0"/>
-          <c:dLbls>
-            <c:numFmt formatCode="#,##0" sourceLinked="0"/>
-            <c:txPr>
-              <a:bodyPr/>
-              <a:lstStyle/>
-              <a:p>
-                <a:pPr>
-                  <a:defRPr b="0" i="0" strike="noStrike" sz="1200" u="none">
-                    <a:solidFill>
-                      <a:srgbClr val="000000"/>
-                    </a:solidFill>
-                    <a:latin typeface="Arial"/>
-                  </a:defRPr>
-                </a:pPr>
-              </a:p>
-            </c:txPr>
-            <c:showLegendKey val="0"/>
-            <c:showVal val="0"/>
-            <c:showCatName val="0"/>
-            <c:showSerName val="0"/>
-            <c:showPercent val="0"/>
-            <c:showBubbleSize val="0"/>
-            <c:showLeaderLines val="0"/>
-          </c:dLbls>
           <c:marker>
             <c:symbol val="circle"/>
             <c:size val="6"/>
@@ -746,26 +691,24 @@
             </c:spPr>
           </c:marker>
           <c:cat>
-            <c:multiLvlStrRef>
+            <c:strRef>
               <c:f>Sheet1!$A$2:$A$5</c:f>
-              <c:multiLvlStrCache>
+              <c:strCache>
                 <c:ptCount val="4"/>
-                <c:lvl>
-                  <c:pt idx="0">
-                    <c:v>1</c:v>
-                  </c:pt>
-                  <c:pt idx="1">
-                    <c:v>3</c:v>
-                  </c:pt>
-                  <c:pt idx="2">
-                    <c:v>5</c:v>
-                  </c:pt>
-                  <c:pt idx="3">
-                    <c:v>10</c:v>
-                  </c:pt>
-                </c:lvl>
-              </c:multiLvlStrCache>
-            </c:multiLvlStrRef>
+                <c:pt idx="0">
+                  <c:v>1</c:v>
+                </c:pt>
+                <c:pt idx="1">
+                  <c:v>3</c:v>
+                </c:pt>
+                <c:pt idx="2">
+                  <c:v>5</c:v>
+                </c:pt>
+                <c:pt idx="3">
+                  <c:v>10</c:v>
+                </c:pt>
+              </c:strCache>
+            </c:strRef>
           </c:cat>
           <c:val>
             <c:numRef>
@@ -774,7 +717,7 @@
                 <c:formatCode>General</c:formatCode>
                 <c:ptCount val="4"/>
                 <c:pt idx="0">
-                  <c:v>0.55</c:v>
+                  <c:v>0.55000000000000004</c:v>
                 </c:pt>
                 <c:pt idx="1">
                   <c:v>0.75</c:v>
@@ -789,35 +732,24 @@
             </c:numRef>
           </c:val>
           <c:smooth val="0"/>
+          <c:extLst>
+            <c:ext xmlns:c16="http://schemas.microsoft.com/office/drawing/2014/chart" uri="{C3380CC4-5D6E-409C-BE32-E72D297353CC}">
+              <c16:uniqueId val="{00000002-A1E7-6D4F-A415-51E957160EA8}"/>
+            </c:ext>
+          </c:extLst>
         </c:ser>
         <c:dLbls>
-          <c:numFmt formatCode="#,##0" sourceLinked="0"/>
-          <c:txPr>
-            <a:bodyPr/>
-            <a:lstStyle/>
-            <a:p>
-              <a:pPr>
-                <a:defRPr b="0" i="0" strike="noStrike" sz="1200" u="none">
-                  <a:solidFill>
-                    <a:srgbClr val="000000"/>
-                  </a:solidFill>
-                  <a:latin typeface="Arial"/>
-                </a:defRPr>
-              </a:pPr>
-            </a:p>
-          </c:txPr>
           <c:showLegendKey val="0"/>
           <c:showVal val="0"/>
           <c:showCatName val="0"/>
           <c:showSerName val="0"/>
           <c:showPercent val="0"/>
           <c:showBubbleSize val="0"/>
-          <c:showLeaderLines val="0"/>
         </c:dLbls>
         <c:marker val="1"/>
+        <c:smooth val="0"/>
         <c:axId val="2094734554"/>
         <c:axId val="2094734552"/>
-        <c:axId val="2094734556"/>
       </c:lineChart>
       <c:catAx>
         <c:axId val="2094734554"/>
@@ -858,6 +790,7 @@
         <c:crosses val="autoZero"/>
         <c:auto val="1"/>
         <c:lblAlgn val="ctr"/>
+        <c:lblOffset val="100"/>
         <c:noMultiLvlLbl val="1"/>
       </c:catAx>
       <c:valAx>
@@ -940,6 +873,7 @@
     </c:legend>
     <c:plotVisOnly val="1"/>
     <c:dispBlanksAs val="span"/>
+    <c:showDLblsOverMax val="1"/>
   </c:chart>
   <c:spPr>
     <a:noFill/>
@@ -976,234 +910,10 @@
           <a:chExt cx="0" cy="0"/>
         </a:xfrm>
       </p:grpSpPr>
-      <p:sp>
-        <p:nvSpPr>
-          <p:cNvPr id="2" name="Header Placeholder 1"/>
-          <p:cNvSpPr>
-            <a:spLocks noGrp="1"/>
-          </p:cNvSpPr>
-          <p:nvPr>
-            <p:ph type="hdr" sz="quarter"/>
-          </p:nvPr>
-        </p:nvSpPr>
-        <p:spPr>
-          <a:xfrm>
-            <a:off x="0" y="0"/>
-            <a:ext cx="2971800" cy="458788"/>
-          </a:xfrm>
-          <a:prstGeom prst="rect">
-            <a:avLst/>
-          </a:prstGeom>
-        </p:spPr>
-        <p:txBody>
-          <a:bodyPr vert="horz" lIns="91440" tIns="45720" rIns="91440" bIns="45720" rtlCol="0"/>
-          <a:lstStyle>
-            <a:lvl1pPr algn="l">
-              <a:defRPr sz="1200"/>
-            </a:lvl1pPr>
-          </a:lstStyle>
-          <a:p>
-            <a:endParaRPr lang="en-US"/>
-          </a:p>
-        </p:txBody>
-      </p:sp>
-      <p:sp>
-        <p:nvSpPr>
-          <p:cNvPr id="3" name="Date Placeholder 2"/>
-          <p:cNvSpPr>
-            <a:spLocks noGrp="1"/>
-          </p:cNvSpPr>
-          <p:nvPr>
-            <p:ph type="dt" idx="1"/>
-          </p:nvPr>
-        </p:nvSpPr>
-        <p:spPr>
-          <a:xfrm>
-            <a:off x="3884613" y="0"/>
-            <a:ext cx="2971800" cy="458788"/>
-          </a:xfrm>
-          <a:prstGeom prst="rect">
-            <a:avLst/>
-          </a:prstGeom>
-        </p:spPr>
-        <p:txBody>
-          <a:bodyPr vert="horz" lIns="91440" tIns="45720" rIns="91440" bIns="45720" rtlCol="0"/>
-          <a:lstStyle>
-            <a:lvl1pPr algn="r">
-              <a:defRPr sz="1200"/>
-            </a:lvl1pPr>
-          </a:lstStyle>
-          <a:p>
-            <a:fld id="{5282F153-3F37-0F45-9E97-73ACFA13230C}" type="datetimeFigureOut">
-              <a:rPr lang="en-US"/>
-              <a:t>7/23/19</a:t>
-            </a:fld>
-            <a:endParaRPr lang="en-US"/>
-          </a:p>
-        </p:txBody>
-      </p:sp>
-      <p:sp>
-        <p:nvSpPr>
-          <p:cNvPr id="4" name="Slide Image Placeholder 3"/>
-          <p:cNvSpPr>
-            <a:spLocks noGrp="1" noRot="1" noChangeAspect="1"/>
-          </p:cNvSpPr>
-          <p:nvPr>
-            <p:ph type="sldImg" idx="2"/>
-          </p:nvPr>
-        </p:nvSpPr>
-        <p:spPr>
-          <a:xfrm>
-            <a:off x="685800" y="1143000"/>
-            <a:ext cx="5486400" cy="3086100"/>
-          </a:xfrm>
-          <a:prstGeom prst="rect">
-            <a:avLst/>
-          </a:prstGeom>
-          <a:noFill/>
-          <a:ln w="12700">
-            <a:solidFill>
-              <a:prstClr val="black"/>
-            </a:solidFill>
-          </a:ln>
-        </p:spPr>
-        <p:txBody>
-          <a:bodyPr vert="horz" lIns="91440" tIns="45720" rIns="91440" bIns="45720" rtlCol="0" anchor="ctr"/>
-          <a:lstStyle/>
-          <a:p>
-            <a:endParaRPr lang="en-US"/>
-          </a:p>
-        </p:txBody>
-      </p:sp>
-      <p:sp>
-        <p:nvSpPr>
-          <p:cNvPr id="5" name="Notes Placeholder 4"/>
-          <p:cNvSpPr>
-            <a:spLocks noGrp="1"/>
-          </p:cNvSpPr>
-          <p:nvPr>
-            <p:ph type="body" sz="quarter" idx="3"/>
-          </p:nvPr>
-        </p:nvSpPr>
-        <p:spPr>
-          <a:xfrm>
-            <a:off x="685800" y="4400550"/>
-            <a:ext cx="5486400" cy="3600450"/>
-          </a:xfrm>
-          <a:prstGeom prst="rect">
-            <a:avLst/>
-          </a:prstGeom>
-        </p:spPr>
-        <p:txBody>
-          <a:bodyPr vert="horz" lIns="91440" tIns="45720" rIns="91440" bIns="45720" rtlCol="0"/>
-          <a:lstStyle/>
-          <a:p>
-            <a:pPr lvl="0"/>
-            <a:r>
-              <a:rPr lang="en-US"/>
-              <a:t>Click to edit Master text styles</a:t>
-            </a:r>
-          </a:p>
-          <a:p>
-            <a:pPr lvl="1"/>
-            <a:r>
-              <a:rPr lang="en-US"/>
-              <a:t>Second level</a:t>
-            </a:r>
-          </a:p>
-          <a:p>
-            <a:pPr lvl="2"/>
-            <a:r>
-              <a:rPr lang="en-US"/>
-              <a:t>Third level</a:t>
-            </a:r>
-          </a:p>
-          <a:p>
-            <a:pPr lvl="3"/>
-            <a:r>
-              <a:rPr lang="en-US"/>
-              <a:t>Fourth level</a:t>
-            </a:r>
-          </a:p>
-          <a:p>
-            <a:pPr lvl="4"/>
-            <a:r>
-              <a:rPr lang="en-US"/>
-              <a:t>Fifth level</a:t>
-            </a:r>
-          </a:p>
-        </p:txBody>
-      </p:sp>
-      <p:sp>
-        <p:nvSpPr>
-          <p:cNvPr id="6" name="Footer Placeholder 5"/>
-          <p:cNvSpPr>
-            <a:spLocks noGrp="1"/>
-          </p:cNvSpPr>
-          <p:nvPr>
-            <p:ph type="ftr" sz="quarter" idx="4"/>
-          </p:nvPr>
-        </p:nvSpPr>
-        <p:spPr>
-          <a:xfrm>
-            <a:off x="0" y="8685213"/>
-            <a:ext cx="2971800" cy="458787"/>
-          </a:xfrm>
-          <a:prstGeom prst="rect">
-            <a:avLst/>
-          </a:prstGeom>
-        </p:spPr>
-        <p:txBody>
-          <a:bodyPr vert="horz" lIns="91440" tIns="45720" rIns="91440" bIns="45720" rtlCol="0" anchor="b"/>
-          <a:lstStyle>
-            <a:lvl1pPr algn="l">
-              <a:defRPr sz="1200"/>
-            </a:lvl1pPr>
-          </a:lstStyle>
-          <a:p>
-            <a:endParaRPr lang="en-US"/>
-          </a:p>
-        </p:txBody>
-      </p:sp>
-      <p:sp>
-        <p:nvSpPr>
-          <p:cNvPr id="7" name="Slide Number Placeholder 6"/>
-          <p:cNvSpPr>
-            <a:spLocks noGrp="1"/>
-          </p:cNvSpPr>
-          <p:nvPr>
-            <p:ph type="sldNum" sz="quarter" idx="5"/>
-          </p:nvPr>
-        </p:nvSpPr>
-        <p:spPr>
-          <a:xfrm>
-            <a:off x="3884613" y="8685213"/>
-            <a:ext cx="2971800" cy="458787"/>
-          </a:xfrm>
-          <a:prstGeom prst="rect">
-            <a:avLst/>
-          </a:prstGeom>
-        </p:spPr>
-        <p:txBody>
-          <a:bodyPr vert="horz" lIns="91440" tIns="45720" rIns="91440" bIns="45720" rtlCol="0" anchor="b"/>
-          <a:lstStyle>
-            <a:lvl1pPr algn="r">
-              <a:defRPr sz="1200"/>
-            </a:lvl1pPr>
-          </a:lstStyle>
-          <a:p>
-            <a:fld id="{CE5E9CC1-C706-0F49-92D6-E571CC5EEA8F}" type="slidenum">
-              <a:rPr lang="en-US"/>
-              <a:t>‹#›</a:t>
-            </a:fld>
-            <a:endParaRPr lang="en-US"/>
-          </a:p>
-        </p:txBody>
-      </p:sp>
     </p:spTree>
     <p:extLst>
       <p:ext uri="{BB962C8B-B14F-4D97-AF65-F5344CB8AC3E}">
-        <p14:creationId xmlns:p14="http://schemas.microsoft.com/office/powerpoint/2010/main" val="1024086991"/>
+        <p14:creationId xmlns:p14="http://schemas.microsoft.com/office/powerpoint/2010/main" val="532429435"/>
       </p:ext>
     </p:extLst>
   </p:cSld>
@@ -1347,10 +1057,6 @@
           <a:bodyPr/>
           <a:lstStyle/>
           <a:p>
-            <a:r>
-              <a:rPr lang="en-US" dirty="0"/>
-              <a:t/>
-            </a:r>
             <a:endParaRPr lang="en-US" dirty="0"/>
           </a:p>
         </p:txBody>
@@ -1435,10 +1141,6 @@
           <a:bodyPr/>
           <a:lstStyle/>
           <a:p>
-            <a:r>
-              <a:rPr lang="en-US" dirty="0"/>
-              <a:t/>
-            </a:r>
             <a:endParaRPr lang="en-US" dirty="0"/>
           </a:p>
         </p:txBody>
@@ -1523,10 +1225,6 @@
           <a:bodyPr/>
           <a:lstStyle/>
           <a:p>
-            <a:r>
-              <a:rPr lang="en-US" dirty="0"/>
-              <a:t/>
-            </a:r>
             <a:endParaRPr lang="en-US" dirty="0"/>
           </a:p>
         </p:txBody>
@@ -1611,10 +1309,6 @@
           <a:bodyPr/>
           <a:lstStyle/>
           <a:p>
-            <a:r>
-              <a:rPr lang="en-US" dirty="0"/>
-              <a:t/>
-            </a:r>
             <a:endParaRPr lang="en-US" dirty="0"/>
           </a:p>
         </p:txBody>
@@ -1699,10 +1393,6 @@
           <a:bodyPr/>
           <a:lstStyle/>
           <a:p>
-            <a:r>
-              <a:rPr lang="en-US" dirty="0"/>
-              <a:t/>
-            </a:r>
             <a:endParaRPr lang="en-US" dirty="0"/>
           </a:p>
         </p:txBody>
@@ -1787,10 +1477,6 @@
           <a:bodyPr/>
           <a:lstStyle/>
           <a:p>
-            <a:r>
-              <a:rPr lang="en-US" dirty="0"/>
-              <a:t/>
-            </a:r>
             <a:endParaRPr lang="en-US" dirty="0"/>
           </a:p>
         </p:txBody>
@@ -1875,10 +1561,6 @@
           <a:bodyPr/>
           <a:lstStyle/>
           <a:p>
-            <a:r>
-              <a:rPr lang="en-US" dirty="0"/>
-              <a:t/>
-            </a:r>
             <a:endParaRPr lang="en-US" dirty="0"/>
           </a:p>
         </p:txBody>
@@ -1963,10 +1645,6 @@
           <a:bodyPr/>
           <a:lstStyle/>
           <a:p>
-            <a:r>
-              <a:rPr lang="en-US" dirty="0"/>
-              <a:t/>
-            </a:r>
             <a:endParaRPr lang="en-US" dirty="0"/>
           </a:p>
         </p:txBody>
@@ -2051,10 +1729,6 @@
           <a:bodyPr/>
           <a:lstStyle/>
           <a:p>
-            <a:r>
-              <a:rPr lang="en-US" dirty="0"/>
-              <a:t/>
-            </a:r>
             <a:endParaRPr lang="en-US" dirty="0"/>
           </a:p>
         </p:txBody>
@@ -2139,10 +1813,6 @@
           <a:bodyPr/>
           <a:lstStyle/>
           <a:p>
-            <a:r>
-              <a:rPr lang="en-US" dirty="0"/>
-              <a:t/>
-            </a:r>
             <a:endParaRPr lang="en-US" dirty="0"/>
           </a:p>
         </p:txBody>
@@ -2227,10 +1897,6 @@
           <a:bodyPr/>
           <a:lstStyle/>
           <a:p>
-            <a:r>
-              <a:rPr lang="en-US" dirty="0"/>
-              <a:t/>
-            </a:r>
             <a:endParaRPr lang="en-US" dirty="0"/>
           </a:p>
         </p:txBody>
@@ -2315,10 +1981,6 @@
           <a:bodyPr/>
           <a:lstStyle/>
           <a:p>
-            <a:r>
-              <a:rPr lang="en-US" dirty="0"/>
-              <a:t/>
-            </a:r>
             <a:endParaRPr lang="en-US" dirty="0"/>
           </a:p>
         </p:txBody>
@@ -2403,10 +2065,6 @@
           <a:bodyPr/>
           <a:lstStyle/>
           <a:p>
-            <a:r>
-              <a:rPr lang="en-US" dirty="0"/>
-              <a:t/>
-            </a:r>
             <a:endParaRPr lang="en-US" dirty="0"/>
           </a:p>
         </p:txBody>
@@ -2491,10 +2149,6 @@
           <a:bodyPr/>
           <a:lstStyle/>
           <a:p>
-            <a:r>
-              <a:rPr lang="en-US" dirty="0"/>
-              <a:t/>
-            </a:r>
             <a:endParaRPr lang="en-US" dirty="0"/>
           </a:p>
         </p:txBody>
@@ -2579,10 +2233,6 @@
           <a:bodyPr/>
           <a:lstStyle/>
           <a:p>
-            <a:r>
-              <a:rPr lang="en-US" dirty="0"/>
-              <a:t/>
-            </a:r>
             <a:endParaRPr lang="en-US" dirty="0"/>
           </a:p>
         </p:txBody>
@@ -2667,10 +2317,6 @@
           <a:bodyPr/>
           <a:lstStyle/>
           <a:p>
-            <a:r>
-              <a:rPr lang="en-US" dirty="0"/>
-              <a:t/>
-            </a:r>
             <a:endParaRPr lang="en-US" dirty="0"/>
           </a:p>
         </p:txBody>
@@ -2755,10 +2401,6 @@
           <a:bodyPr/>
           <a:lstStyle/>
           <a:p>
-            <a:r>
-              <a:rPr lang="en-US" dirty="0"/>
-              <a:t/>
-            </a:r>
             <a:endParaRPr lang="en-US" dirty="0"/>
           </a:p>
         </p:txBody>
@@ -2843,10 +2485,6 @@
           <a:bodyPr/>
           <a:lstStyle/>
           <a:p>
-            <a:r>
-              <a:rPr lang="en-US" dirty="0"/>
-              <a:t/>
-            </a:r>
             <a:endParaRPr lang="en-US" dirty="0"/>
           </a:p>
         </p:txBody>
@@ -2931,10 +2569,6 @@
           <a:bodyPr/>
           <a:lstStyle/>
           <a:p>
-            <a:r>
-              <a:rPr lang="en-US" dirty="0"/>
-              <a:t/>
-            </a:r>
             <a:endParaRPr lang="en-US" dirty="0"/>
           </a:p>
         </p:txBody>
@@ -3008,6 +2642,11 @@
 <file path=ppt/slideMasters/slideMaster1.xml><?xml version="1.0" encoding="utf-8"?>
 <p:sldMaster xmlns:a="http://schemas.openxmlformats.org/drawingml/2006/main" xmlns:r="http://schemas.openxmlformats.org/officeDocument/2006/relationships" xmlns:p="http://schemas.openxmlformats.org/presentationml/2006/main">
   <p:cSld>
+    <p:bg>
+      <p:bgRef idx="1001">
+        <a:schemeClr val="bg1"/>
+      </p:bgRef>
+    </p:bg>
     <p:spTree>
       <p:nvGrpSpPr>
         <p:cNvPr id="1" name=""/>
@@ -3290,6 +2929,7 @@
         <a:solidFill>
           <a:srgbClr val="0B3B45"/>
         </a:solidFill>
+        <a:effectLst/>
       </p:bgPr>
     </p:bg>
     <p:spTree>
@@ -3329,6 +2969,13 @@
             <a:prstDash val="solid"/>
           </a:ln>
         </p:spPr>
+        <p:txBody>
+          <a:bodyPr/>
+          <a:lstStyle/>
+          <a:p>
+            <a:endParaRPr lang="en-IL"/>
+          </a:p>
+        </p:txBody>
       </p:sp>
       <p:sp>
         <p:nvSpPr>
@@ -3353,6 +3000,13 @@
             <a:prstDash val="solid"/>
           </a:ln>
         </p:spPr>
+        <p:txBody>
+          <a:bodyPr/>
+          <a:lstStyle/>
+          <a:p>
+            <a:endParaRPr lang="en-IL"/>
+          </a:p>
+        </p:txBody>
       </p:sp>
       <p:sp>
         <p:nvSpPr>
@@ -3377,6 +3031,13 @@
             <a:prstDash val="solid"/>
           </a:ln>
         </p:spPr>
+        <p:txBody>
+          <a:bodyPr/>
+          <a:lstStyle/>
+          <a:p>
+            <a:endParaRPr lang="en-IL"/>
+          </a:p>
+        </p:txBody>
       </p:sp>
       <p:sp>
         <p:nvSpPr>
@@ -3401,6 +3062,13 @@
             <a:prstDash val="solid"/>
           </a:ln>
         </p:spPr>
+        <p:txBody>
+          <a:bodyPr/>
+          <a:lstStyle/>
+          <a:p>
+            <a:endParaRPr lang="en-IL"/>
+          </a:p>
+        </p:txBody>
       </p:sp>
       <p:sp>
         <p:nvSpPr>
@@ -3421,24 +3089,31 @@
           </a:solidFill>
           <a:ln/>
           <a:effectLst>
-            <a:outerShdw sx="100000" sy="100000" kx="0" ky="0" algn="bl" rotWithShape="0" blurRad="76200" dist="25400" dir="5400000">
+            <a:outerShdw blurRad="76200" dist="25400" dir="5400000" algn="bl" rotWithShape="0">
               <a:srgbClr val="000000">
                 <a:alpha val="12000"/>
               </a:srgbClr>
             </a:outerShdw>
           </a:effectLst>
         </p:spPr>
+        <p:txBody>
+          <a:bodyPr/>
+          <a:lstStyle/>
+          <a:p>
+            <a:endParaRPr lang="en-IL"/>
+          </a:p>
+        </p:txBody>
       </p:sp>
       <p:pic>
         <p:nvPicPr>
-          <p:cNvPr id="7" name="Image 0" descr="preencoded.png">    </p:cNvPr>
+          <p:cNvPr id="7" name="Image 0" descr="preencoded.png"/>
           <p:cNvPicPr>
             <a:picLocks noChangeAspect="1"/>
           </p:cNvPicPr>
           <p:nvPr/>
         </p:nvPicPr>
         <p:blipFill>
-          <a:blip r:embed="rId1"/>
+          <a:blip r:embed="rId3"/>
           <a:stretch>
             <a:fillRect/>
           </a:stretch>
@@ -3474,7 +3149,7 @@
           <a:bodyPr wrap="square" lIns="0" tIns="0" rIns="0" bIns="0" rtlCol="0" anchor="ctr"/>
           <a:lstStyle/>
           <a:p>
-            <a:pPr rtl="1" algn="r" indent="0" marL="0">
+            <a:pPr marL="0" indent="0" algn="r" rtl="1">
               <a:buNone/>
             </a:pPr>
             <a:r>
@@ -3513,7 +3188,7 @@
           <a:bodyPr wrap="square" lIns="0" tIns="0" rIns="0" bIns="0" rtlCol="0" anchor="ctr"/>
           <a:lstStyle/>
           <a:p>
-            <a:pPr rtl="1" algn="r" indent="0" marL="0">
+            <a:pPr marL="0" indent="0" algn="r" rtl="1">
               <a:buNone/>
             </a:pPr>
             <a:r>
@@ -3552,7 +3227,7 @@
           <a:bodyPr wrap="square" lIns="0" tIns="0" rIns="0" bIns="0" rtlCol="0" anchor="ctr"/>
           <a:lstStyle/>
           <a:p>
-            <a:pPr rtl="1" algn="r" indent="0" marL="0">
+            <a:pPr marL="0" indent="0" algn="r" rtl="1">
               <a:buNone/>
             </a:pPr>
             <a:r>
@@ -3591,7 +3266,7 @@
           <a:bodyPr wrap="square" lIns="0" tIns="0" rIns="0" bIns="0" rtlCol="0" anchor="ctr"/>
           <a:lstStyle/>
           <a:p>
-            <a:pPr rtl="1" algn="r" indent="0" marL="0">
+            <a:pPr marL="0" indent="0" algn="r" rtl="1">
               <a:lnSpc>
                 <a:spcPct val="115000"/>
               </a:lnSpc>
@@ -3634,6 +3309,13 @@
             <a:prstDash val="solid"/>
           </a:ln>
         </p:spPr>
+        <p:txBody>
+          <a:bodyPr/>
+          <a:lstStyle/>
+          <a:p>
+            <a:endParaRPr lang="en-IL"/>
+          </a:p>
+        </p:txBody>
       </p:sp>
       <p:sp>
         <p:nvSpPr>
@@ -3656,7 +3338,7 @@
           <a:bodyPr wrap="square" lIns="0" tIns="0" rIns="0" bIns="0" rtlCol="0" anchor="ctr"/>
           <a:lstStyle/>
           <a:p>
-            <a:pPr algn="r" indent="0" marL="0">
+            <a:pPr marL="0" indent="0" algn="r">
               <a:buNone/>
             </a:pPr>
             <a:r>
@@ -3670,9 +3352,6 @@
               </a:rPr>
               <a:t>יניק גוטיה</a:t>
             </a:r>
-            <a:pPr algn="r" indent="0" marL="0">
-              <a:buNone/>
-            </a:pPr>
             <a:r>
               <a:rPr lang="en-US" sz="1400" dirty="0">
                 <a:solidFill>
@@ -3704,6 +3383,7 @@
         <a:solidFill>
           <a:srgbClr val="FFFFFF"/>
         </a:solidFill>
+        <a:effectLst/>
       </p:bgPr>
     </p:bg>
     <p:spTree>
@@ -3741,6 +3421,13 @@
             <a:prstDash val="solid"/>
           </a:ln>
         </p:spPr>
+        <p:txBody>
+          <a:bodyPr/>
+          <a:lstStyle/>
+          <a:p>
+            <a:endParaRPr lang="en-IL"/>
+          </a:p>
+        </p:txBody>
       </p:sp>
       <p:sp>
         <p:nvSpPr>
@@ -3761,6 +3448,13 @@
           </a:solidFill>
           <a:ln/>
         </p:spPr>
+        <p:txBody>
+          <a:bodyPr/>
+          <a:lstStyle/>
+          <a:p>
+            <a:endParaRPr lang="en-IL"/>
+          </a:p>
+        </p:txBody>
       </p:sp>
       <p:sp>
         <p:nvSpPr>
@@ -3783,11 +3477,11 @@
           <a:bodyPr wrap="square" lIns="0" tIns="0" rIns="0" bIns="0" rtlCol="0" anchor="ctr"/>
           <a:lstStyle/>
           <a:p>
-            <a:pPr rtl="1" algn="r" indent="0" marL="0">
+            <a:pPr marL="0" indent="0" algn="r" rtl="1">
               <a:buNone/>
             </a:pPr>
             <a:r>
-              <a:rPr lang="en-US" sz="1200" b="1" spc="100" kern="0" dirty="0">
+              <a:rPr lang="en-US" sz="1200" b="1" kern="0" spc="100" dirty="0">
                 <a:solidFill>
                   <a:srgbClr val="0E8A8F"/>
                 </a:solidFill>
@@ -3822,7 +3516,7 @@
           <a:bodyPr wrap="square" lIns="0" tIns="0" rIns="0" bIns="0" rtlCol="0" anchor="ctr"/>
           <a:lstStyle/>
           <a:p>
-            <a:pPr rtl="1" algn="r" indent="0" marL="0">
+            <a:pPr marL="0" indent="0" algn="r" rtl="1">
               <a:buNone/>
             </a:pPr>
             <a:r>
@@ -3861,7 +3555,7 @@
           <a:bodyPr wrap="square" lIns="0" tIns="0" rIns="0" bIns="0" rtlCol="0" anchor="ctr"/>
           <a:lstStyle/>
           <a:p>
-            <a:pPr rtl="1" algn="l" indent="0" marL="0">
+            <a:pPr marL="0" indent="0" algn="l" rtl="1">
               <a:buNone/>
             </a:pPr>
             <a:r>
@@ -3905,13 +3599,20 @@
             <a:prstDash val="solid"/>
           </a:ln>
           <a:effectLst>
-            <a:outerShdw sx="100000" sy="100000" kx="0" ky="0" algn="bl" rotWithShape="0" blurRad="76200" dist="25400" dir="5400000">
+            <a:outerShdw blurRad="76200" dist="25400" dir="5400000" algn="bl" rotWithShape="0">
               <a:srgbClr val="000000">
                 <a:alpha val="12000"/>
               </a:srgbClr>
             </a:outerShdw>
           </a:effectLst>
         </p:spPr>
+        <p:txBody>
+          <a:bodyPr/>
+          <a:lstStyle/>
+          <a:p>
+            <a:endParaRPr lang="en-IL"/>
+          </a:p>
+        </p:txBody>
       </p:sp>
       <p:sp>
         <p:nvSpPr>
@@ -3932,24 +3633,31 @@
           </a:solidFill>
           <a:ln/>
           <a:effectLst>
-            <a:outerShdw sx="100000" sy="100000" kx="0" ky="0" algn="bl" rotWithShape="0" blurRad="76200" dist="25400" dir="5400000">
+            <a:outerShdw blurRad="76200" dist="25400" dir="5400000" algn="bl" rotWithShape="0">
               <a:srgbClr val="000000">
                 <a:alpha val="12000"/>
               </a:srgbClr>
             </a:outerShdw>
           </a:effectLst>
         </p:spPr>
+        <p:txBody>
+          <a:bodyPr/>
+          <a:lstStyle/>
+          <a:p>
+            <a:endParaRPr lang="en-IL"/>
+          </a:p>
+        </p:txBody>
       </p:sp>
       <p:pic>
         <p:nvPicPr>
-          <p:cNvPr id="9" name="Image 0" descr="preencoded.png">    </p:cNvPr>
+          <p:cNvPr id="9" name="Image 0" descr="preencoded.png"/>
           <p:cNvPicPr>
             <a:picLocks noChangeAspect="1"/>
           </p:cNvPicPr>
           <p:nvPr/>
         </p:nvPicPr>
         <p:blipFill>
-          <a:blip r:embed="rId1"/>
+          <a:blip r:embed="rId3"/>
           <a:stretch>
             <a:fillRect/>
           </a:stretch>
@@ -3985,7 +3693,7 @@
           <a:bodyPr wrap="square" lIns="0" tIns="0" rIns="0" bIns="0" rtlCol="0" anchor="ctr"/>
           <a:lstStyle/>
           <a:p>
-            <a:pPr rtl="1" algn="l" indent="0" marL="0">
+            <a:pPr marL="0" indent="0" algn="l" rtl="1">
               <a:buNone/>
             </a:pPr>
             <a:r>
@@ -4029,6 +3737,13 @@
             <a:prstDash val="solid"/>
           </a:ln>
         </p:spPr>
+        <p:txBody>
+          <a:bodyPr/>
+          <a:lstStyle/>
+          <a:p>
+            <a:endParaRPr lang="en-IL"/>
+          </a:p>
+        </p:txBody>
       </p:sp>
       <p:sp>
         <p:nvSpPr>
@@ -4051,7 +3766,7 @@
           <a:bodyPr wrap="square" lIns="0" tIns="0" rIns="0" bIns="0" rtlCol="0" anchor="ctr"/>
           <a:lstStyle/>
           <a:p>
-            <a:pPr rtl="1" algn="ctr" indent="0" marL="0">
+            <a:pPr marL="0" indent="0" algn="ctr" rtl="1">
               <a:buNone/>
             </a:pPr>
             <a:r>
@@ -4090,7 +3805,7 @@
           <a:bodyPr wrap="square" lIns="0" tIns="0" rIns="0" bIns="0" rtlCol="0" anchor="ctr"/>
           <a:lstStyle/>
           <a:p>
-            <a:pPr algn="l" marL="342900" indent="-342900">
+            <a:pPr marL="342900" indent="-342900" algn="l">
               <a:lnSpc>
                 <a:spcPct val="125000"/>
               </a:lnSpc>
@@ -4111,7 +3826,7 @@
             <a:endParaRPr lang="en-US" sz="1400" dirty="0"/>
           </a:p>
           <a:p>
-            <a:pPr algn="l" marL="342900" indent="-342900">
+            <a:pPr marL="342900" indent="-342900" algn="l">
               <a:lnSpc>
                 <a:spcPct val="125000"/>
               </a:lnSpc>
@@ -4132,7 +3847,7 @@
             <a:endParaRPr lang="en-US" sz="1400" dirty="0"/>
           </a:p>
           <a:p>
-            <a:pPr algn="l" marL="342900" indent="-342900">
+            <a:pPr marL="342900" indent="-342900" algn="l">
               <a:lnSpc>
                 <a:spcPct val="125000"/>
               </a:lnSpc>
@@ -4180,13 +3895,20 @@
             <a:prstDash val="solid"/>
           </a:ln>
           <a:effectLst>
-            <a:outerShdw sx="100000" sy="100000" kx="0" ky="0" algn="bl" rotWithShape="0" blurRad="76200" dist="25400" dir="5400000">
+            <a:outerShdw blurRad="76200" dist="25400" dir="5400000" algn="bl" rotWithShape="0">
               <a:srgbClr val="000000">
                 <a:alpha val="12000"/>
               </a:srgbClr>
             </a:outerShdw>
           </a:effectLst>
         </p:spPr>
+        <p:txBody>
+          <a:bodyPr/>
+          <a:lstStyle/>
+          <a:p>
+            <a:endParaRPr lang="en-IL"/>
+          </a:p>
+        </p:txBody>
       </p:sp>
       <p:sp>
         <p:nvSpPr>
@@ -4207,24 +3929,31 @@
           </a:solidFill>
           <a:ln/>
           <a:effectLst>
-            <a:outerShdw sx="100000" sy="100000" kx="0" ky="0" algn="bl" rotWithShape="0" blurRad="76200" dist="25400" dir="5400000">
+            <a:outerShdw blurRad="76200" dist="25400" dir="5400000" algn="bl" rotWithShape="0">
               <a:srgbClr val="000000">
                 <a:alpha val="12000"/>
               </a:srgbClr>
             </a:outerShdw>
           </a:effectLst>
         </p:spPr>
+        <p:txBody>
+          <a:bodyPr/>
+          <a:lstStyle/>
+          <a:p>
+            <a:endParaRPr lang="en-IL"/>
+          </a:p>
+        </p:txBody>
       </p:sp>
       <p:pic>
         <p:nvPicPr>
-          <p:cNvPr id="16" name="Image 1" descr="preencoded.png">    </p:cNvPr>
+          <p:cNvPr id="16" name="Image 1" descr="preencoded.png"/>
           <p:cNvPicPr>
             <a:picLocks noChangeAspect="1"/>
           </p:cNvPicPr>
           <p:nvPr/>
         </p:nvPicPr>
         <p:blipFill>
-          <a:blip r:embed="rId2"/>
+          <a:blip r:embed="rId4"/>
           <a:stretch>
             <a:fillRect/>
           </a:stretch>
@@ -4260,7 +3989,7 @@
           <a:bodyPr wrap="square" lIns="0" tIns="0" rIns="0" bIns="0" rtlCol="0" anchor="ctr"/>
           <a:lstStyle/>
           <a:p>
-            <a:pPr rtl="1" algn="l" indent="0" marL="0">
+            <a:pPr marL="0" indent="0" algn="l" rtl="1">
               <a:buNone/>
             </a:pPr>
             <a:r>
@@ -4299,7 +4028,7 @@
           <a:bodyPr wrap="square" lIns="0" tIns="0" rIns="0" bIns="0" rtlCol="0" anchor="ctr"/>
           <a:lstStyle/>
           <a:p>
-            <a:pPr rtl="1" algn="r" indent="0" marL="0">
+            <a:pPr marL="0" indent="0" algn="r" rtl="1">
               <a:buNone/>
             </a:pPr>
             <a:r>
@@ -4338,7 +4067,7 @@
           <a:bodyPr wrap="square" lIns="0" tIns="0" rIns="0" bIns="0" rtlCol="0" anchor="ctr"/>
           <a:lstStyle/>
           <a:p>
-            <a:pPr rtl="1" algn="l" indent="0" marL="0">
+            <a:pPr marL="0" indent="0" algn="l" rtl="1">
               <a:buNone/>
             </a:pPr>
             <a:r>
@@ -4377,7 +4106,7 @@
           <a:bodyPr wrap="square" lIns="0" tIns="0" rIns="0" bIns="0" rtlCol="0" anchor="ctr"/>
           <a:lstStyle/>
           <a:p>
-            <a:pPr rtl="1" algn="r" indent="0" marL="0">
+            <a:pPr marL="0" indent="0" algn="r" rtl="1">
               <a:buNone/>
             </a:pPr>
             <a:r>
@@ -4416,7 +4145,7 @@
           <a:bodyPr wrap="square" lIns="0" tIns="0" rIns="0" bIns="0" rtlCol="0" anchor="ctr"/>
           <a:lstStyle/>
           <a:p>
-            <a:pPr rtl="1" algn="l" indent="0" marL="0">
+            <a:pPr marL="0" indent="0" algn="l" rtl="1">
               <a:buNone/>
             </a:pPr>
             <a:r>
@@ -4455,7 +4184,7 @@
           <a:bodyPr wrap="square" lIns="0" tIns="0" rIns="0" bIns="0" rtlCol="0" anchor="ctr"/>
           <a:lstStyle/>
           <a:p>
-            <a:pPr rtl="1" algn="r" indent="0" marL="0">
+            <a:pPr marL="0" indent="0" algn="r" rtl="1">
               <a:buNone/>
             </a:pPr>
             <a:r>
@@ -4494,7 +4223,7 @@
           <a:bodyPr wrap="square" lIns="0" tIns="0" rIns="0" bIns="0" rtlCol="0" anchor="ctr"/>
           <a:lstStyle/>
           <a:p>
-            <a:pPr rtl="1" algn="l" indent="0" marL="0">
+            <a:pPr marL="0" indent="0" algn="l" rtl="1">
               <a:buNone/>
             </a:pPr>
             <a:r>
@@ -4533,7 +4262,7 @@
           <a:bodyPr wrap="square" lIns="0" tIns="0" rIns="0" bIns="0" rtlCol="0" anchor="ctr"/>
           <a:lstStyle/>
           <a:p>
-            <a:pPr rtl="1" algn="r" indent="0" marL="0">
+            <a:pPr marL="0" indent="0" algn="r" rtl="1">
               <a:buNone/>
             </a:pPr>
             <a:r>
@@ -4572,7 +4301,7 @@
           <a:bodyPr wrap="square" lIns="0" tIns="0" rIns="0" bIns="0" rtlCol="0" anchor="ctr"/>
           <a:lstStyle/>
           <a:p>
-            <a:pPr rtl="1" algn="l" indent="0" marL="0">
+            <a:pPr marL="0" indent="0" algn="l" rtl="1">
               <a:buNone/>
             </a:pPr>
             <a:r>
@@ -4611,7 +4340,7 @@
           <a:bodyPr wrap="square" lIns="0" tIns="0" rIns="0" bIns="0" rtlCol="0" anchor="ctr"/>
           <a:lstStyle/>
           <a:p>
-            <a:pPr rtl="1" algn="l" indent="0" marL="0">
+            <a:pPr marL="0" indent="0" algn="l" rtl="1">
               <a:buNone/>
             </a:pPr>
             <a:r>
@@ -4645,6 +4374,7 @@
         <a:solidFill>
           <a:srgbClr val="FFFFFF"/>
         </a:solidFill>
+        <a:effectLst/>
       </p:bgPr>
     </p:bg>
     <p:spTree>
@@ -4682,6 +4412,13 @@
             <a:prstDash val="solid"/>
           </a:ln>
         </p:spPr>
+        <p:txBody>
+          <a:bodyPr/>
+          <a:lstStyle/>
+          <a:p>
+            <a:endParaRPr lang="en-IL"/>
+          </a:p>
+        </p:txBody>
       </p:sp>
       <p:sp>
         <p:nvSpPr>
@@ -4702,6 +4439,13 @@
           </a:solidFill>
           <a:ln/>
         </p:spPr>
+        <p:txBody>
+          <a:bodyPr/>
+          <a:lstStyle/>
+          <a:p>
+            <a:endParaRPr lang="en-IL"/>
+          </a:p>
+        </p:txBody>
       </p:sp>
       <p:sp>
         <p:nvSpPr>
@@ -4724,11 +4468,11 @@
           <a:bodyPr wrap="square" lIns="0" tIns="0" rIns="0" bIns="0" rtlCol="0" anchor="ctr"/>
           <a:lstStyle/>
           <a:p>
-            <a:pPr rtl="1" algn="r" indent="0" marL="0">
+            <a:pPr marL="0" indent="0" algn="r" rtl="1">
               <a:buNone/>
             </a:pPr>
             <a:r>
-              <a:rPr lang="en-US" sz="1200" b="1" spc="100" kern="0" dirty="0">
+              <a:rPr lang="en-US" sz="1200" b="1" kern="0" spc="100" dirty="0">
                 <a:solidFill>
                   <a:srgbClr val="0E8A8F"/>
                 </a:solidFill>
@@ -4763,7 +4507,7 @@
           <a:bodyPr wrap="square" lIns="0" tIns="0" rIns="0" bIns="0" rtlCol="0" anchor="ctr"/>
           <a:lstStyle/>
           <a:p>
-            <a:pPr rtl="1" algn="r" indent="0" marL="0">
+            <a:pPr marL="0" indent="0" algn="r" rtl="1">
               <a:buNone/>
             </a:pPr>
             <a:r>
@@ -4802,7 +4546,7 @@
           <a:bodyPr wrap="square" lIns="0" tIns="0" rIns="0" bIns="0" rtlCol="0" anchor="ctr"/>
           <a:lstStyle/>
           <a:p>
-            <a:pPr rtl="1" algn="l" indent="0" marL="0">
+            <a:pPr marL="0" indent="0" algn="l" rtl="1">
               <a:buNone/>
             </a:pPr>
             <a:r>
@@ -4841,7 +4585,7 @@
           <a:bodyPr wrap="square" lIns="0" tIns="0" rIns="0" bIns="0" rtlCol="0" anchor="ctr"/>
           <a:lstStyle/>
           <a:p>
-            <a:pPr rtl="1" algn="l" indent="0" marL="0">
+            <a:pPr marL="0" indent="0" algn="l" rtl="1">
               <a:buNone/>
             </a:pPr>
             <a:r>
@@ -4861,7 +4605,7 @@
       </p:sp>
       <p:graphicFrame>
         <p:nvGraphicFramePr>
-          <p:cNvPr id="8" name="Chart 0" descr=""/>
+          <p:cNvPr id="8" name="Chart 0"/>
           <p:cNvGraphicFramePr/>
           <p:nvPr/>
         </p:nvGraphicFramePr>
@@ -4869,9 +4613,9 @@
           <a:off x="304495" y="1920240"/>
           <a:ext cx="5577840" cy="4114800"/>
         </p:xfrm>
-        <a:graphic xmlns:a="http://schemas.openxmlformats.org/drawingml/2006/main">
+        <a:graphic>
           <a:graphicData uri="http://schemas.openxmlformats.org/drawingml/2006/chart">
-            <c:chart xmlns:c="http://schemas.openxmlformats.org/drawingml/2006/chart" r:id="rId1"/>
+            <c:chart xmlns:c="http://schemas.openxmlformats.org/drawingml/2006/chart" xmlns:r="http://schemas.openxmlformats.org/officeDocument/2006/relationships" r:id="rId3"/>
           </a:graphicData>
         </a:graphic>
       </p:graphicFrame>
@@ -4898,13 +4642,55 @@
             <a:tbl>
               <a:tblPr/>
               <a:tblGrid>
-                <a:gridCol w="594360"/>
-                <a:gridCol w="640080"/>
-                <a:gridCol w="640080"/>
-                <a:gridCol w="685800"/>
-                <a:gridCol w="640080"/>
-                <a:gridCol w="640080"/>
-                <a:gridCol w="1554480"/>
+                <a:gridCol w="594360">
+                  <a:extLst>
+                    <a:ext uri="{9D8B030D-6E8A-4147-A177-3AD203B41FA5}">
+                      <a16:colId xmlns:a16="http://schemas.microsoft.com/office/drawing/2014/main" val="20000"/>
+                    </a:ext>
+                  </a:extLst>
+                </a:gridCol>
+                <a:gridCol w="640080">
+                  <a:extLst>
+                    <a:ext uri="{9D8B030D-6E8A-4147-A177-3AD203B41FA5}">
+                      <a16:colId xmlns:a16="http://schemas.microsoft.com/office/drawing/2014/main" val="20001"/>
+                    </a:ext>
+                  </a:extLst>
+                </a:gridCol>
+                <a:gridCol w="640080">
+                  <a:extLst>
+                    <a:ext uri="{9D8B030D-6E8A-4147-A177-3AD203B41FA5}">
+                      <a16:colId xmlns:a16="http://schemas.microsoft.com/office/drawing/2014/main" val="20002"/>
+                    </a:ext>
+                  </a:extLst>
+                </a:gridCol>
+                <a:gridCol w="685800">
+                  <a:extLst>
+                    <a:ext uri="{9D8B030D-6E8A-4147-A177-3AD203B41FA5}">
+                      <a16:colId xmlns:a16="http://schemas.microsoft.com/office/drawing/2014/main" val="20003"/>
+                    </a:ext>
+                  </a:extLst>
+                </a:gridCol>
+                <a:gridCol w="640080">
+                  <a:extLst>
+                    <a:ext uri="{9D8B030D-6E8A-4147-A177-3AD203B41FA5}">
+                      <a16:colId xmlns:a16="http://schemas.microsoft.com/office/drawing/2014/main" val="20004"/>
+                    </a:ext>
+                  </a:extLst>
+                </a:gridCol>
+                <a:gridCol w="640080">
+                  <a:extLst>
+                    <a:ext uri="{9D8B030D-6E8A-4147-A177-3AD203B41FA5}">
+                      <a16:colId xmlns:a16="http://schemas.microsoft.com/office/drawing/2014/main" val="20005"/>
+                    </a:ext>
+                  </a:extLst>
+                </a:gridCol>
+                <a:gridCol w="1554480">
+                  <a:extLst>
+                    <a:ext uri="{9D8B030D-6E8A-4147-A177-3AD203B41FA5}">
+                      <a16:colId xmlns:a16="http://schemas.microsoft.com/office/drawing/2014/main" val="20006"/>
+                    </a:ext>
+                  </a:extLst>
+                </a:gridCol>
               </a:tblGrid>
               <a:tr h="566928">
                 <a:tc>
@@ -4912,7 +4698,7 @@
                     <a:bodyPr/>
                     <a:lstStyle/>
                     <a:p>
-                      <a:pPr algn="ctr" indent="0" marL="0">
+                      <a:pPr marL="0" indent="0" algn="ctr">
                         <a:buNone/>
                       </a:pPr>
                       <a:r>
@@ -4933,7 +4719,7 @@
                       </a:endParaRPr>
                     </a:p>
                   </a:txBody>
-                  <a:tcPr marL="91440" marR="91440" marT="45720" marB="45720" anchor="ctr">
+                  <a:tcPr anchor="ctr">
                     <a:lnL w="6350" cap="flat" cmpd="sng" algn="ctr">
                       <a:solidFill>
                         <a:srgbClr val="E2ECEC"/>
@@ -4980,7 +4766,7 @@
                     <a:bodyPr/>
                     <a:lstStyle/>
                     <a:p>
-                      <a:pPr algn="ctr" indent="0" marL="0">
+                      <a:pPr marL="0" indent="0" algn="ctr">
                         <a:buNone/>
                       </a:pPr>
                       <a:r>
@@ -5001,7 +4787,7 @@
                       </a:endParaRPr>
                     </a:p>
                   </a:txBody>
-                  <a:tcPr marL="91440" marR="91440" marT="45720" marB="45720" anchor="ctr">
+                  <a:tcPr anchor="ctr">
                     <a:lnL w="6350" cap="flat" cmpd="sng" algn="ctr">
                       <a:solidFill>
                         <a:srgbClr val="E2ECEC"/>
@@ -5048,7 +4834,7 @@
                     <a:bodyPr/>
                     <a:lstStyle/>
                     <a:p>
-                      <a:pPr algn="ctr" indent="0" marL="0">
+                      <a:pPr marL="0" indent="0" algn="ctr">
                         <a:buNone/>
                       </a:pPr>
                       <a:r>
@@ -5069,7 +4855,7 @@
                       </a:endParaRPr>
                     </a:p>
                   </a:txBody>
-                  <a:tcPr marL="91440" marR="91440" marT="45720" marB="45720" anchor="ctr">
+                  <a:tcPr anchor="ctr">
                     <a:lnL w="6350" cap="flat" cmpd="sng" algn="ctr">
                       <a:solidFill>
                         <a:srgbClr val="E2ECEC"/>
@@ -5116,7 +4902,7 @@
                     <a:bodyPr/>
                     <a:lstStyle/>
                     <a:p>
-                      <a:pPr algn="ctr" indent="0" marL="0">
+                      <a:pPr marL="0" indent="0" algn="ctr">
                         <a:buNone/>
                       </a:pPr>
                       <a:r>
@@ -5137,7 +4923,7 @@
                       </a:endParaRPr>
                     </a:p>
                   </a:txBody>
-                  <a:tcPr marL="91440" marR="91440" marT="45720" marB="45720" anchor="ctr">
+                  <a:tcPr anchor="ctr">
                     <a:lnL w="6350" cap="flat" cmpd="sng" algn="ctr">
                       <a:solidFill>
                         <a:srgbClr val="E2ECEC"/>
@@ -5184,7 +4970,7 @@
                     <a:bodyPr/>
                     <a:lstStyle/>
                     <a:p>
-                      <a:pPr algn="ctr" indent="0" marL="0">
+                      <a:pPr marL="0" indent="0" algn="ctr">
                         <a:buNone/>
                       </a:pPr>
                       <a:r>
@@ -5205,7 +4991,7 @@
                       </a:endParaRPr>
                     </a:p>
                   </a:txBody>
-                  <a:tcPr marL="91440" marR="91440" marT="45720" marB="45720" anchor="ctr">
+                  <a:tcPr anchor="ctr">
                     <a:lnL w="6350" cap="flat" cmpd="sng" algn="ctr">
                       <a:solidFill>
                         <a:srgbClr val="E2ECEC"/>
@@ -5252,7 +5038,7 @@
                     <a:bodyPr/>
                     <a:lstStyle/>
                     <a:p>
-                      <a:pPr algn="ctr" indent="0" marL="0">
+                      <a:pPr marL="0" indent="0" algn="ctr">
                         <a:buNone/>
                       </a:pPr>
                       <a:r>
@@ -5273,7 +5059,7 @@
                       </a:endParaRPr>
                     </a:p>
                   </a:txBody>
-                  <a:tcPr marL="91440" marR="91440" marT="45720" marB="45720" anchor="ctr">
+                  <a:tcPr anchor="ctr">
                     <a:lnL w="6350" cap="flat" cmpd="sng" algn="ctr">
                       <a:solidFill>
                         <a:srgbClr val="E2ECEC"/>
@@ -5320,7 +5106,7 @@
                     <a:bodyPr/>
                     <a:lstStyle/>
                     <a:p>
-                      <a:pPr algn="ctr" indent="0" marL="0">
+                      <a:pPr marL="0" indent="0" algn="ctr">
                         <a:buNone/>
                       </a:pPr>
                       <a:endParaRPr lang="en-US" sz="1200" dirty="0">
@@ -5330,7 +5116,7 @@
                       </a:endParaRPr>
                     </a:p>
                   </a:txBody>
-                  <a:tcPr marL="91440" marR="91440" marT="45720" marB="45720" anchor="ctr">
+                  <a:tcPr anchor="ctr">
                     <a:lnL w="6350" cap="flat" cmpd="sng" algn="ctr">
                       <a:solidFill>
                         <a:srgbClr val="E2ECEC"/>
@@ -5372,6 +5158,11 @@
                     </a:solidFill>
                   </a:tcPr>
                 </a:tc>
+                <a:extLst>
+                  <a:ext uri="{0D108BD9-81ED-4DB2-BD59-A6C34878D82A}">
+                    <a16:rowId xmlns:a16="http://schemas.microsoft.com/office/drawing/2014/main" val="10000"/>
+                  </a:ext>
+                </a:extLst>
               </a:tr>
               <a:tr h="566928">
                 <a:tc>
@@ -5379,7 +5170,7 @@
                     <a:bodyPr/>
                     <a:lstStyle/>
                     <a:p>
-                      <a:pPr algn="ctr" indent="0" marL="0">
+                      <a:pPr marL="0" indent="0" algn="ctr">
                         <a:buNone/>
                       </a:pPr>
                       <a:r>
@@ -5400,7 +5191,7 @@
                       </a:endParaRPr>
                     </a:p>
                   </a:txBody>
-                  <a:tcPr marL="91440" marR="91440" marT="45720" marB="45720" anchor="ctr">
+                  <a:tcPr anchor="ctr">
                     <a:lnL w="6350" cap="flat" cmpd="sng" algn="ctr">
                       <a:solidFill>
                         <a:srgbClr val="E2ECEC"/>
@@ -5447,7 +5238,7 @@
                     <a:bodyPr/>
                     <a:lstStyle/>
                     <a:p>
-                      <a:pPr algn="ctr" indent="0" marL="0">
+                      <a:pPr marL="0" indent="0" algn="ctr">
                         <a:buNone/>
                       </a:pPr>
                       <a:r>
@@ -5468,7 +5259,7 @@
                       </a:endParaRPr>
                     </a:p>
                   </a:txBody>
-                  <a:tcPr marL="91440" marR="91440" marT="45720" marB="45720" anchor="ctr">
+                  <a:tcPr anchor="ctr">
                     <a:lnL w="6350" cap="flat" cmpd="sng" algn="ctr">
                       <a:solidFill>
                         <a:srgbClr val="E2ECEC"/>
@@ -5515,7 +5306,7 @@
                     <a:bodyPr/>
                     <a:lstStyle/>
                     <a:p>
-                      <a:pPr algn="ctr" indent="0" marL="0">
+                      <a:pPr marL="0" indent="0" algn="ctr">
                         <a:buNone/>
                       </a:pPr>
                       <a:r>
@@ -5536,7 +5327,7 @@
                       </a:endParaRPr>
                     </a:p>
                   </a:txBody>
-                  <a:tcPr marL="91440" marR="91440" marT="45720" marB="45720" anchor="ctr">
+                  <a:tcPr anchor="ctr">
                     <a:lnL w="6350" cap="flat" cmpd="sng" algn="ctr">
                       <a:solidFill>
                         <a:srgbClr val="E2ECEC"/>
@@ -5583,7 +5374,7 @@
                     <a:bodyPr/>
                     <a:lstStyle/>
                     <a:p>
-                      <a:pPr algn="ctr" indent="0" marL="0">
+                      <a:pPr marL="0" indent="0" algn="ctr">
                         <a:buNone/>
                       </a:pPr>
                       <a:r>
@@ -5604,7 +5395,7 @@
                       </a:endParaRPr>
                     </a:p>
                   </a:txBody>
-                  <a:tcPr marL="91440" marR="91440" marT="45720" marB="45720" anchor="ctr">
+                  <a:tcPr anchor="ctr">
                     <a:lnL w="6350" cap="flat" cmpd="sng" algn="ctr">
                       <a:solidFill>
                         <a:srgbClr val="E2ECEC"/>
@@ -5651,7 +5442,7 @@
                     <a:bodyPr/>
                     <a:lstStyle/>
                     <a:p>
-                      <a:pPr algn="ctr" indent="0" marL="0">
+                      <a:pPr marL="0" indent="0" algn="ctr">
                         <a:buNone/>
                       </a:pPr>
                       <a:r>
@@ -5672,7 +5463,7 @@
                       </a:endParaRPr>
                     </a:p>
                   </a:txBody>
-                  <a:tcPr marL="91440" marR="91440" marT="45720" marB="45720" anchor="ctr">
+                  <a:tcPr anchor="ctr">
                     <a:lnL w="6350" cap="flat" cmpd="sng" algn="ctr">
                       <a:solidFill>
                         <a:srgbClr val="E2ECEC"/>
@@ -5719,7 +5510,7 @@
                     <a:bodyPr/>
                     <a:lstStyle/>
                     <a:p>
-                      <a:pPr algn="ctr" indent="0" marL="0">
+                      <a:pPr marL="0" indent="0" algn="ctr">
                         <a:buNone/>
                       </a:pPr>
                       <a:r>
@@ -5740,7 +5531,7 @@
                       </a:endParaRPr>
                     </a:p>
                   </a:txBody>
-                  <a:tcPr marL="91440" marR="91440" marT="45720" marB="45720" anchor="ctr">
+                  <a:tcPr anchor="ctr">
                     <a:lnL w="6350" cap="flat" cmpd="sng" algn="ctr">
                       <a:solidFill>
                         <a:srgbClr val="E2ECEC"/>
@@ -5787,7 +5578,7 @@
                     <a:bodyPr/>
                     <a:lstStyle/>
                     <a:p>
-                      <a:pPr algn="r" indent="0" marL="0">
+                      <a:pPr marL="0" indent="0" algn="r">
                         <a:buNone/>
                       </a:pPr>
                       <a:r>
@@ -5808,7 +5599,7 @@
                       </a:endParaRPr>
                     </a:p>
                   </a:txBody>
-                  <a:tcPr marL="91440" marR="91440" marT="45720" marB="45720" anchor="ctr">
+                  <a:tcPr anchor="ctr">
                     <a:lnL w="6350" cap="flat" cmpd="sng" algn="ctr">
                       <a:solidFill>
                         <a:srgbClr val="E2ECEC"/>
@@ -5850,6 +5641,11 @@
                     </a:solidFill>
                   </a:tcPr>
                 </a:tc>
+                <a:extLst>
+                  <a:ext uri="{0D108BD9-81ED-4DB2-BD59-A6C34878D82A}">
+                    <a16:rowId xmlns:a16="http://schemas.microsoft.com/office/drawing/2014/main" val="10001"/>
+                  </a:ext>
+                </a:extLst>
               </a:tr>
               <a:tr h="566928">
                 <a:tc>
@@ -5857,7 +5653,7 @@
                     <a:bodyPr/>
                     <a:lstStyle/>
                     <a:p>
-                      <a:pPr algn="ctr" indent="0" marL="0">
+                      <a:pPr marL="0" indent="0" algn="ctr">
                         <a:buNone/>
                       </a:pPr>
                       <a:r>
@@ -5878,7 +5674,7 @@
                       </a:endParaRPr>
                     </a:p>
                   </a:txBody>
-                  <a:tcPr marL="91440" marR="91440" marT="45720" marB="45720" anchor="ctr">
+                  <a:tcPr anchor="ctr">
                     <a:lnL w="6350" cap="flat" cmpd="sng" algn="ctr">
                       <a:solidFill>
                         <a:srgbClr val="E2ECEC"/>
@@ -5925,7 +5721,7 @@
                     <a:bodyPr/>
                     <a:lstStyle/>
                     <a:p>
-                      <a:pPr algn="ctr" indent="0" marL="0">
+                      <a:pPr marL="0" indent="0" algn="ctr">
                         <a:buNone/>
                       </a:pPr>
                       <a:r>
@@ -5946,7 +5742,7 @@
                       </a:endParaRPr>
                     </a:p>
                   </a:txBody>
-                  <a:tcPr marL="91440" marR="91440" marT="45720" marB="45720" anchor="ctr">
+                  <a:tcPr anchor="ctr">
                     <a:lnL w="6350" cap="flat" cmpd="sng" algn="ctr">
                       <a:solidFill>
                         <a:srgbClr val="E2ECEC"/>
@@ -5993,7 +5789,7 @@
                     <a:bodyPr/>
                     <a:lstStyle/>
                     <a:p>
-                      <a:pPr algn="ctr" indent="0" marL="0">
+                      <a:pPr marL="0" indent="0" algn="ctr">
                         <a:buNone/>
                       </a:pPr>
                       <a:r>
@@ -6014,7 +5810,7 @@
                       </a:endParaRPr>
                     </a:p>
                   </a:txBody>
-                  <a:tcPr marL="91440" marR="91440" marT="45720" marB="45720" anchor="ctr">
+                  <a:tcPr anchor="ctr">
                     <a:lnL w="6350" cap="flat" cmpd="sng" algn="ctr">
                       <a:solidFill>
                         <a:srgbClr val="E2ECEC"/>
@@ -6061,7 +5857,7 @@
                     <a:bodyPr/>
                     <a:lstStyle/>
                     <a:p>
-                      <a:pPr algn="ctr" indent="0" marL="0">
+                      <a:pPr marL="0" indent="0" algn="ctr">
                         <a:buNone/>
                       </a:pPr>
                       <a:r>
@@ -6082,7 +5878,7 @@
                       </a:endParaRPr>
                     </a:p>
                   </a:txBody>
-                  <a:tcPr marL="91440" marR="91440" marT="45720" marB="45720" anchor="ctr">
+                  <a:tcPr anchor="ctr">
                     <a:lnL w="6350" cap="flat" cmpd="sng" algn="ctr">
                       <a:solidFill>
                         <a:srgbClr val="E2ECEC"/>
@@ -6129,7 +5925,7 @@
                     <a:bodyPr/>
                     <a:lstStyle/>
                     <a:p>
-                      <a:pPr algn="ctr" indent="0" marL="0">
+                      <a:pPr marL="0" indent="0" algn="ctr">
                         <a:buNone/>
                       </a:pPr>
                       <a:r>
@@ -6150,7 +5946,7 @@
                       </a:endParaRPr>
                     </a:p>
                   </a:txBody>
-                  <a:tcPr marL="91440" marR="91440" marT="45720" marB="45720" anchor="ctr">
+                  <a:tcPr anchor="ctr">
                     <a:lnL w="6350" cap="flat" cmpd="sng" algn="ctr">
                       <a:solidFill>
                         <a:srgbClr val="E2ECEC"/>
@@ -6197,7 +5993,7 @@
                     <a:bodyPr/>
                     <a:lstStyle/>
                     <a:p>
-                      <a:pPr algn="ctr" indent="0" marL="0">
+                      <a:pPr marL="0" indent="0" algn="ctr">
                         <a:buNone/>
                       </a:pPr>
                       <a:r>
@@ -6218,7 +6014,7 @@
                       </a:endParaRPr>
                     </a:p>
                   </a:txBody>
-                  <a:tcPr marL="91440" marR="91440" marT="45720" marB="45720" anchor="ctr">
+                  <a:tcPr anchor="ctr">
                     <a:lnL w="6350" cap="flat" cmpd="sng" algn="ctr">
                       <a:solidFill>
                         <a:srgbClr val="E2ECEC"/>
@@ -6265,7 +6061,7 @@
                     <a:bodyPr/>
                     <a:lstStyle/>
                     <a:p>
-                      <a:pPr algn="r" indent="0" marL="0">
+                      <a:pPr marL="0" indent="0" algn="r">
                         <a:buNone/>
                       </a:pPr>
                       <a:r>
@@ -6286,7 +6082,7 @@
                       </a:endParaRPr>
                     </a:p>
                   </a:txBody>
-                  <a:tcPr marL="91440" marR="91440" marT="45720" marB="45720" anchor="ctr">
+                  <a:tcPr anchor="ctr">
                     <a:lnL w="6350" cap="flat" cmpd="sng" algn="ctr">
                       <a:solidFill>
                         <a:srgbClr val="E2ECEC"/>
@@ -6328,6 +6124,11 @@
                     </a:solidFill>
                   </a:tcPr>
                 </a:tc>
+                <a:extLst>
+                  <a:ext uri="{0D108BD9-81ED-4DB2-BD59-A6C34878D82A}">
+                    <a16:rowId xmlns:a16="http://schemas.microsoft.com/office/drawing/2014/main" val="10002"/>
+                  </a:ext>
+                </a:extLst>
               </a:tr>
               <a:tr h="566928">
                 <a:tc>
@@ -6335,7 +6136,7 @@
                     <a:bodyPr/>
                     <a:lstStyle/>
                     <a:p>
-                      <a:pPr algn="ctr" indent="0" marL="0">
+                      <a:pPr marL="0" indent="0" algn="ctr">
                         <a:buNone/>
                       </a:pPr>
                       <a:r>
@@ -6356,7 +6157,7 @@
                       </a:endParaRPr>
                     </a:p>
                   </a:txBody>
-                  <a:tcPr marL="91440" marR="91440" marT="45720" marB="45720" anchor="ctr">
+                  <a:tcPr anchor="ctr">
                     <a:lnL w="6350" cap="flat" cmpd="sng" algn="ctr">
                       <a:solidFill>
                         <a:srgbClr val="E2ECEC"/>
@@ -6403,7 +6204,7 @@
                     <a:bodyPr/>
                     <a:lstStyle/>
                     <a:p>
-                      <a:pPr algn="ctr" indent="0" marL="0">
+                      <a:pPr marL="0" indent="0" algn="ctr">
                         <a:buNone/>
                       </a:pPr>
                       <a:r>
@@ -6424,7 +6225,7 @@
                       </a:endParaRPr>
                     </a:p>
                   </a:txBody>
-                  <a:tcPr marL="91440" marR="91440" marT="45720" marB="45720" anchor="ctr">
+                  <a:tcPr anchor="ctr">
                     <a:lnL w="6350" cap="flat" cmpd="sng" algn="ctr">
                       <a:solidFill>
                         <a:srgbClr val="E2ECEC"/>
@@ -6471,7 +6272,7 @@
                     <a:bodyPr/>
                     <a:lstStyle/>
                     <a:p>
-                      <a:pPr algn="ctr" indent="0" marL="0">
+                      <a:pPr marL="0" indent="0" algn="ctr">
                         <a:buNone/>
                       </a:pPr>
                       <a:r>
@@ -6492,7 +6293,7 @@
                       </a:endParaRPr>
                     </a:p>
                   </a:txBody>
-                  <a:tcPr marL="91440" marR="91440" marT="45720" marB="45720" anchor="ctr">
+                  <a:tcPr anchor="ctr">
                     <a:lnL w="6350" cap="flat" cmpd="sng" algn="ctr">
                       <a:solidFill>
                         <a:srgbClr val="E2ECEC"/>
@@ -6539,7 +6340,7 @@
                     <a:bodyPr/>
                     <a:lstStyle/>
                     <a:p>
-                      <a:pPr algn="ctr" indent="0" marL="0">
+                      <a:pPr marL="0" indent="0" algn="ctr">
                         <a:buNone/>
                       </a:pPr>
                       <a:r>
@@ -6560,7 +6361,7 @@
                       </a:endParaRPr>
                     </a:p>
                   </a:txBody>
-                  <a:tcPr marL="91440" marR="91440" marT="45720" marB="45720" anchor="ctr">
+                  <a:tcPr anchor="ctr">
                     <a:lnL w="6350" cap="flat" cmpd="sng" algn="ctr">
                       <a:solidFill>
                         <a:srgbClr val="E2ECEC"/>
@@ -6607,7 +6408,7 @@
                     <a:bodyPr/>
                     <a:lstStyle/>
                     <a:p>
-                      <a:pPr algn="ctr" indent="0" marL="0">
+                      <a:pPr marL="0" indent="0" algn="ctr">
                         <a:buNone/>
                       </a:pPr>
                       <a:r>
@@ -6628,7 +6429,7 @@
                       </a:endParaRPr>
                     </a:p>
                   </a:txBody>
-                  <a:tcPr marL="91440" marR="91440" marT="45720" marB="45720" anchor="ctr">
+                  <a:tcPr anchor="ctr">
                     <a:lnL w="6350" cap="flat" cmpd="sng" algn="ctr">
                       <a:solidFill>
                         <a:srgbClr val="E2ECEC"/>
@@ -6675,7 +6476,7 @@
                     <a:bodyPr/>
                     <a:lstStyle/>
                     <a:p>
-                      <a:pPr algn="ctr" indent="0" marL="0">
+                      <a:pPr marL="0" indent="0" algn="ctr">
                         <a:buNone/>
                       </a:pPr>
                       <a:r>
@@ -6696,7 +6497,7 @@
                       </a:endParaRPr>
                     </a:p>
                   </a:txBody>
-                  <a:tcPr marL="91440" marR="91440" marT="45720" marB="45720" anchor="ctr">
+                  <a:tcPr anchor="ctr">
                     <a:lnL w="6350" cap="flat" cmpd="sng" algn="ctr">
                       <a:solidFill>
                         <a:srgbClr val="E2ECEC"/>
@@ -6743,7 +6544,7 @@
                     <a:bodyPr/>
                     <a:lstStyle/>
                     <a:p>
-                      <a:pPr algn="r" indent="0" marL="0">
+                      <a:pPr marL="0" indent="0" algn="r">
                         <a:buNone/>
                       </a:pPr>
                       <a:r>
@@ -6764,7 +6565,7 @@
                       </a:endParaRPr>
                     </a:p>
                   </a:txBody>
-                  <a:tcPr marL="91440" marR="91440" marT="45720" marB="45720" anchor="ctr">
+                  <a:tcPr anchor="ctr">
                     <a:lnL w="6350" cap="flat" cmpd="sng" algn="ctr">
                       <a:solidFill>
                         <a:srgbClr val="E2ECEC"/>
@@ -6806,6 +6607,11 @@
                     </a:solidFill>
                   </a:tcPr>
                 </a:tc>
+                <a:extLst>
+                  <a:ext uri="{0D108BD9-81ED-4DB2-BD59-A6C34878D82A}">
+                    <a16:rowId xmlns:a16="http://schemas.microsoft.com/office/drawing/2014/main" val="10003"/>
+                  </a:ext>
+                </a:extLst>
               </a:tr>
               <a:tr h="566928">
                 <a:tc>
@@ -6813,7 +6619,7 @@
                     <a:bodyPr/>
                     <a:lstStyle/>
                     <a:p>
-                      <a:pPr algn="ctr" indent="0" marL="0">
+                      <a:pPr marL="0" indent="0" algn="ctr">
                         <a:buNone/>
                       </a:pPr>
                       <a:r>
@@ -6834,7 +6640,7 @@
                       </a:endParaRPr>
                     </a:p>
                   </a:txBody>
-                  <a:tcPr marL="91440" marR="91440" marT="45720" marB="45720" anchor="ctr">
+                  <a:tcPr anchor="ctr">
                     <a:lnL w="6350" cap="flat" cmpd="sng" algn="ctr">
                       <a:solidFill>
                         <a:srgbClr val="E2ECEC"/>
@@ -6881,7 +6687,7 @@
                     <a:bodyPr/>
                     <a:lstStyle/>
                     <a:p>
-                      <a:pPr algn="ctr" indent="0" marL="0">
+                      <a:pPr marL="0" indent="0" algn="ctr">
                         <a:buNone/>
                       </a:pPr>
                       <a:r>
@@ -6902,7 +6708,7 @@
                       </a:endParaRPr>
                     </a:p>
                   </a:txBody>
-                  <a:tcPr marL="91440" marR="91440" marT="45720" marB="45720" anchor="ctr">
+                  <a:tcPr anchor="ctr">
                     <a:lnL w="6350" cap="flat" cmpd="sng" algn="ctr">
                       <a:solidFill>
                         <a:srgbClr val="E2ECEC"/>
@@ -6949,7 +6755,7 @@
                     <a:bodyPr/>
                     <a:lstStyle/>
                     <a:p>
-                      <a:pPr algn="ctr" indent="0" marL="0">
+                      <a:pPr marL="0" indent="0" algn="ctr">
                         <a:buNone/>
                       </a:pPr>
                       <a:r>
@@ -6970,7 +6776,7 @@
                       </a:endParaRPr>
                     </a:p>
                   </a:txBody>
-                  <a:tcPr marL="91440" marR="91440" marT="45720" marB="45720" anchor="ctr">
+                  <a:tcPr anchor="ctr">
                     <a:lnL w="6350" cap="flat" cmpd="sng" algn="ctr">
                       <a:solidFill>
                         <a:srgbClr val="E2ECEC"/>
@@ -7017,7 +6823,7 @@
                     <a:bodyPr/>
                     <a:lstStyle/>
                     <a:p>
-                      <a:pPr algn="ctr" indent="0" marL="0">
+                      <a:pPr marL="0" indent="0" algn="ctr">
                         <a:buNone/>
                       </a:pPr>
                       <a:r>
@@ -7038,7 +6844,7 @@
                       </a:endParaRPr>
                     </a:p>
                   </a:txBody>
-                  <a:tcPr marL="91440" marR="91440" marT="45720" marB="45720" anchor="ctr">
+                  <a:tcPr anchor="ctr">
                     <a:lnL w="6350" cap="flat" cmpd="sng" algn="ctr">
                       <a:solidFill>
                         <a:srgbClr val="E2ECEC"/>
@@ -7085,7 +6891,7 @@
                     <a:bodyPr/>
                     <a:lstStyle/>
                     <a:p>
-                      <a:pPr algn="ctr" indent="0" marL="0">
+                      <a:pPr marL="0" indent="0" algn="ctr">
                         <a:buNone/>
                       </a:pPr>
                       <a:r>
@@ -7106,7 +6912,7 @@
                       </a:endParaRPr>
                     </a:p>
                   </a:txBody>
-                  <a:tcPr marL="91440" marR="91440" marT="45720" marB="45720" anchor="ctr">
+                  <a:tcPr anchor="ctr">
                     <a:lnL w="6350" cap="flat" cmpd="sng" algn="ctr">
                       <a:solidFill>
                         <a:srgbClr val="E2ECEC"/>
@@ -7153,7 +6959,7 @@
                     <a:bodyPr/>
                     <a:lstStyle/>
                     <a:p>
-                      <a:pPr algn="ctr" indent="0" marL="0">
+                      <a:pPr marL="0" indent="0" algn="ctr">
                         <a:buNone/>
                       </a:pPr>
                       <a:r>
@@ -7174,7 +6980,7 @@
                       </a:endParaRPr>
                     </a:p>
                   </a:txBody>
-                  <a:tcPr marL="91440" marR="91440" marT="45720" marB="45720" anchor="ctr">
+                  <a:tcPr anchor="ctr">
                     <a:lnL w="6350" cap="flat" cmpd="sng" algn="ctr">
                       <a:solidFill>
                         <a:srgbClr val="E2ECEC"/>
@@ -7221,7 +7027,7 @@
                     <a:bodyPr/>
                     <a:lstStyle/>
                     <a:p>
-                      <a:pPr algn="r" indent="0" marL="0">
+                      <a:pPr marL="0" indent="0" algn="r">
                         <a:buNone/>
                       </a:pPr>
                       <a:r>
@@ -7242,7 +7048,7 @@
                       </a:endParaRPr>
                     </a:p>
                   </a:txBody>
-                  <a:tcPr marL="91440" marR="91440" marT="45720" marB="45720" anchor="ctr">
+                  <a:tcPr anchor="ctr">
                     <a:lnL w="6350" cap="flat" cmpd="sng" algn="ctr">
                       <a:solidFill>
                         <a:srgbClr val="E2ECEC"/>
@@ -7284,6 +7090,11 @@
                     </a:solidFill>
                   </a:tcPr>
                 </a:tc>
+                <a:extLst>
+                  <a:ext uri="{0D108BD9-81ED-4DB2-BD59-A6C34878D82A}">
+                    <a16:rowId xmlns:a16="http://schemas.microsoft.com/office/drawing/2014/main" val="10004"/>
+                  </a:ext>
+                </a:extLst>
               </a:tr>
               <a:tr h="566928">
                 <a:tc>
@@ -7291,7 +7102,7 @@
                     <a:bodyPr/>
                     <a:lstStyle/>
                     <a:p>
-                      <a:pPr algn="ctr" indent="0" marL="0">
+                      <a:pPr marL="0" indent="0" algn="ctr">
                         <a:buNone/>
                       </a:pPr>
                       <a:r>
@@ -7312,7 +7123,7 @@
                       </a:endParaRPr>
                     </a:p>
                   </a:txBody>
-                  <a:tcPr marL="91440" marR="91440" marT="45720" marB="45720" anchor="ctr">
+                  <a:tcPr anchor="ctr">
                     <a:lnL w="6350" cap="flat" cmpd="sng" algn="ctr">
                       <a:solidFill>
                         <a:srgbClr val="E2ECEC"/>
@@ -7359,7 +7170,7 @@
                     <a:bodyPr/>
                     <a:lstStyle/>
                     <a:p>
-                      <a:pPr algn="ctr" indent="0" marL="0">
+                      <a:pPr marL="0" indent="0" algn="ctr">
                         <a:buNone/>
                       </a:pPr>
                       <a:r>
@@ -7380,7 +7191,7 @@
                       </a:endParaRPr>
                     </a:p>
                   </a:txBody>
-                  <a:tcPr marL="91440" marR="91440" marT="45720" marB="45720" anchor="ctr">
+                  <a:tcPr anchor="ctr">
                     <a:lnL w="6350" cap="flat" cmpd="sng" algn="ctr">
                       <a:solidFill>
                         <a:srgbClr val="E2ECEC"/>
@@ -7427,7 +7238,7 @@
                     <a:bodyPr/>
                     <a:lstStyle/>
                     <a:p>
-                      <a:pPr algn="ctr" indent="0" marL="0">
+                      <a:pPr marL="0" indent="0" algn="ctr">
                         <a:buNone/>
                       </a:pPr>
                       <a:r>
@@ -7448,7 +7259,7 @@
                       </a:endParaRPr>
                     </a:p>
                   </a:txBody>
-                  <a:tcPr marL="91440" marR="91440" marT="45720" marB="45720" anchor="ctr">
+                  <a:tcPr anchor="ctr">
                     <a:lnL w="6350" cap="flat" cmpd="sng" algn="ctr">
                       <a:solidFill>
                         <a:srgbClr val="E2ECEC"/>
@@ -7495,7 +7306,7 @@
                     <a:bodyPr/>
                     <a:lstStyle/>
                     <a:p>
-                      <a:pPr algn="ctr" indent="0" marL="0">
+                      <a:pPr marL="0" indent="0" algn="ctr">
                         <a:buNone/>
                       </a:pPr>
                       <a:r>
@@ -7516,7 +7327,7 @@
                       </a:endParaRPr>
                     </a:p>
                   </a:txBody>
-                  <a:tcPr marL="91440" marR="91440" marT="45720" marB="45720" anchor="ctr">
+                  <a:tcPr anchor="ctr">
                     <a:lnL w="6350" cap="flat" cmpd="sng" algn="ctr">
                       <a:solidFill>
                         <a:srgbClr val="E2ECEC"/>
@@ -7563,7 +7374,7 @@
                     <a:bodyPr/>
                     <a:lstStyle/>
                     <a:p>
-                      <a:pPr algn="ctr" indent="0" marL="0">
+                      <a:pPr marL="0" indent="0" algn="ctr">
                         <a:buNone/>
                       </a:pPr>
                       <a:r>
@@ -7584,7 +7395,7 @@
                       </a:endParaRPr>
                     </a:p>
                   </a:txBody>
-                  <a:tcPr marL="91440" marR="91440" marT="45720" marB="45720" anchor="ctr">
+                  <a:tcPr anchor="ctr">
                     <a:lnL w="6350" cap="flat" cmpd="sng" algn="ctr">
                       <a:solidFill>
                         <a:srgbClr val="E2ECEC"/>
@@ -7631,7 +7442,7 @@
                     <a:bodyPr/>
                     <a:lstStyle/>
                     <a:p>
-                      <a:pPr algn="ctr" indent="0" marL="0">
+                      <a:pPr marL="0" indent="0" algn="ctr">
                         <a:buNone/>
                       </a:pPr>
                       <a:r>
@@ -7652,7 +7463,7 @@
                       </a:endParaRPr>
                     </a:p>
                   </a:txBody>
-                  <a:tcPr marL="91440" marR="91440" marT="45720" marB="45720" anchor="ctr">
+                  <a:tcPr anchor="ctr">
                     <a:lnL w="6350" cap="flat" cmpd="sng" algn="ctr">
                       <a:solidFill>
                         <a:srgbClr val="E2ECEC"/>
@@ -7699,7 +7510,7 @@
                     <a:bodyPr/>
                     <a:lstStyle/>
                     <a:p>
-                      <a:pPr algn="r" indent="0" marL="0">
+                      <a:pPr marL="0" indent="0" algn="r">
                         <a:buNone/>
                       </a:pPr>
                       <a:r>
@@ -7720,7 +7531,7 @@
                       </a:endParaRPr>
                     </a:p>
                   </a:txBody>
-                  <a:tcPr marL="91440" marR="91440" marT="45720" marB="45720" anchor="ctr">
+                  <a:tcPr anchor="ctr">
                     <a:lnL w="6350" cap="flat" cmpd="sng" algn="ctr">
                       <a:solidFill>
                         <a:srgbClr val="E2ECEC"/>
@@ -7762,6 +7573,11 @@
                     </a:solidFill>
                   </a:tcPr>
                 </a:tc>
+                <a:extLst>
+                  <a:ext uri="{0D108BD9-81ED-4DB2-BD59-A6C34878D82A}">
+                    <a16:rowId xmlns:a16="http://schemas.microsoft.com/office/drawing/2014/main" val="10005"/>
+                  </a:ext>
+                </a:extLst>
               </a:tr>
             </a:tbl>
           </a:graphicData>
@@ -7788,7 +7604,7 @@
           <a:bodyPr wrap="square" lIns="0" tIns="0" rIns="0" bIns="0" rtlCol="0" anchor="ctr"/>
           <a:lstStyle/>
           <a:p>
-            <a:pPr rtl="1" algn="l" indent="0" marL="0">
+            <a:pPr marL="0" indent="0" algn="l" rtl="1">
               <a:buNone/>
             </a:pPr>
             <a:r>
@@ -7822,6 +7638,7 @@
         <a:solidFill>
           <a:srgbClr val="0B3B45"/>
         </a:solidFill>
+        <a:effectLst/>
       </p:bgPr>
     </p:bg>
     <p:spTree>
@@ -7859,6 +7676,13 @@
             <a:prstDash val="solid"/>
           </a:ln>
         </p:spPr>
+        <p:txBody>
+          <a:bodyPr/>
+          <a:lstStyle/>
+          <a:p>
+            <a:endParaRPr lang="en-IL"/>
+          </a:p>
+        </p:txBody>
       </p:sp>
       <p:sp>
         <p:nvSpPr>
@@ -7879,6 +7703,13 @@
           </a:solidFill>
           <a:ln/>
         </p:spPr>
+        <p:txBody>
+          <a:bodyPr/>
+          <a:lstStyle/>
+          <a:p>
+            <a:endParaRPr lang="en-IL"/>
+          </a:p>
+        </p:txBody>
       </p:sp>
       <p:sp>
         <p:nvSpPr>
@@ -7901,7 +7732,7 @@
           <a:bodyPr wrap="square" lIns="0" tIns="0" rIns="0" bIns="0" rtlCol="0" anchor="ctr"/>
           <a:lstStyle/>
           <a:p>
-            <a:pPr rtl="1" algn="r" indent="0" marL="0">
+            <a:pPr marL="0" indent="0" algn="r" rtl="1">
               <a:buNone/>
             </a:pPr>
             <a:r>
@@ -7940,7 +7771,7 @@
           <a:bodyPr wrap="square" lIns="0" tIns="0" rIns="0" bIns="0" rtlCol="0" anchor="ctr"/>
           <a:lstStyle/>
           <a:p>
-            <a:pPr rtl="1" algn="r" indent="0" marL="0">
+            <a:pPr marL="0" indent="0" algn="r" rtl="1">
               <a:buNone/>
             </a:pPr>
             <a:r>
@@ -7984,13 +7815,20 @@
             <a:prstDash val="solid"/>
           </a:ln>
           <a:effectLst>
-            <a:outerShdw sx="100000" sy="100000" kx="0" ky="0" algn="bl" rotWithShape="0" blurRad="76200" dist="25400" dir="5400000">
+            <a:outerShdw blurRad="76200" dist="25400" dir="5400000" algn="bl" rotWithShape="0">
               <a:srgbClr val="000000">
                 <a:alpha val="12000"/>
               </a:srgbClr>
             </a:outerShdw>
           </a:effectLst>
         </p:spPr>
+        <p:txBody>
+          <a:bodyPr/>
+          <a:lstStyle/>
+          <a:p>
+            <a:endParaRPr lang="en-IL"/>
+          </a:p>
+        </p:txBody>
       </p:sp>
       <p:sp>
         <p:nvSpPr>
@@ -8011,24 +7849,31 @@
           </a:solidFill>
           <a:ln/>
           <a:effectLst>
-            <a:outerShdw sx="100000" sy="100000" kx="0" ky="0" algn="bl" rotWithShape="0" blurRad="76200" dist="25400" dir="5400000">
+            <a:outerShdw blurRad="76200" dist="25400" dir="5400000" algn="bl" rotWithShape="0">
               <a:srgbClr val="000000">
                 <a:alpha val="12000"/>
               </a:srgbClr>
             </a:outerShdw>
           </a:effectLst>
         </p:spPr>
+        <p:txBody>
+          <a:bodyPr/>
+          <a:lstStyle/>
+          <a:p>
+            <a:endParaRPr lang="en-IL"/>
+          </a:p>
+        </p:txBody>
       </p:sp>
       <p:pic>
         <p:nvPicPr>
-          <p:cNvPr id="8" name="Image 0" descr="preencoded.png">    </p:cNvPr>
+          <p:cNvPr id="8" name="Image 0" descr="preencoded.png"/>
           <p:cNvPicPr>
             <a:picLocks noChangeAspect="1"/>
           </p:cNvPicPr>
           <p:nvPr/>
         </p:nvPicPr>
         <p:blipFill>
-          <a:blip r:embed="rId1"/>
+          <a:blip r:embed="rId3"/>
           <a:stretch>
             <a:fillRect/>
           </a:stretch>
@@ -8064,7 +7909,7 @@
           <a:bodyPr wrap="square" lIns="0" tIns="0" rIns="0" bIns="0" rtlCol="0" anchor="ctr"/>
           <a:lstStyle/>
           <a:p>
-            <a:pPr rtl="1" algn="l" indent="0" marL="0">
+            <a:pPr marL="0" indent="0" algn="l" rtl="1">
               <a:buNone/>
             </a:pPr>
             <a:r>
@@ -8103,7 +7948,7 @@
           <a:bodyPr wrap="square" lIns="0" tIns="0" rIns="0" bIns="0" rtlCol="0" anchor="ctr"/>
           <a:lstStyle/>
           <a:p>
-            <a:pPr rtl="1" algn="l" indent="0" marL="0">
+            <a:pPr marL="0" indent="0" algn="l" rtl="1">
               <a:lnSpc>
                 <a:spcPct val="125000"/>
               </a:lnSpc>
@@ -8150,13 +7995,20 @@
             <a:prstDash val="solid"/>
           </a:ln>
           <a:effectLst>
-            <a:outerShdw sx="100000" sy="100000" kx="0" ky="0" algn="bl" rotWithShape="0" blurRad="76200" dist="25400" dir="5400000">
+            <a:outerShdw blurRad="76200" dist="25400" dir="5400000" algn="bl" rotWithShape="0">
               <a:srgbClr val="000000">
                 <a:alpha val="12000"/>
               </a:srgbClr>
             </a:outerShdw>
           </a:effectLst>
         </p:spPr>
+        <p:txBody>
+          <a:bodyPr/>
+          <a:lstStyle/>
+          <a:p>
+            <a:endParaRPr lang="en-IL"/>
+          </a:p>
+        </p:txBody>
       </p:sp>
       <p:sp>
         <p:nvSpPr>
@@ -8177,24 +8029,31 @@
           </a:solidFill>
           <a:ln/>
           <a:effectLst>
-            <a:outerShdw sx="100000" sy="100000" kx="0" ky="0" algn="bl" rotWithShape="0" blurRad="76200" dist="25400" dir="5400000">
+            <a:outerShdw blurRad="76200" dist="25400" dir="5400000" algn="bl" rotWithShape="0">
               <a:srgbClr val="000000">
                 <a:alpha val="12000"/>
               </a:srgbClr>
             </a:outerShdw>
           </a:effectLst>
         </p:spPr>
+        <p:txBody>
+          <a:bodyPr/>
+          <a:lstStyle/>
+          <a:p>
+            <a:endParaRPr lang="en-IL"/>
+          </a:p>
+        </p:txBody>
       </p:sp>
       <p:pic>
         <p:nvPicPr>
-          <p:cNvPr id="13" name="Image 1" descr="preencoded.png">    </p:cNvPr>
+          <p:cNvPr id="13" name="Image 1" descr="preencoded.png"/>
           <p:cNvPicPr>
             <a:picLocks noChangeAspect="1"/>
           </p:cNvPicPr>
           <p:nvPr/>
         </p:nvPicPr>
         <p:blipFill>
-          <a:blip r:embed="rId2"/>
+          <a:blip r:embed="rId4"/>
           <a:stretch>
             <a:fillRect/>
           </a:stretch>
@@ -8230,7 +8089,7 @@
           <a:bodyPr wrap="square" lIns="0" tIns="0" rIns="0" bIns="0" rtlCol="0" anchor="ctr"/>
           <a:lstStyle/>
           <a:p>
-            <a:pPr rtl="1" algn="l" indent="0" marL="0">
+            <a:pPr marL="0" indent="0" algn="l" rtl="1">
               <a:buNone/>
             </a:pPr>
             <a:r>
@@ -8269,7 +8128,7 @@
           <a:bodyPr wrap="square" lIns="0" tIns="0" rIns="0" bIns="0" rtlCol="0" anchor="ctr"/>
           <a:lstStyle/>
           <a:p>
-            <a:pPr rtl="1" algn="l" indent="0" marL="0">
+            <a:pPr marL="0" indent="0" algn="l" rtl="1">
               <a:lnSpc>
                 <a:spcPct val="125000"/>
               </a:lnSpc>
@@ -8316,13 +8175,20 @@
             <a:prstDash val="solid"/>
           </a:ln>
           <a:effectLst>
-            <a:outerShdw sx="100000" sy="100000" kx="0" ky="0" algn="bl" rotWithShape="0" blurRad="76200" dist="25400" dir="5400000">
+            <a:outerShdw blurRad="76200" dist="25400" dir="5400000" algn="bl" rotWithShape="0">
               <a:srgbClr val="000000">
                 <a:alpha val="12000"/>
               </a:srgbClr>
             </a:outerShdw>
           </a:effectLst>
         </p:spPr>
+        <p:txBody>
+          <a:bodyPr/>
+          <a:lstStyle/>
+          <a:p>
+            <a:endParaRPr lang="en-IL"/>
+          </a:p>
+        </p:txBody>
       </p:sp>
       <p:sp>
         <p:nvSpPr>
@@ -8343,24 +8209,31 @@
           </a:solidFill>
           <a:ln/>
           <a:effectLst>
-            <a:outerShdw sx="100000" sy="100000" kx="0" ky="0" algn="bl" rotWithShape="0" blurRad="76200" dist="25400" dir="5400000">
+            <a:outerShdw blurRad="76200" dist="25400" dir="5400000" algn="bl" rotWithShape="0">
               <a:srgbClr val="000000">
                 <a:alpha val="12000"/>
               </a:srgbClr>
             </a:outerShdw>
           </a:effectLst>
         </p:spPr>
+        <p:txBody>
+          <a:bodyPr/>
+          <a:lstStyle/>
+          <a:p>
+            <a:endParaRPr lang="en-IL"/>
+          </a:p>
+        </p:txBody>
       </p:sp>
       <p:pic>
         <p:nvPicPr>
-          <p:cNvPr id="18" name="Image 2" descr="preencoded.png">    </p:cNvPr>
+          <p:cNvPr id="18" name="Image 2" descr="preencoded.png"/>
           <p:cNvPicPr>
             <a:picLocks noChangeAspect="1"/>
           </p:cNvPicPr>
           <p:nvPr/>
         </p:nvPicPr>
         <p:blipFill>
-          <a:blip r:embed="rId3"/>
+          <a:blip r:embed="rId5"/>
           <a:stretch>
             <a:fillRect/>
           </a:stretch>
@@ -8396,7 +8269,7 @@
           <a:bodyPr wrap="square" lIns="0" tIns="0" rIns="0" bIns="0" rtlCol="0" anchor="ctr"/>
           <a:lstStyle/>
           <a:p>
-            <a:pPr rtl="1" algn="l" indent="0" marL="0">
+            <a:pPr marL="0" indent="0" algn="l" rtl="1">
               <a:buNone/>
             </a:pPr>
             <a:r>
@@ -8435,7 +8308,7 @@
           <a:bodyPr wrap="square" lIns="0" tIns="0" rIns="0" bIns="0" rtlCol="0" anchor="ctr"/>
           <a:lstStyle/>
           <a:p>
-            <a:pPr rtl="1" algn="l" indent="0" marL="0">
+            <a:pPr marL="0" indent="0" algn="l" rtl="1">
               <a:lnSpc>
                 <a:spcPct val="125000"/>
               </a:lnSpc>
@@ -8477,7 +8350,7 @@
           <a:bodyPr wrap="square" lIns="0" tIns="0" rIns="0" bIns="0" rtlCol="0" anchor="ctr"/>
           <a:lstStyle/>
           <a:p>
-            <a:pPr rtl="1" algn="l" indent="0" marL="0">
+            <a:pPr marL="0" indent="0" algn="l" rtl="1">
               <a:buNone/>
             </a:pPr>
             <a:r>
@@ -8511,6 +8384,7 @@
         <a:solidFill>
           <a:srgbClr val="FFFFFF"/>
         </a:solidFill>
+        <a:effectLst/>
       </p:bgPr>
     </p:bg>
     <p:spTree>
@@ -8548,6 +8422,13 @@
             <a:prstDash val="solid"/>
           </a:ln>
         </p:spPr>
+        <p:txBody>
+          <a:bodyPr/>
+          <a:lstStyle/>
+          <a:p>
+            <a:endParaRPr lang="en-IL"/>
+          </a:p>
+        </p:txBody>
       </p:sp>
       <p:sp>
         <p:nvSpPr>
@@ -8568,6 +8449,13 @@
           </a:solidFill>
           <a:ln/>
         </p:spPr>
+        <p:txBody>
+          <a:bodyPr/>
+          <a:lstStyle/>
+          <a:p>
+            <a:endParaRPr lang="en-IL"/>
+          </a:p>
+        </p:txBody>
       </p:sp>
       <p:sp>
         <p:nvSpPr>
@@ -8590,11 +8478,11 @@
           <a:bodyPr wrap="square" lIns="0" tIns="0" rIns="0" bIns="0" rtlCol="0" anchor="ctr"/>
           <a:lstStyle/>
           <a:p>
-            <a:pPr rtl="1" algn="r" indent="0" marL="0">
+            <a:pPr marL="0" indent="0" algn="r" rtl="1">
               <a:buNone/>
             </a:pPr>
             <a:r>
-              <a:rPr lang="en-US" sz="1200" b="1" spc="100" kern="0" dirty="0">
+              <a:rPr lang="en-US" sz="1200" b="1" kern="0" spc="100" dirty="0">
                 <a:solidFill>
                   <a:srgbClr val="0E8A8F"/>
                 </a:solidFill>
@@ -8629,7 +8517,7 @@
           <a:bodyPr wrap="square" lIns="0" tIns="0" rIns="0" bIns="0" rtlCol="0" anchor="ctr"/>
           <a:lstStyle/>
           <a:p>
-            <a:pPr rtl="1" algn="r" indent="0" marL="0">
+            <a:pPr marL="0" indent="0" algn="r" rtl="1">
               <a:buNone/>
             </a:pPr>
             <a:r>
@@ -8668,7 +8556,7 @@
           <a:bodyPr wrap="square" lIns="0" tIns="0" rIns="0" bIns="0" rtlCol="0" anchor="ctr"/>
           <a:lstStyle/>
           <a:p>
-            <a:pPr rtl="1" algn="l" indent="0" marL="0">
+            <a:pPr marL="0" indent="0" algn="l" rtl="1">
               <a:buNone/>
             </a:pPr>
             <a:r>
@@ -8707,7 +8595,7 @@
           <a:bodyPr wrap="square" lIns="0" tIns="0" rIns="0" bIns="0" rtlCol="0" anchor="ctr"/>
           <a:lstStyle/>
           <a:p>
-            <a:pPr rtl="1" algn="l" indent="0" marL="0">
+            <a:pPr marL="0" indent="0" algn="l" rtl="1">
               <a:buNone/>
             </a:pPr>
             <a:r>
@@ -8727,7 +8615,7 @@
       </p:sp>
       <p:graphicFrame>
         <p:nvGraphicFramePr>
-          <p:cNvPr id="8" name="Chart 0" descr=""/>
+          <p:cNvPr id="8" name="Chart 0"/>
           <p:cNvGraphicFramePr/>
           <p:nvPr/>
         </p:nvGraphicFramePr>
@@ -8735,9 +8623,9 @@
           <a:off x="304495" y="1874520"/>
           <a:ext cx="5669280" cy="4023360"/>
         </p:xfrm>
-        <a:graphic xmlns:a="http://schemas.openxmlformats.org/drawingml/2006/main">
+        <a:graphic>
           <a:graphicData uri="http://schemas.openxmlformats.org/drawingml/2006/chart">
-            <c:chart xmlns:c="http://schemas.openxmlformats.org/drawingml/2006/chart" r:id="rId1"/>
+            <c:chart xmlns:c="http://schemas.openxmlformats.org/drawingml/2006/chart" xmlns:r="http://schemas.openxmlformats.org/officeDocument/2006/relationships" r:id="rId3"/>
           </a:graphicData>
         </a:graphic>
       </p:graphicFrame>
@@ -8762,7 +8650,7 @@
           <a:bodyPr wrap="square" lIns="0" tIns="0" rIns="0" bIns="0" rtlCol="0" anchor="ctr"/>
           <a:lstStyle/>
           <a:p>
-            <a:pPr rtl="1" algn="l" indent="0" marL="0">
+            <a:pPr marL="0" indent="0" algn="l" rtl="1">
               <a:buNone/>
             </a:pPr>
             <a:r>
@@ -8803,11 +8691,41 @@
             <a:tbl>
               <a:tblPr/>
               <a:tblGrid>
-                <a:gridCol w="822960"/>
-                <a:gridCol w="1371600"/>
-                <a:gridCol w="1097280"/>
-                <a:gridCol w="685800"/>
-                <a:gridCol w="1280160"/>
+                <a:gridCol w="822960">
+                  <a:extLst>
+                    <a:ext uri="{9D8B030D-6E8A-4147-A177-3AD203B41FA5}">
+                      <a16:colId xmlns:a16="http://schemas.microsoft.com/office/drawing/2014/main" val="20000"/>
+                    </a:ext>
+                  </a:extLst>
+                </a:gridCol>
+                <a:gridCol w="1371600">
+                  <a:extLst>
+                    <a:ext uri="{9D8B030D-6E8A-4147-A177-3AD203B41FA5}">
+                      <a16:colId xmlns:a16="http://schemas.microsoft.com/office/drawing/2014/main" val="20001"/>
+                    </a:ext>
+                  </a:extLst>
+                </a:gridCol>
+                <a:gridCol w="1097280">
+                  <a:extLst>
+                    <a:ext uri="{9D8B030D-6E8A-4147-A177-3AD203B41FA5}">
+                      <a16:colId xmlns:a16="http://schemas.microsoft.com/office/drawing/2014/main" val="20002"/>
+                    </a:ext>
+                  </a:extLst>
+                </a:gridCol>
+                <a:gridCol w="685800">
+                  <a:extLst>
+                    <a:ext uri="{9D8B030D-6E8A-4147-A177-3AD203B41FA5}">
+                      <a16:colId xmlns:a16="http://schemas.microsoft.com/office/drawing/2014/main" val="20003"/>
+                    </a:ext>
+                  </a:extLst>
+                </a:gridCol>
+                <a:gridCol w="1280160">
+                  <a:extLst>
+                    <a:ext uri="{9D8B030D-6E8A-4147-A177-3AD203B41FA5}">
+                      <a16:colId xmlns:a16="http://schemas.microsoft.com/office/drawing/2014/main" val="20004"/>
+                    </a:ext>
+                  </a:extLst>
+                </a:gridCol>
               </a:tblGrid>
               <a:tr h="566928">
                 <a:tc>
@@ -8815,7 +8733,7 @@
                     <a:bodyPr/>
                     <a:lstStyle/>
                     <a:p>
-                      <a:pPr algn="ctr" indent="0" marL="0">
+                      <a:pPr marL="0" indent="0" algn="ctr">
                         <a:buNone/>
                       </a:pPr>
                       <a:r>
@@ -8836,7 +8754,7 @@
                       </a:endParaRPr>
                     </a:p>
                   </a:txBody>
-                  <a:tcPr marL="91440" marR="91440" marT="45720" marB="45720" anchor="ctr">
+                  <a:tcPr anchor="ctr">
                     <a:lnL w="6350" cap="flat" cmpd="sng" algn="ctr">
                       <a:solidFill>
                         <a:srgbClr val="E2ECEC"/>
@@ -8883,7 +8801,7 @@
                     <a:bodyPr/>
                     <a:lstStyle/>
                     <a:p>
-                      <a:pPr algn="ctr" indent="0" marL="0">
+                      <a:pPr marL="0" indent="0" algn="ctr">
                         <a:buNone/>
                       </a:pPr>
                       <a:r>
@@ -8904,7 +8822,7 @@
                       </a:endParaRPr>
                     </a:p>
                   </a:txBody>
-                  <a:tcPr marL="91440" marR="91440" marT="45720" marB="45720" anchor="ctr">
+                  <a:tcPr anchor="ctr">
                     <a:lnL w="6350" cap="flat" cmpd="sng" algn="ctr">
                       <a:solidFill>
                         <a:srgbClr val="E2ECEC"/>
@@ -8951,7 +8869,7 @@
                     <a:bodyPr/>
                     <a:lstStyle/>
                     <a:p>
-                      <a:pPr algn="ctr" indent="0" marL="0">
+                      <a:pPr marL="0" indent="0" algn="ctr">
                         <a:buNone/>
                       </a:pPr>
                       <a:r>
@@ -8972,7 +8890,7 @@
                       </a:endParaRPr>
                     </a:p>
                   </a:txBody>
-                  <a:tcPr marL="91440" marR="91440" marT="45720" marB="45720" anchor="ctr">
+                  <a:tcPr anchor="ctr">
                     <a:lnL w="6350" cap="flat" cmpd="sng" algn="ctr">
                       <a:solidFill>
                         <a:srgbClr val="E2ECEC"/>
@@ -9019,7 +8937,7 @@
                     <a:bodyPr/>
                     <a:lstStyle/>
                     <a:p>
-                      <a:pPr algn="ctr" indent="0" marL="0">
+                      <a:pPr marL="0" indent="0" algn="ctr">
                         <a:buNone/>
                       </a:pPr>
                       <a:r>
@@ -9040,7 +8958,7 @@
                       </a:endParaRPr>
                     </a:p>
                   </a:txBody>
-                  <a:tcPr marL="91440" marR="91440" marT="45720" marB="45720" anchor="ctr">
+                  <a:tcPr anchor="ctr">
                     <a:lnL w="6350" cap="flat" cmpd="sng" algn="ctr">
                       <a:solidFill>
                         <a:srgbClr val="E2ECEC"/>
@@ -9087,7 +9005,7 @@
                     <a:bodyPr/>
                     <a:lstStyle/>
                     <a:p>
-                      <a:pPr algn="ctr" indent="0" marL="0">
+                      <a:pPr marL="0" indent="0" algn="ctr">
                         <a:buNone/>
                       </a:pPr>
                       <a:r>
@@ -9108,7 +9026,7 @@
                       </a:endParaRPr>
                     </a:p>
                   </a:txBody>
-                  <a:tcPr marL="91440" marR="91440" marT="45720" marB="45720" anchor="ctr">
+                  <a:tcPr anchor="ctr">
                     <a:lnL w="6350" cap="flat" cmpd="sng" algn="ctr">
                       <a:solidFill>
                         <a:srgbClr val="E2ECEC"/>
@@ -9150,6 +9068,11 @@
                     </a:solidFill>
                   </a:tcPr>
                 </a:tc>
+                <a:extLst>
+                  <a:ext uri="{0D108BD9-81ED-4DB2-BD59-A6C34878D82A}">
+                    <a16:rowId xmlns:a16="http://schemas.microsoft.com/office/drawing/2014/main" val="10000"/>
+                  </a:ext>
+                </a:extLst>
               </a:tr>
               <a:tr h="566928">
                 <a:tc>
@@ -9157,7 +9080,7 @@
                     <a:bodyPr/>
                     <a:lstStyle/>
                     <a:p>
-                      <a:pPr algn="ctr" indent="0" marL="0">
+                      <a:pPr marL="0" indent="0" algn="ctr">
                         <a:buNone/>
                       </a:pPr>
                       <a:r>
@@ -9178,7 +9101,7 @@
                       </a:endParaRPr>
                     </a:p>
                   </a:txBody>
-                  <a:tcPr marL="91440" marR="91440" marT="45720" marB="45720" anchor="ctr">
+                  <a:tcPr anchor="ctr">
                     <a:lnL w="6350" cap="flat" cmpd="sng" algn="ctr">
                       <a:solidFill>
                         <a:srgbClr val="E2ECEC"/>
@@ -9225,7 +9148,7 @@
                     <a:bodyPr/>
                     <a:lstStyle/>
                     <a:p>
-                      <a:pPr algn="ctr" indent="0" marL="0">
+                      <a:pPr marL="0" indent="0" algn="ctr">
                         <a:buNone/>
                       </a:pPr>
                       <a:r>
@@ -9246,7 +9169,7 @@
                       </a:endParaRPr>
                     </a:p>
                   </a:txBody>
-                  <a:tcPr marL="91440" marR="91440" marT="45720" marB="45720" anchor="ctr">
+                  <a:tcPr anchor="ctr">
                     <a:lnL w="6350" cap="flat" cmpd="sng" algn="ctr">
                       <a:solidFill>
                         <a:srgbClr val="E2ECEC"/>
@@ -9293,7 +9216,7 @@
                     <a:bodyPr/>
                     <a:lstStyle/>
                     <a:p>
-                      <a:pPr algn="ctr" indent="0" marL="0">
+                      <a:pPr marL="0" indent="0" algn="ctr">
                         <a:buNone/>
                       </a:pPr>
                       <a:r>
@@ -9314,7 +9237,7 @@
                       </a:endParaRPr>
                     </a:p>
                   </a:txBody>
-                  <a:tcPr marL="91440" marR="91440" marT="45720" marB="45720" anchor="ctr">
+                  <a:tcPr anchor="ctr">
                     <a:lnL w="6350" cap="flat" cmpd="sng" algn="ctr">
                       <a:solidFill>
                         <a:srgbClr val="E2ECEC"/>
@@ -9361,7 +9284,7 @@
                     <a:bodyPr/>
                     <a:lstStyle/>
                     <a:p>
-                      <a:pPr algn="ctr" indent="0" marL="0">
+                      <a:pPr marL="0" indent="0" algn="ctr">
                         <a:buNone/>
                       </a:pPr>
                       <a:r>
@@ -9382,7 +9305,7 @@
                       </a:endParaRPr>
                     </a:p>
                   </a:txBody>
-                  <a:tcPr marL="91440" marR="91440" marT="45720" marB="45720" anchor="ctr">
+                  <a:tcPr anchor="ctr">
                     <a:lnL w="6350" cap="flat" cmpd="sng" algn="ctr">
                       <a:solidFill>
                         <a:srgbClr val="E2ECEC"/>
@@ -9429,7 +9352,7 @@
                     <a:bodyPr/>
                     <a:lstStyle/>
                     <a:p>
-                      <a:pPr algn="l" indent="0" marL="0">
+                      <a:pPr marL="0" indent="0" algn="l">
                         <a:buNone/>
                       </a:pPr>
                       <a:r>
@@ -9450,7 +9373,7 @@
                       </a:endParaRPr>
                     </a:p>
                   </a:txBody>
-                  <a:tcPr marL="91440" marR="91440" marT="45720" marB="45720" anchor="ctr">
+                  <a:tcPr anchor="ctr">
                     <a:lnL w="6350" cap="flat" cmpd="sng" algn="ctr">
                       <a:solidFill>
                         <a:srgbClr val="E2ECEC"/>
@@ -9492,6 +9415,11 @@
                     </a:solidFill>
                   </a:tcPr>
                 </a:tc>
+                <a:extLst>
+                  <a:ext uri="{0D108BD9-81ED-4DB2-BD59-A6C34878D82A}">
+                    <a16:rowId xmlns:a16="http://schemas.microsoft.com/office/drawing/2014/main" val="10001"/>
+                  </a:ext>
+                </a:extLst>
               </a:tr>
               <a:tr h="566928">
                 <a:tc>
@@ -9499,7 +9427,7 @@
                     <a:bodyPr/>
                     <a:lstStyle/>
                     <a:p>
-                      <a:pPr algn="ctr" indent="0" marL="0">
+                      <a:pPr marL="0" indent="0" algn="ctr">
                         <a:buNone/>
                       </a:pPr>
                       <a:r>
@@ -9520,7 +9448,7 @@
                       </a:endParaRPr>
                     </a:p>
                   </a:txBody>
-                  <a:tcPr marL="91440" marR="91440" marT="45720" marB="45720" anchor="ctr">
+                  <a:tcPr anchor="ctr">
                     <a:lnL w="6350" cap="flat" cmpd="sng" algn="ctr">
                       <a:solidFill>
                         <a:srgbClr val="E2ECEC"/>
@@ -9567,7 +9495,7 @@
                     <a:bodyPr/>
                     <a:lstStyle/>
                     <a:p>
-                      <a:pPr algn="ctr" indent="0" marL="0">
+                      <a:pPr marL="0" indent="0" algn="ctr">
                         <a:buNone/>
                       </a:pPr>
                       <a:r>
@@ -9588,7 +9516,7 @@
                       </a:endParaRPr>
                     </a:p>
                   </a:txBody>
-                  <a:tcPr marL="91440" marR="91440" marT="45720" marB="45720" anchor="ctr">
+                  <a:tcPr anchor="ctr">
                     <a:lnL w="6350" cap="flat" cmpd="sng" algn="ctr">
                       <a:solidFill>
                         <a:srgbClr val="E2ECEC"/>
@@ -9635,7 +9563,7 @@
                     <a:bodyPr/>
                     <a:lstStyle/>
                     <a:p>
-                      <a:pPr algn="ctr" indent="0" marL="0">
+                      <a:pPr marL="0" indent="0" algn="ctr">
                         <a:buNone/>
                       </a:pPr>
                       <a:r>
@@ -9656,7 +9584,7 @@
                       </a:endParaRPr>
                     </a:p>
                   </a:txBody>
-                  <a:tcPr marL="91440" marR="91440" marT="45720" marB="45720" anchor="ctr">
+                  <a:tcPr anchor="ctr">
                     <a:lnL w="6350" cap="flat" cmpd="sng" algn="ctr">
                       <a:solidFill>
                         <a:srgbClr val="E2ECEC"/>
@@ -9703,7 +9631,7 @@
                     <a:bodyPr/>
                     <a:lstStyle/>
                     <a:p>
-                      <a:pPr algn="ctr" indent="0" marL="0">
+                      <a:pPr marL="0" indent="0" algn="ctr">
                         <a:buNone/>
                       </a:pPr>
                       <a:r>
@@ -9724,7 +9652,7 @@
                       </a:endParaRPr>
                     </a:p>
                   </a:txBody>
-                  <a:tcPr marL="91440" marR="91440" marT="45720" marB="45720" anchor="ctr">
+                  <a:tcPr anchor="ctr">
                     <a:lnL w="6350" cap="flat" cmpd="sng" algn="ctr">
                       <a:solidFill>
                         <a:srgbClr val="E2ECEC"/>
@@ -9771,7 +9699,7 @@
                     <a:bodyPr/>
                     <a:lstStyle/>
                     <a:p>
-                      <a:pPr algn="l" indent="0" marL="0">
+                      <a:pPr marL="0" indent="0" algn="l">
                         <a:buNone/>
                       </a:pPr>
                       <a:r>
@@ -9792,7 +9720,7 @@
                       </a:endParaRPr>
                     </a:p>
                   </a:txBody>
-                  <a:tcPr marL="91440" marR="91440" marT="45720" marB="45720" anchor="ctr">
+                  <a:tcPr anchor="ctr">
                     <a:lnL w="6350" cap="flat" cmpd="sng" algn="ctr">
                       <a:solidFill>
                         <a:srgbClr val="E2ECEC"/>
@@ -9834,6 +9762,11 @@
                     </a:solidFill>
                   </a:tcPr>
                 </a:tc>
+                <a:extLst>
+                  <a:ext uri="{0D108BD9-81ED-4DB2-BD59-A6C34878D82A}">
+                    <a16:rowId xmlns:a16="http://schemas.microsoft.com/office/drawing/2014/main" val="10002"/>
+                  </a:ext>
+                </a:extLst>
               </a:tr>
               <a:tr h="566928">
                 <a:tc>
@@ -9841,7 +9774,7 @@
                     <a:bodyPr/>
                     <a:lstStyle/>
                     <a:p>
-                      <a:pPr algn="ctr" indent="0" marL="0">
+                      <a:pPr marL="0" indent="0" algn="ctr">
                         <a:buNone/>
                       </a:pPr>
                       <a:r>
@@ -9862,7 +9795,7 @@
                       </a:endParaRPr>
                     </a:p>
                   </a:txBody>
-                  <a:tcPr marL="91440" marR="91440" marT="45720" marB="45720" anchor="ctr">
+                  <a:tcPr anchor="ctr">
                     <a:lnL w="6350" cap="flat" cmpd="sng" algn="ctr">
                       <a:solidFill>
                         <a:srgbClr val="E2ECEC"/>
@@ -9909,7 +9842,7 @@
                     <a:bodyPr/>
                     <a:lstStyle/>
                     <a:p>
-                      <a:pPr algn="ctr" indent="0" marL="0">
+                      <a:pPr marL="0" indent="0" algn="ctr">
                         <a:buNone/>
                       </a:pPr>
                       <a:r>
@@ -9930,7 +9863,7 @@
                       </a:endParaRPr>
                     </a:p>
                   </a:txBody>
-                  <a:tcPr marL="91440" marR="91440" marT="45720" marB="45720" anchor="ctr">
+                  <a:tcPr anchor="ctr">
                     <a:lnL w="6350" cap="flat" cmpd="sng" algn="ctr">
                       <a:solidFill>
                         <a:srgbClr val="E2ECEC"/>
@@ -9977,7 +9910,7 @@
                     <a:bodyPr/>
                     <a:lstStyle/>
                     <a:p>
-                      <a:pPr algn="ctr" indent="0" marL="0">
+                      <a:pPr marL="0" indent="0" algn="ctr">
                         <a:buNone/>
                       </a:pPr>
                       <a:r>
@@ -9998,7 +9931,7 @@
                       </a:endParaRPr>
                     </a:p>
                   </a:txBody>
-                  <a:tcPr marL="91440" marR="91440" marT="45720" marB="45720" anchor="ctr">
+                  <a:tcPr anchor="ctr">
                     <a:lnL w="6350" cap="flat" cmpd="sng" algn="ctr">
                       <a:solidFill>
                         <a:srgbClr val="E2ECEC"/>
@@ -10045,7 +9978,7 @@
                     <a:bodyPr/>
                     <a:lstStyle/>
                     <a:p>
-                      <a:pPr algn="ctr" indent="0" marL="0">
+                      <a:pPr marL="0" indent="0" algn="ctr">
                         <a:buNone/>
                       </a:pPr>
                       <a:r>
@@ -10066,7 +9999,7 @@
                       </a:endParaRPr>
                     </a:p>
                   </a:txBody>
-                  <a:tcPr marL="91440" marR="91440" marT="45720" marB="45720" anchor="ctr">
+                  <a:tcPr anchor="ctr">
                     <a:lnL w="6350" cap="flat" cmpd="sng" algn="ctr">
                       <a:solidFill>
                         <a:srgbClr val="E2ECEC"/>
@@ -10113,7 +10046,7 @@
                     <a:bodyPr/>
                     <a:lstStyle/>
                     <a:p>
-                      <a:pPr algn="l" indent="0" marL="0">
+                      <a:pPr marL="0" indent="0" algn="l">
                         <a:buNone/>
                       </a:pPr>
                       <a:r>
@@ -10134,7 +10067,7 @@
                       </a:endParaRPr>
                     </a:p>
                   </a:txBody>
-                  <a:tcPr marL="91440" marR="91440" marT="45720" marB="45720" anchor="ctr">
+                  <a:tcPr anchor="ctr">
                     <a:lnL w="6350" cap="flat" cmpd="sng" algn="ctr">
                       <a:solidFill>
                         <a:srgbClr val="E2ECEC"/>
@@ -10176,6 +10109,11 @@
                     </a:solidFill>
                   </a:tcPr>
                 </a:tc>
+                <a:extLst>
+                  <a:ext uri="{0D108BD9-81ED-4DB2-BD59-A6C34878D82A}">
+                    <a16:rowId xmlns:a16="http://schemas.microsoft.com/office/drawing/2014/main" val="10003"/>
+                  </a:ext>
+                </a:extLst>
               </a:tr>
             </a:tbl>
           </a:graphicData>
@@ -10207,13 +10145,20 @@
             <a:prstDash val="solid"/>
           </a:ln>
           <a:effectLst>
-            <a:outerShdw sx="100000" sy="100000" kx="0" ky="0" algn="bl" rotWithShape="0" blurRad="76200" dist="25400" dir="5400000">
+            <a:outerShdw blurRad="76200" dist="25400" dir="5400000" algn="bl" rotWithShape="0">
               <a:srgbClr val="000000">
                 <a:alpha val="12000"/>
               </a:srgbClr>
             </a:outerShdw>
           </a:effectLst>
         </p:spPr>
+        <p:txBody>
+          <a:bodyPr/>
+          <a:lstStyle/>
+          <a:p>
+            <a:endParaRPr lang="en-IL"/>
+          </a:p>
+        </p:txBody>
       </p:sp>
       <p:sp>
         <p:nvSpPr>
@@ -10234,24 +10179,31 @@
           </a:solidFill>
           <a:ln/>
           <a:effectLst>
-            <a:outerShdw sx="100000" sy="100000" kx="0" ky="0" algn="bl" rotWithShape="0" blurRad="76200" dist="25400" dir="5400000">
+            <a:outerShdw blurRad="76200" dist="25400" dir="5400000" algn="bl" rotWithShape="0">
               <a:srgbClr val="000000">
                 <a:alpha val="12000"/>
               </a:srgbClr>
             </a:outerShdw>
           </a:effectLst>
         </p:spPr>
+        <p:txBody>
+          <a:bodyPr/>
+          <a:lstStyle/>
+          <a:p>
+            <a:endParaRPr lang="en-IL"/>
+          </a:p>
+        </p:txBody>
       </p:sp>
       <p:pic>
         <p:nvPicPr>
-          <p:cNvPr id="13" name="Image 0" descr="preencoded.png">    </p:cNvPr>
+          <p:cNvPr id="13" name="Image 0" descr="preencoded.png"/>
           <p:cNvPicPr>
             <a:picLocks noChangeAspect="1"/>
           </p:cNvPicPr>
           <p:nvPr/>
         </p:nvPicPr>
         <p:blipFill>
-          <a:blip r:embed="rId2"/>
+          <a:blip r:embed="rId4"/>
           <a:stretch>
             <a:fillRect/>
           </a:stretch>
@@ -10268,7 +10220,7 @@
       </p:pic>
       <p:sp>
         <p:nvSpPr>
-          <p:cNvPr id="14" name="Text 9"/>
+          <p:cNvPr id="10" name="Text 9"/>
           <p:cNvSpPr/>
           <p:nvPr/>
         </p:nvSpPr>
@@ -10287,7 +10239,7 @@
           <a:bodyPr wrap="square" lIns="0" tIns="0" rIns="0" bIns="0" rtlCol="0" anchor="ctr"/>
           <a:lstStyle/>
           <a:p>
-            <a:pPr rtl="1" algn="l" indent="0" marL="0">
+            <a:pPr marL="0" indent="0" algn="l" rtl="1">
               <a:lnSpc>
                 <a:spcPct val="120000"/>
               </a:lnSpc>
@@ -10324,6 +10276,7 @@
         <a:solidFill>
           <a:srgbClr val="FFFFFF"/>
         </a:solidFill>
+        <a:effectLst/>
       </p:bgPr>
     </p:bg>
     <p:spTree>
@@ -10361,6 +10314,13 @@
             <a:prstDash val="solid"/>
           </a:ln>
         </p:spPr>
+        <p:txBody>
+          <a:bodyPr/>
+          <a:lstStyle/>
+          <a:p>
+            <a:endParaRPr lang="en-IL"/>
+          </a:p>
+        </p:txBody>
       </p:sp>
       <p:sp>
         <p:nvSpPr>
@@ -10381,6 +10341,13 @@
           </a:solidFill>
           <a:ln/>
         </p:spPr>
+        <p:txBody>
+          <a:bodyPr/>
+          <a:lstStyle/>
+          <a:p>
+            <a:endParaRPr lang="en-IL"/>
+          </a:p>
+        </p:txBody>
       </p:sp>
       <p:sp>
         <p:nvSpPr>
@@ -10403,11 +10370,11 @@
           <a:bodyPr wrap="square" lIns="0" tIns="0" rIns="0" bIns="0" rtlCol="0" anchor="ctr"/>
           <a:lstStyle/>
           <a:p>
-            <a:pPr rtl="1" algn="r" indent="0" marL="0">
+            <a:pPr marL="0" indent="0" algn="r" rtl="1">
               <a:buNone/>
             </a:pPr>
             <a:r>
-              <a:rPr lang="en-US" sz="1200" b="1" spc="100" kern="0" dirty="0">
+              <a:rPr lang="en-US" sz="1200" b="1" kern="0" spc="100" dirty="0">
                 <a:solidFill>
                   <a:srgbClr val="0E8A8F"/>
                 </a:solidFill>
@@ -10442,7 +10409,7 @@
           <a:bodyPr wrap="square" lIns="0" tIns="0" rIns="0" bIns="0" rtlCol="0" anchor="ctr"/>
           <a:lstStyle/>
           <a:p>
-            <a:pPr rtl="1" algn="r" indent="0" marL="0">
+            <a:pPr marL="0" indent="0" algn="r" rtl="1">
               <a:buNone/>
             </a:pPr>
             <a:r>
@@ -10481,7 +10448,7 @@
           <a:bodyPr wrap="square" lIns="0" tIns="0" rIns="0" bIns="0" rtlCol="0" anchor="ctr"/>
           <a:lstStyle/>
           <a:p>
-            <a:pPr rtl="1" algn="l" indent="0" marL="0">
+            <a:pPr marL="0" indent="0" algn="l" rtl="1">
               <a:buNone/>
             </a:pPr>
             <a:r>
@@ -10501,14 +10468,14 @@
       </p:sp>
       <p:pic>
         <p:nvPicPr>
-          <p:cNvPr id="7" name="Image 0" descr="results/figures/winloss_heatmap.png">    </p:cNvPr>
+          <p:cNvPr id="7" name="Image 0" descr="results/figures/winloss_heatmap.png"/>
           <p:cNvPicPr>
             <a:picLocks noChangeAspect="1"/>
           </p:cNvPicPr>
           <p:nvPr/>
         </p:nvPicPr>
         <p:blipFill>
-          <a:blip r:embed="rId1"/>
+          <a:blip r:embed="rId3"/>
           <a:stretch>
             <a:fillRect/>
           </a:stretch>
@@ -10549,13 +10516,20 @@
             <a:prstDash val="solid"/>
           </a:ln>
           <a:effectLst>
-            <a:outerShdw sx="100000" sy="100000" kx="0" ky="0" algn="bl" rotWithShape="0" blurRad="76200" dist="25400" dir="5400000">
+            <a:outerShdw blurRad="76200" dist="25400" dir="5400000" algn="bl" rotWithShape="0">
               <a:srgbClr val="000000">
                 <a:alpha val="12000"/>
               </a:srgbClr>
             </a:outerShdw>
           </a:effectLst>
         </p:spPr>
+        <p:txBody>
+          <a:bodyPr/>
+          <a:lstStyle/>
+          <a:p>
+            <a:endParaRPr lang="en-IL"/>
+          </a:p>
+        </p:txBody>
       </p:sp>
       <p:sp>
         <p:nvSpPr>
@@ -10578,7 +10552,7 @@
           <a:bodyPr wrap="square" lIns="0" tIns="0" rIns="0" bIns="0" rtlCol="0" anchor="ctr"/>
           <a:lstStyle/>
           <a:p>
-            <a:pPr rtl="1" algn="l" indent="0" marL="0">
+            <a:pPr marL="0" indent="0" algn="l" rtl="1">
               <a:buNone/>
             </a:pPr>
             <a:r>
@@ -10617,7 +10591,7 @@
           <a:bodyPr wrap="square" lIns="0" tIns="0" rIns="0" bIns="0" rtlCol="0" anchor="ctr"/>
           <a:lstStyle/>
           <a:p>
-            <a:pPr algn="l" marL="342900" indent="-342900">
+            <a:pPr marL="342900" indent="-342900" algn="l">
               <a:lnSpc>
                 <a:spcPct val="130000"/>
               </a:lnSpc>
@@ -10638,7 +10612,7 @@
             <a:endParaRPr lang="en-US" sz="1450" dirty="0"/>
           </a:p>
           <a:p>
-            <a:pPr algn="l" marL="342900" indent="-342900">
+            <a:pPr marL="342900" indent="-342900" algn="l">
               <a:lnSpc>
                 <a:spcPct val="130000"/>
               </a:lnSpc>
@@ -10659,7 +10633,7 @@
             <a:endParaRPr lang="en-US" sz="1450" dirty="0"/>
           </a:p>
           <a:p>
-            <a:pPr algn="l" marL="342900" indent="-342900">
+            <a:pPr marL="342900" indent="-342900" algn="l">
               <a:lnSpc>
                 <a:spcPct val="130000"/>
               </a:lnSpc>
@@ -10707,13 +10681,20 @@
             <a:prstDash val="solid"/>
           </a:ln>
           <a:effectLst>
-            <a:outerShdw sx="100000" sy="100000" kx="0" ky="0" algn="bl" rotWithShape="0" blurRad="76200" dist="25400" dir="5400000">
+            <a:outerShdw blurRad="76200" dist="25400" dir="5400000" algn="bl" rotWithShape="0">
               <a:srgbClr val="000000">
                 <a:alpha val="12000"/>
               </a:srgbClr>
             </a:outerShdw>
           </a:effectLst>
         </p:spPr>
+        <p:txBody>
+          <a:bodyPr/>
+          <a:lstStyle/>
+          <a:p>
+            <a:endParaRPr lang="en-IL"/>
+          </a:p>
+        </p:txBody>
       </p:sp>
       <p:sp>
         <p:nvSpPr>
@@ -10736,7 +10717,7 @@
           <a:bodyPr wrap="square" lIns="0" tIns="0" rIns="0" bIns="0" rtlCol="0" anchor="ctr"/>
           <a:lstStyle/>
           <a:p>
-            <a:pPr algn="l" indent="0" marL="0">
+            <a:pPr marL="0" indent="0" algn="l">
               <a:buNone/>
             </a:pPr>
             <a:r>
@@ -10750,9 +10731,6 @@
               </a:rPr>
               <a:t>החטאות (מסמך האמת לא ב-top-10):   </a:t>
             </a:r>
-            <a:pPr algn="l" indent="0" marL="0">
-              <a:buNone/>
-            </a:pPr>
             <a:r>
               <a:rPr lang="en-US" sz="1400" b="1" dirty="0">
                 <a:solidFill>
@@ -10784,6 +10762,7 @@
         <a:solidFill>
           <a:srgbClr val="FFFFFF"/>
         </a:solidFill>
+        <a:effectLst/>
       </p:bgPr>
     </p:bg>
     <p:spTree>
@@ -10821,6 +10800,13 @@
             <a:prstDash val="solid"/>
           </a:ln>
         </p:spPr>
+        <p:txBody>
+          <a:bodyPr/>
+          <a:lstStyle/>
+          <a:p>
+            <a:endParaRPr lang="en-IL"/>
+          </a:p>
+        </p:txBody>
       </p:sp>
       <p:sp>
         <p:nvSpPr>
@@ -10841,6 +10827,13 @@
           </a:solidFill>
           <a:ln/>
         </p:spPr>
+        <p:txBody>
+          <a:bodyPr/>
+          <a:lstStyle/>
+          <a:p>
+            <a:endParaRPr lang="en-IL"/>
+          </a:p>
+        </p:txBody>
       </p:sp>
       <p:sp>
         <p:nvSpPr>
@@ -10863,11 +10856,11 @@
           <a:bodyPr wrap="square" lIns="0" tIns="0" rIns="0" bIns="0" rtlCol="0" anchor="ctr"/>
           <a:lstStyle/>
           <a:p>
-            <a:pPr rtl="1" algn="r" indent="0" marL="0">
+            <a:pPr marL="0" indent="0" algn="r" rtl="1">
               <a:buNone/>
             </a:pPr>
             <a:r>
-              <a:rPr lang="en-US" sz="1200" b="1" spc="100" kern="0" dirty="0">
+              <a:rPr lang="en-US" sz="1200" b="1" kern="0" spc="100" dirty="0">
                 <a:solidFill>
                   <a:srgbClr val="0E8A8F"/>
                 </a:solidFill>
@@ -10902,7 +10895,7 @@
           <a:bodyPr wrap="square" lIns="0" tIns="0" rIns="0" bIns="0" rtlCol="0" anchor="ctr"/>
           <a:lstStyle/>
           <a:p>
-            <a:pPr rtl="1" algn="r" indent="0" marL="0">
+            <a:pPr marL="0" indent="0" algn="r" rtl="1">
               <a:buNone/>
             </a:pPr>
             <a:r>
@@ -10941,7 +10934,7 @@
           <a:bodyPr wrap="square" lIns="0" tIns="0" rIns="0" bIns="0" rtlCol="0" anchor="ctr"/>
           <a:lstStyle/>
           <a:p>
-            <a:pPr rtl="1" algn="l" indent="0" marL="0">
+            <a:pPr marL="0" indent="0" algn="l" rtl="1">
               <a:buNone/>
             </a:pPr>
             <a:r>
@@ -10985,13 +10978,20 @@
             <a:prstDash val="solid"/>
           </a:ln>
           <a:effectLst>
-            <a:outerShdw sx="100000" sy="100000" kx="0" ky="0" algn="bl" rotWithShape="0" blurRad="76200" dist="25400" dir="5400000">
+            <a:outerShdw blurRad="76200" dist="25400" dir="5400000" algn="bl" rotWithShape="0">
               <a:srgbClr val="000000">
                 <a:alpha val="12000"/>
               </a:srgbClr>
             </a:outerShdw>
           </a:effectLst>
         </p:spPr>
+        <p:txBody>
+          <a:bodyPr/>
+          <a:lstStyle/>
+          <a:p>
+            <a:endParaRPr lang="en-IL"/>
+          </a:p>
+        </p:txBody>
       </p:sp>
       <p:sp>
         <p:nvSpPr>
@@ -11012,24 +11012,31 @@
           </a:solidFill>
           <a:ln/>
           <a:effectLst>
-            <a:outerShdw sx="100000" sy="100000" kx="0" ky="0" algn="bl" rotWithShape="0" blurRad="76200" dist="25400" dir="5400000">
+            <a:outerShdw blurRad="76200" dist="25400" dir="5400000" algn="bl" rotWithShape="0">
               <a:srgbClr val="000000">
                 <a:alpha val="12000"/>
               </a:srgbClr>
             </a:outerShdw>
           </a:effectLst>
         </p:spPr>
+        <p:txBody>
+          <a:bodyPr/>
+          <a:lstStyle/>
+          <a:p>
+            <a:endParaRPr lang="en-IL"/>
+          </a:p>
+        </p:txBody>
       </p:sp>
       <p:pic>
         <p:nvPicPr>
-          <p:cNvPr id="9" name="Image 0" descr="preencoded.png">    </p:cNvPr>
+          <p:cNvPr id="9" name="Image 0" descr="preencoded.png"/>
           <p:cNvPicPr>
             <a:picLocks noChangeAspect="1"/>
           </p:cNvPicPr>
           <p:nvPr/>
         </p:nvPicPr>
         <p:blipFill>
-          <a:blip r:embed="rId1"/>
+          <a:blip r:embed="rId3"/>
           <a:stretch>
             <a:fillRect/>
           </a:stretch>
@@ -11065,7 +11072,7 @@
           <a:bodyPr wrap="square" lIns="0" tIns="0" rIns="0" bIns="0" rtlCol="0" anchor="ctr"/>
           <a:lstStyle/>
           <a:p>
-            <a:pPr rtl="1" algn="l" indent="0" marL="0">
+            <a:pPr marL="0" indent="0" algn="l" rtl="1">
               <a:buNone/>
             </a:pPr>
             <a:r>
@@ -11104,7 +11111,7 @@
           <a:bodyPr wrap="square" lIns="0" tIns="0" rIns="0" bIns="0" rtlCol="0" anchor="ctr"/>
           <a:lstStyle/>
           <a:p>
-            <a:pPr rtl="1" algn="l" indent="0" marL="0">
+            <a:pPr marL="0" indent="0" algn="l" rtl="1">
               <a:buNone/>
             </a:pPr>
             <a:r>
@@ -11143,7 +11150,7 @@
           <a:bodyPr wrap="square" lIns="0" tIns="0" rIns="0" bIns="0" rtlCol="0" anchor="ctr"/>
           <a:lstStyle/>
           <a:p>
-            <a:pPr rtl="1" algn="l" indent="0" marL="0">
+            <a:pPr marL="0" indent="0" algn="l" rtl="1">
               <a:buNone/>
             </a:pPr>
             <a:r>
@@ -11182,7 +11189,7 @@
           <a:bodyPr wrap="square" lIns="0" tIns="0" rIns="0" bIns="0" rtlCol="0" anchor="ctr"/>
           <a:lstStyle/>
           <a:p>
-            <a:pPr rtl="1" algn="l" indent="0" marL="0">
+            <a:pPr marL="0" indent="0" algn="l" rtl="1">
               <a:buNone/>
             </a:pPr>
             <a:r>
@@ -11226,13 +11233,20 @@
             <a:prstDash val="solid"/>
           </a:ln>
           <a:effectLst>
-            <a:outerShdw sx="100000" sy="100000" kx="0" ky="0" algn="bl" rotWithShape="0" blurRad="76200" dist="25400" dir="5400000">
+            <a:outerShdw blurRad="76200" dist="25400" dir="5400000" algn="bl" rotWithShape="0">
               <a:srgbClr val="000000">
                 <a:alpha val="12000"/>
               </a:srgbClr>
             </a:outerShdw>
           </a:effectLst>
         </p:spPr>
+        <p:txBody>
+          <a:bodyPr/>
+          <a:lstStyle/>
+          <a:p>
+            <a:endParaRPr lang="en-IL"/>
+          </a:p>
+        </p:txBody>
       </p:sp>
       <p:sp>
         <p:nvSpPr>
@@ -11253,24 +11267,31 @@
           </a:solidFill>
           <a:ln/>
           <a:effectLst>
-            <a:outerShdw sx="100000" sy="100000" kx="0" ky="0" algn="bl" rotWithShape="0" blurRad="76200" dist="25400" dir="5400000">
+            <a:outerShdw blurRad="76200" dist="25400" dir="5400000" algn="bl" rotWithShape="0">
               <a:srgbClr val="000000">
                 <a:alpha val="12000"/>
               </a:srgbClr>
             </a:outerShdw>
           </a:effectLst>
         </p:spPr>
+        <p:txBody>
+          <a:bodyPr/>
+          <a:lstStyle/>
+          <a:p>
+            <a:endParaRPr lang="en-IL"/>
+          </a:p>
+        </p:txBody>
       </p:sp>
       <p:pic>
         <p:nvPicPr>
-          <p:cNvPr id="16" name="Image 1" descr="preencoded.png">    </p:cNvPr>
+          <p:cNvPr id="16" name="Image 1" descr="preencoded.png"/>
           <p:cNvPicPr>
             <a:picLocks noChangeAspect="1"/>
           </p:cNvPicPr>
           <p:nvPr/>
         </p:nvPicPr>
         <p:blipFill>
-          <a:blip r:embed="rId2"/>
+          <a:blip r:embed="rId4"/>
           <a:stretch>
             <a:fillRect/>
           </a:stretch>
@@ -11306,7 +11327,7 @@
           <a:bodyPr wrap="square" lIns="0" tIns="0" rIns="0" bIns="0" rtlCol="0" anchor="ctr"/>
           <a:lstStyle/>
           <a:p>
-            <a:pPr rtl="1" algn="l" indent="0" marL="0">
+            <a:pPr marL="0" indent="0" algn="l" rtl="1">
               <a:buNone/>
             </a:pPr>
             <a:r>
@@ -11345,7 +11366,7 @@
           <a:bodyPr wrap="square" lIns="0" tIns="0" rIns="0" bIns="0" rtlCol="0" anchor="ctr"/>
           <a:lstStyle/>
           <a:p>
-            <a:pPr rtl="1" algn="l" indent="0" marL="0">
+            <a:pPr marL="0" indent="0" algn="l" rtl="1">
               <a:buNone/>
             </a:pPr>
             <a:r>
@@ -11384,7 +11405,7 @@
           <a:bodyPr wrap="square" lIns="0" tIns="0" rIns="0" bIns="0" rtlCol="0" anchor="ctr"/>
           <a:lstStyle/>
           <a:p>
-            <a:pPr rtl="1" algn="l" indent="0" marL="0">
+            <a:pPr marL="0" indent="0" algn="l" rtl="1">
               <a:buNone/>
             </a:pPr>
             <a:r>
@@ -11423,7 +11444,7 @@
           <a:bodyPr wrap="square" lIns="0" tIns="0" rIns="0" bIns="0" rtlCol="0" anchor="ctr"/>
           <a:lstStyle/>
           <a:p>
-            <a:pPr rtl="1" algn="l" indent="0" marL="0">
+            <a:pPr marL="0" indent="0" algn="l" rtl="1">
               <a:buNone/>
             </a:pPr>
             <a:r>
@@ -11467,13 +11488,20 @@
             <a:prstDash val="solid"/>
           </a:ln>
           <a:effectLst>
-            <a:outerShdw sx="100000" sy="100000" kx="0" ky="0" algn="bl" rotWithShape="0" blurRad="76200" dist="25400" dir="5400000">
+            <a:outerShdw blurRad="76200" dist="25400" dir="5400000" algn="bl" rotWithShape="0">
               <a:srgbClr val="000000">
                 <a:alpha val="12000"/>
               </a:srgbClr>
             </a:outerShdw>
           </a:effectLst>
         </p:spPr>
+        <p:txBody>
+          <a:bodyPr/>
+          <a:lstStyle/>
+          <a:p>
+            <a:endParaRPr lang="en-IL"/>
+          </a:p>
+        </p:txBody>
       </p:sp>
       <p:sp>
         <p:nvSpPr>
@@ -11494,24 +11522,31 @@
           </a:solidFill>
           <a:ln/>
           <a:effectLst>
-            <a:outerShdw sx="100000" sy="100000" kx="0" ky="0" algn="bl" rotWithShape="0" blurRad="76200" dist="25400" dir="5400000">
+            <a:outerShdw blurRad="76200" dist="25400" dir="5400000" algn="bl" rotWithShape="0">
               <a:srgbClr val="000000">
                 <a:alpha val="12000"/>
               </a:srgbClr>
             </a:outerShdw>
           </a:effectLst>
         </p:spPr>
+        <p:txBody>
+          <a:bodyPr/>
+          <a:lstStyle/>
+          <a:p>
+            <a:endParaRPr lang="en-IL"/>
+          </a:p>
+        </p:txBody>
       </p:sp>
       <p:pic>
         <p:nvPicPr>
-          <p:cNvPr id="23" name="Image 2" descr="preencoded.png">    </p:cNvPr>
+          <p:cNvPr id="23" name="Image 2" descr="preencoded.png"/>
           <p:cNvPicPr>
             <a:picLocks noChangeAspect="1"/>
           </p:cNvPicPr>
           <p:nvPr/>
         </p:nvPicPr>
         <p:blipFill>
-          <a:blip r:embed="rId3"/>
+          <a:blip r:embed="rId5"/>
           <a:stretch>
             <a:fillRect/>
           </a:stretch>
@@ -11547,7 +11582,7 @@
           <a:bodyPr wrap="square" lIns="0" tIns="0" rIns="0" bIns="0" rtlCol="0" anchor="ctr"/>
           <a:lstStyle/>
           <a:p>
-            <a:pPr rtl="1" algn="l" indent="0" marL="0">
+            <a:pPr marL="0" indent="0" algn="l" rtl="1">
               <a:buNone/>
             </a:pPr>
             <a:r>
@@ -11586,7 +11621,7 @@
           <a:bodyPr wrap="square" lIns="0" tIns="0" rIns="0" bIns="0" rtlCol="0" anchor="ctr"/>
           <a:lstStyle/>
           <a:p>
-            <a:pPr rtl="1" algn="l" indent="0" marL="0">
+            <a:pPr marL="0" indent="0" algn="l" rtl="1">
               <a:buNone/>
             </a:pPr>
             <a:r>
@@ -11625,7 +11660,7 @@
           <a:bodyPr wrap="square" lIns="0" tIns="0" rIns="0" bIns="0" rtlCol="0" anchor="ctr"/>
           <a:lstStyle/>
           <a:p>
-            <a:pPr rtl="1" algn="l" indent="0" marL="0">
+            <a:pPr marL="0" indent="0" algn="l" rtl="1">
               <a:buNone/>
             </a:pPr>
             <a:r>
@@ -11664,7 +11699,7 @@
           <a:bodyPr wrap="square" lIns="0" tIns="0" rIns="0" bIns="0" rtlCol="0" anchor="ctr"/>
           <a:lstStyle/>
           <a:p>
-            <a:pPr rtl="1" algn="l" indent="0" marL="0">
+            <a:pPr marL="0" indent="0" algn="l" rtl="1">
               <a:buNone/>
             </a:pPr>
             <a:r>
@@ -11698,6 +11733,7 @@
         <a:solidFill>
           <a:srgbClr val="FFFFFF"/>
         </a:solidFill>
+        <a:effectLst/>
       </p:bgPr>
     </p:bg>
     <p:spTree>
@@ -11735,6 +11771,13 @@
             <a:prstDash val="solid"/>
           </a:ln>
         </p:spPr>
+        <p:txBody>
+          <a:bodyPr/>
+          <a:lstStyle/>
+          <a:p>
+            <a:endParaRPr lang="en-IL"/>
+          </a:p>
+        </p:txBody>
       </p:sp>
       <p:sp>
         <p:nvSpPr>
@@ -11755,6 +11798,13 @@
           </a:solidFill>
           <a:ln/>
         </p:spPr>
+        <p:txBody>
+          <a:bodyPr/>
+          <a:lstStyle/>
+          <a:p>
+            <a:endParaRPr lang="en-IL"/>
+          </a:p>
+        </p:txBody>
       </p:sp>
       <p:sp>
         <p:nvSpPr>
@@ -11777,11 +11827,11 @@
           <a:bodyPr wrap="square" lIns="0" tIns="0" rIns="0" bIns="0" rtlCol="0" anchor="ctr"/>
           <a:lstStyle/>
           <a:p>
-            <a:pPr rtl="1" algn="r" indent="0" marL="0">
+            <a:pPr marL="0" indent="0" algn="r" rtl="1">
               <a:buNone/>
             </a:pPr>
             <a:r>
-              <a:rPr lang="en-US" sz="1200" b="1" spc="100" kern="0" dirty="0">
+              <a:rPr lang="en-US" sz="1200" b="1" kern="0" spc="100" dirty="0">
                 <a:solidFill>
                   <a:srgbClr val="0E8A8F"/>
                 </a:solidFill>
@@ -11816,7 +11866,7 @@
           <a:bodyPr wrap="square" lIns="0" tIns="0" rIns="0" bIns="0" rtlCol="0" anchor="ctr"/>
           <a:lstStyle/>
           <a:p>
-            <a:pPr rtl="1" algn="r" indent="0" marL="0">
+            <a:pPr marL="0" indent="0" algn="r" rtl="1">
               <a:buNone/>
             </a:pPr>
             <a:r>
@@ -11855,7 +11905,7 @@
           <a:bodyPr wrap="square" lIns="0" tIns="0" rIns="0" bIns="0" rtlCol="0" anchor="ctr"/>
           <a:lstStyle/>
           <a:p>
-            <a:pPr rtl="1" algn="l" indent="0" marL="0">
+            <a:pPr marL="0" indent="0" algn="l" rtl="1">
               <a:buNone/>
             </a:pPr>
             <a:r>
@@ -11875,14 +11925,14 @@
       </p:sp>
       <p:pic>
         <p:nvPicPr>
-          <p:cNvPr id="7" name="Image 0" descr="results/figures/embedding_tsne.png">    </p:cNvPr>
+          <p:cNvPr id="7" name="Image 0" descr="results/figures/embedding_tsne.png"/>
           <p:cNvPicPr>
             <a:picLocks noChangeAspect="1"/>
           </p:cNvPicPr>
           <p:nvPr/>
         </p:nvPicPr>
         <p:blipFill>
-          <a:blip r:embed="rId1"/>
+          <a:blip r:embed="rId3"/>
           <a:stretch>
             <a:fillRect/>
           </a:stretch>
@@ -11923,13 +11973,20 @@
             <a:prstDash val="solid"/>
           </a:ln>
           <a:effectLst>
-            <a:outerShdw sx="100000" sy="100000" kx="0" ky="0" algn="bl" rotWithShape="0" blurRad="76200" dist="25400" dir="5400000">
+            <a:outerShdw blurRad="76200" dist="25400" dir="5400000" algn="bl" rotWithShape="0">
               <a:srgbClr val="000000">
                 <a:alpha val="12000"/>
               </a:srgbClr>
             </a:outerShdw>
           </a:effectLst>
         </p:spPr>
+        <p:txBody>
+          <a:bodyPr/>
+          <a:lstStyle/>
+          <a:p>
+            <a:endParaRPr lang="en-IL"/>
+          </a:p>
+        </p:txBody>
       </p:sp>
       <p:sp>
         <p:nvSpPr>
@@ -11950,24 +12007,31 @@
           </a:solidFill>
           <a:ln/>
           <a:effectLst>
-            <a:outerShdw sx="100000" sy="100000" kx="0" ky="0" algn="bl" rotWithShape="0" blurRad="76200" dist="25400" dir="5400000">
+            <a:outerShdw blurRad="76200" dist="25400" dir="5400000" algn="bl" rotWithShape="0">
               <a:srgbClr val="000000">
                 <a:alpha val="12000"/>
               </a:srgbClr>
             </a:outerShdw>
           </a:effectLst>
         </p:spPr>
+        <p:txBody>
+          <a:bodyPr/>
+          <a:lstStyle/>
+          <a:p>
+            <a:endParaRPr lang="en-IL"/>
+          </a:p>
+        </p:txBody>
       </p:sp>
       <p:pic>
         <p:nvPicPr>
-          <p:cNvPr id="10" name="Image 1" descr="preencoded.png">    </p:cNvPr>
+          <p:cNvPr id="10" name="Image 1" descr="preencoded.png"/>
           <p:cNvPicPr>
             <a:picLocks noChangeAspect="1"/>
           </p:cNvPicPr>
           <p:nvPr/>
         </p:nvPicPr>
         <p:blipFill>
-          <a:blip r:embed="rId2"/>
+          <a:blip r:embed="rId4"/>
           <a:stretch>
             <a:fillRect/>
           </a:stretch>
@@ -12003,7 +12067,7 @@
           <a:bodyPr wrap="square" lIns="0" tIns="0" rIns="0" bIns="0" rtlCol="0" anchor="ctr"/>
           <a:lstStyle/>
           <a:p>
-            <a:pPr rtl="1" algn="l" indent="0" marL="0">
+            <a:pPr marL="0" indent="0" algn="l" rtl="1">
               <a:buNone/>
             </a:pPr>
             <a:r>
@@ -12042,7 +12106,7 @@
           <a:bodyPr wrap="square" lIns="0" tIns="0" rIns="0" bIns="0" rtlCol="0" anchor="ctr"/>
           <a:lstStyle/>
           <a:p>
-            <a:pPr algn="l" marL="342900" indent="-342900">
+            <a:pPr marL="342900" indent="-342900" algn="l">
               <a:lnSpc>
                 <a:spcPct val="125000"/>
               </a:lnSpc>
@@ -12063,7 +12127,7 @@
             <a:endParaRPr lang="en-US" sz="1350" dirty="0"/>
           </a:p>
           <a:p>
-            <a:pPr algn="l" marL="342900" indent="-342900">
+            <a:pPr marL="342900" indent="-342900" algn="l">
               <a:lnSpc>
                 <a:spcPct val="125000"/>
               </a:lnSpc>
@@ -12084,7 +12148,7 @@
             <a:endParaRPr lang="en-US" sz="1350" dirty="0"/>
           </a:p>
           <a:p>
-            <a:pPr algn="l" marL="342900" indent="-342900">
+            <a:pPr marL="342900" indent="-342900" algn="l">
               <a:lnSpc>
                 <a:spcPct val="125000"/>
               </a:lnSpc>
@@ -12122,6 +12186,7 @@
         <a:solidFill>
           <a:srgbClr val="0B3B45"/>
         </a:solidFill>
+        <a:effectLst/>
       </p:bgPr>
     </p:bg>
     <p:spTree>
@@ -12159,6 +12224,13 @@
             <a:prstDash val="solid"/>
           </a:ln>
         </p:spPr>
+        <p:txBody>
+          <a:bodyPr/>
+          <a:lstStyle/>
+          <a:p>
+            <a:endParaRPr lang="en-IL"/>
+          </a:p>
+        </p:txBody>
       </p:sp>
       <p:sp>
         <p:nvSpPr>
@@ -12179,6 +12251,13 @@
           </a:solidFill>
           <a:ln/>
         </p:spPr>
+        <p:txBody>
+          <a:bodyPr/>
+          <a:lstStyle/>
+          <a:p>
+            <a:endParaRPr lang="en-IL"/>
+          </a:p>
+        </p:txBody>
       </p:sp>
       <p:sp>
         <p:nvSpPr>
@@ -12201,7 +12280,7 @@
           <a:bodyPr wrap="square" lIns="0" tIns="0" rIns="0" bIns="0" rtlCol="0" anchor="ctr"/>
           <a:lstStyle/>
           <a:p>
-            <a:pPr rtl="1" algn="r" indent="0" marL="0">
+            <a:pPr marL="0" indent="0" algn="r" rtl="1">
               <a:buNone/>
             </a:pPr>
             <a:r>
@@ -12240,7 +12319,7 @@
           <a:bodyPr wrap="square" lIns="0" tIns="0" rIns="0" bIns="0" rtlCol="0" anchor="ctr"/>
           <a:lstStyle/>
           <a:p>
-            <a:pPr rtl="1" algn="r" indent="0" marL="0">
+            <a:pPr marL="0" indent="0" algn="r" rtl="1">
               <a:buNone/>
             </a:pPr>
             <a:r>
@@ -12284,13 +12363,20 @@
             <a:prstDash val="solid"/>
           </a:ln>
           <a:effectLst>
-            <a:outerShdw sx="100000" sy="100000" kx="0" ky="0" algn="bl" rotWithShape="0" blurRad="76200" dist="25400" dir="5400000">
+            <a:outerShdw blurRad="76200" dist="25400" dir="5400000" algn="bl" rotWithShape="0">
               <a:srgbClr val="000000">
                 <a:alpha val="12000"/>
               </a:srgbClr>
             </a:outerShdw>
           </a:effectLst>
         </p:spPr>
+        <p:txBody>
+          <a:bodyPr/>
+          <a:lstStyle/>
+          <a:p>
+            <a:endParaRPr lang="en-IL"/>
+          </a:p>
+        </p:txBody>
       </p:sp>
       <p:sp>
         <p:nvSpPr>
@@ -12311,24 +12397,31 @@
           </a:solidFill>
           <a:ln/>
           <a:effectLst>
-            <a:outerShdw sx="100000" sy="100000" kx="0" ky="0" algn="bl" rotWithShape="0" blurRad="76200" dist="25400" dir="5400000">
+            <a:outerShdw blurRad="76200" dist="25400" dir="5400000" algn="bl" rotWithShape="0">
               <a:srgbClr val="000000">
                 <a:alpha val="12000"/>
               </a:srgbClr>
             </a:outerShdw>
           </a:effectLst>
         </p:spPr>
+        <p:txBody>
+          <a:bodyPr/>
+          <a:lstStyle/>
+          <a:p>
+            <a:endParaRPr lang="en-IL"/>
+          </a:p>
+        </p:txBody>
       </p:sp>
       <p:pic>
         <p:nvPicPr>
-          <p:cNvPr id="8" name="Image 0" descr="preencoded.png">    </p:cNvPr>
+          <p:cNvPr id="8" name="Image 0" descr="preencoded.png"/>
           <p:cNvPicPr>
             <a:picLocks noChangeAspect="1"/>
           </p:cNvPicPr>
           <p:nvPr/>
         </p:nvPicPr>
         <p:blipFill>
-          <a:blip r:embed="rId1"/>
+          <a:blip r:embed="rId3"/>
           <a:stretch>
             <a:fillRect/>
           </a:stretch>
@@ -12364,7 +12457,7 @@
           <a:bodyPr wrap="square" lIns="0" tIns="0" rIns="0" bIns="0" rtlCol="0" anchor="ctr"/>
           <a:lstStyle/>
           <a:p>
-            <a:pPr rtl="1" algn="l" indent="0" marL="0">
+            <a:pPr marL="0" indent="0" algn="l" rtl="1">
               <a:buNone/>
             </a:pPr>
             <a:r>
@@ -12403,7 +12496,7 @@
           <a:bodyPr wrap="square" lIns="0" tIns="0" rIns="0" bIns="0" rtlCol="0" anchor="ctr"/>
           <a:lstStyle/>
           <a:p>
-            <a:pPr rtl="1" algn="l" indent="0" marL="0">
+            <a:pPr marL="0" indent="0" algn="l" rtl="1">
               <a:lnSpc>
                 <a:spcPct val="115000"/>
               </a:lnSpc>
@@ -12450,13 +12543,20 @@
             <a:prstDash val="solid"/>
           </a:ln>
           <a:effectLst>
-            <a:outerShdw sx="100000" sy="100000" kx="0" ky="0" algn="bl" rotWithShape="0" blurRad="76200" dist="25400" dir="5400000">
+            <a:outerShdw blurRad="76200" dist="25400" dir="5400000" algn="bl" rotWithShape="0">
               <a:srgbClr val="000000">
                 <a:alpha val="12000"/>
               </a:srgbClr>
             </a:outerShdw>
           </a:effectLst>
         </p:spPr>
+        <p:txBody>
+          <a:bodyPr/>
+          <a:lstStyle/>
+          <a:p>
+            <a:endParaRPr lang="en-IL"/>
+          </a:p>
+        </p:txBody>
       </p:sp>
       <p:sp>
         <p:nvSpPr>
@@ -12477,24 +12577,31 @@
           </a:solidFill>
           <a:ln/>
           <a:effectLst>
-            <a:outerShdw sx="100000" sy="100000" kx="0" ky="0" algn="bl" rotWithShape="0" blurRad="76200" dist="25400" dir="5400000">
+            <a:outerShdw blurRad="76200" dist="25400" dir="5400000" algn="bl" rotWithShape="0">
               <a:srgbClr val="000000">
                 <a:alpha val="12000"/>
               </a:srgbClr>
             </a:outerShdw>
           </a:effectLst>
         </p:spPr>
+        <p:txBody>
+          <a:bodyPr/>
+          <a:lstStyle/>
+          <a:p>
+            <a:endParaRPr lang="en-IL"/>
+          </a:p>
+        </p:txBody>
       </p:sp>
       <p:pic>
         <p:nvPicPr>
-          <p:cNvPr id="13" name="Image 1" descr="preencoded.png">    </p:cNvPr>
+          <p:cNvPr id="13" name="Image 1" descr="preencoded.png"/>
           <p:cNvPicPr>
             <a:picLocks noChangeAspect="1"/>
           </p:cNvPicPr>
           <p:nvPr/>
         </p:nvPicPr>
         <p:blipFill>
-          <a:blip r:embed="rId2"/>
+          <a:blip r:embed="rId4"/>
           <a:stretch>
             <a:fillRect/>
           </a:stretch>
@@ -12530,7 +12637,7 @@
           <a:bodyPr wrap="square" lIns="0" tIns="0" rIns="0" bIns="0" rtlCol="0" anchor="ctr"/>
           <a:lstStyle/>
           <a:p>
-            <a:pPr rtl="1" algn="l" indent="0" marL="0">
+            <a:pPr marL="0" indent="0" algn="l" rtl="1">
               <a:buNone/>
             </a:pPr>
             <a:r>
@@ -12569,7 +12676,7 @@
           <a:bodyPr wrap="square" lIns="0" tIns="0" rIns="0" bIns="0" rtlCol="0" anchor="ctr"/>
           <a:lstStyle/>
           <a:p>
-            <a:pPr rtl="1" algn="l" indent="0" marL="0">
+            <a:pPr marL="0" indent="0" algn="l" rtl="1">
               <a:lnSpc>
                 <a:spcPct val="115000"/>
               </a:lnSpc>
@@ -12616,13 +12723,20 @@
             <a:prstDash val="solid"/>
           </a:ln>
           <a:effectLst>
-            <a:outerShdw sx="100000" sy="100000" kx="0" ky="0" algn="bl" rotWithShape="0" blurRad="76200" dist="25400" dir="5400000">
+            <a:outerShdw blurRad="76200" dist="25400" dir="5400000" algn="bl" rotWithShape="0">
               <a:srgbClr val="000000">
                 <a:alpha val="12000"/>
               </a:srgbClr>
             </a:outerShdw>
           </a:effectLst>
         </p:spPr>
+        <p:txBody>
+          <a:bodyPr/>
+          <a:lstStyle/>
+          <a:p>
+            <a:endParaRPr lang="en-IL"/>
+          </a:p>
+        </p:txBody>
       </p:sp>
       <p:sp>
         <p:nvSpPr>
@@ -12643,24 +12757,31 @@
           </a:solidFill>
           <a:ln/>
           <a:effectLst>
-            <a:outerShdw sx="100000" sy="100000" kx="0" ky="0" algn="bl" rotWithShape="0" blurRad="76200" dist="25400" dir="5400000">
+            <a:outerShdw blurRad="76200" dist="25400" dir="5400000" algn="bl" rotWithShape="0">
               <a:srgbClr val="000000">
                 <a:alpha val="12000"/>
               </a:srgbClr>
             </a:outerShdw>
           </a:effectLst>
         </p:spPr>
+        <p:txBody>
+          <a:bodyPr/>
+          <a:lstStyle/>
+          <a:p>
+            <a:endParaRPr lang="en-IL"/>
+          </a:p>
+        </p:txBody>
       </p:sp>
       <p:pic>
         <p:nvPicPr>
-          <p:cNvPr id="18" name="Image 2" descr="preencoded.png">    </p:cNvPr>
+          <p:cNvPr id="18" name="Image 2" descr="preencoded.png"/>
           <p:cNvPicPr>
             <a:picLocks noChangeAspect="1"/>
           </p:cNvPicPr>
           <p:nvPr/>
         </p:nvPicPr>
         <p:blipFill>
-          <a:blip r:embed="rId3"/>
+          <a:blip r:embed="rId5"/>
           <a:stretch>
             <a:fillRect/>
           </a:stretch>
@@ -12696,7 +12817,7 @@
           <a:bodyPr wrap="square" lIns="0" tIns="0" rIns="0" bIns="0" rtlCol="0" anchor="ctr"/>
           <a:lstStyle/>
           <a:p>
-            <a:pPr rtl="1" algn="l" indent="0" marL="0">
+            <a:pPr marL="0" indent="0" algn="l" rtl="1">
               <a:buNone/>
             </a:pPr>
             <a:r>
@@ -12735,7 +12856,7 @@
           <a:bodyPr wrap="square" lIns="0" tIns="0" rIns="0" bIns="0" rtlCol="0" anchor="ctr"/>
           <a:lstStyle/>
           <a:p>
-            <a:pPr rtl="1" algn="l" indent="0" marL="0">
+            <a:pPr marL="0" indent="0" algn="l" rtl="1">
               <a:lnSpc>
                 <a:spcPct val="115000"/>
               </a:lnSpc>
@@ -12782,13 +12903,20 @@
             <a:prstDash val="solid"/>
           </a:ln>
           <a:effectLst>
-            <a:outerShdw sx="100000" sy="100000" kx="0" ky="0" algn="bl" rotWithShape="0" blurRad="76200" dist="25400" dir="5400000">
+            <a:outerShdw blurRad="76200" dist="25400" dir="5400000" algn="bl" rotWithShape="0">
               <a:srgbClr val="000000">
                 <a:alpha val="12000"/>
               </a:srgbClr>
             </a:outerShdw>
           </a:effectLst>
         </p:spPr>
+        <p:txBody>
+          <a:bodyPr/>
+          <a:lstStyle/>
+          <a:p>
+            <a:endParaRPr lang="en-IL"/>
+          </a:p>
+        </p:txBody>
       </p:sp>
       <p:sp>
         <p:nvSpPr>
@@ -12809,24 +12937,31 @@
           </a:solidFill>
           <a:ln/>
           <a:effectLst>
-            <a:outerShdw sx="100000" sy="100000" kx="0" ky="0" algn="bl" rotWithShape="0" blurRad="76200" dist="25400" dir="5400000">
+            <a:outerShdw blurRad="76200" dist="25400" dir="5400000" algn="bl" rotWithShape="0">
               <a:srgbClr val="000000">
                 <a:alpha val="12000"/>
               </a:srgbClr>
             </a:outerShdw>
           </a:effectLst>
         </p:spPr>
+        <p:txBody>
+          <a:bodyPr/>
+          <a:lstStyle/>
+          <a:p>
+            <a:endParaRPr lang="en-IL"/>
+          </a:p>
+        </p:txBody>
       </p:sp>
       <p:pic>
         <p:nvPicPr>
-          <p:cNvPr id="23" name="Image 3" descr="preencoded.png">    </p:cNvPr>
+          <p:cNvPr id="23" name="Image 3" descr="preencoded.png"/>
           <p:cNvPicPr>
             <a:picLocks noChangeAspect="1"/>
           </p:cNvPicPr>
           <p:nvPr/>
         </p:nvPicPr>
         <p:blipFill>
-          <a:blip r:embed="rId4"/>
+          <a:blip r:embed="rId6"/>
           <a:stretch>
             <a:fillRect/>
           </a:stretch>
@@ -12862,7 +12997,7 @@
           <a:bodyPr wrap="square" lIns="0" tIns="0" rIns="0" bIns="0" rtlCol="0" anchor="ctr"/>
           <a:lstStyle/>
           <a:p>
-            <a:pPr rtl="1" algn="l" indent="0" marL="0">
+            <a:pPr marL="0" indent="0" algn="l" rtl="1">
               <a:buNone/>
             </a:pPr>
             <a:r>
@@ -12901,7 +13036,7 @@
           <a:bodyPr wrap="square" lIns="0" tIns="0" rIns="0" bIns="0" rtlCol="0" anchor="ctr"/>
           <a:lstStyle/>
           <a:p>
-            <a:pPr rtl="1" algn="l" indent="0" marL="0">
+            <a:pPr marL="0" indent="0" algn="l" rtl="1">
               <a:lnSpc>
                 <a:spcPct val="115000"/>
               </a:lnSpc>
@@ -12943,7 +13078,7 @@
           <a:bodyPr wrap="square" lIns="0" tIns="0" rIns="0" bIns="0" rtlCol="0" anchor="ctr"/>
           <a:lstStyle/>
           <a:p>
-            <a:pPr rtl="1" algn="l" indent="0" marL="0">
+            <a:pPr marL="0" indent="0" algn="l" rtl="1">
               <a:buNone/>
             </a:pPr>
             <a:r>
@@ -12977,6 +13112,7 @@
         <a:solidFill>
           <a:srgbClr val="FFFFFF"/>
         </a:solidFill>
+        <a:effectLst/>
       </p:bgPr>
     </p:bg>
     <p:spTree>
@@ -13014,6 +13150,13 @@
             <a:prstDash val="solid"/>
           </a:ln>
         </p:spPr>
+        <p:txBody>
+          <a:bodyPr/>
+          <a:lstStyle/>
+          <a:p>
+            <a:endParaRPr lang="en-IL"/>
+          </a:p>
+        </p:txBody>
       </p:sp>
       <p:sp>
         <p:nvSpPr>
@@ -13034,6 +13177,13 @@
           </a:solidFill>
           <a:ln/>
         </p:spPr>
+        <p:txBody>
+          <a:bodyPr/>
+          <a:lstStyle/>
+          <a:p>
+            <a:endParaRPr lang="en-IL"/>
+          </a:p>
+        </p:txBody>
       </p:sp>
       <p:sp>
         <p:nvSpPr>
@@ -13056,11 +13206,11 @@
           <a:bodyPr wrap="square" lIns="0" tIns="0" rIns="0" bIns="0" rtlCol="0" anchor="ctr"/>
           <a:lstStyle/>
           <a:p>
-            <a:pPr rtl="1" algn="r" indent="0" marL="0">
+            <a:pPr marL="0" indent="0" algn="r" rtl="1">
               <a:buNone/>
             </a:pPr>
             <a:r>
-              <a:rPr lang="en-US" sz="1200" b="1" spc="100" kern="0" dirty="0">
+              <a:rPr lang="en-US" sz="1200" b="1" kern="0" spc="100" dirty="0">
                 <a:solidFill>
                   <a:srgbClr val="0E8A8F"/>
                 </a:solidFill>
@@ -13095,7 +13245,7 @@
           <a:bodyPr wrap="square" lIns="0" tIns="0" rIns="0" bIns="0" rtlCol="0" anchor="ctr"/>
           <a:lstStyle/>
           <a:p>
-            <a:pPr rtl="1" algn="r" indent="0" marL="0">
+            <a:pPr marL="0" indent="0" algn="r" rtl="1">
               <a:buNone/>
             </a:pPr>
             <a:r>
@@ -13134,7 +13284,7 @@
           <a:bodyPr wrap="square" lIns="0" tIns="0" rIns="0" bIns="0" rtlCol="0" anchor="ctr"/>
           <a:lstStyle/>
           <a:p>
-            <a:pPr rtl="1" algn="l" indent="0" marL="0">
+            <a:pPr marL="0" indent="0" algn="l" rtl="1">
               <a:buNone/>
             </a:pPr>
             <a:r>
@@ -13178,13 +13328,20 @@
             <a:prstDash val="solid"/>
           </a:ln>
           <a:effectLst>
-            <a:outerShdw sx="100000" sy="100000" kx="0" ky="0" algn="bl" rotWithShape="0" blurRad="76200" dist="25400" dir="5400000">
+            <a:outerShdw blurRad="76200" dist="25400" dir="5400000" algn="bl" rotWithShape="0">
               <a:srgbClr val="000000">
                 <a:alpha val="12000"/>
               </a:srgbClr>
             </a:outerShdw>
           </a:effectLst>
         </p:spPr>
+        <p:txBody>
+          <a:bodyPr/>
+          <a:lstStyle/>
+          <a:p>
+            <a:endParaRPr lang="en-IL"/>
+          </a:p>
+        </p:txBody>
       </p:sp>
       <p:sp>
         <p:nvSpPr>
@@ -13205,24 +13362,31 @@
           </a:solidFill>
           <a:ln/>
           <a:effectLst>
-            <a:outerShdw sx="100000" sy="100000" kx="0" ky="0" algn="bl" rotWithShape="0" blurRad="76200" dist="25400" dir="5400000">
+            <a:outerShdw blurRad="76200" dist="25400" dir="5400000" algn="bl" rotWithShape="0">
               <a:srgbClr val="000000">
                 <a:alpha val="12000"/>
               </a:srgbClr>
             </a:outerShdw>
           </a:effectLst>
         </p:spPr>
+        <p:txBody>
+          <a:bodyPr/>
+          <a:lstStyle/>
+          <a:p>
+            <a:endParaRPr lang="en-IL"/>
+          </a:p>
+        </p:txBody>
       </p:sp>
       <p:pic>
         <p:nvPicPr>
-          <p:cNvPr id="9" name="Image 0" descr="preencoded.png">    </p:cNvPr>
+          <p:cNvPr id="9" name="Image 0" descr="preencoded.png"/>
           <p:cNvPicPr>
             <a:picLocks noChangeAspect="1"/>
           </p:cNvPicPr>
           <p:nvPr/>
         </p:nvPicPr>
         <p:blipFill>
-          <a:blip r:embed="rId1"/>
+          <a:blip r:embed="rId3"/>
           <a:stretch>
             <a:fillRect/>
           </a:stretch>
@@ -13258,7 +13422,7 @@
           <a:bodyPr wrap="square" lIns="0" tIns="0" rIns="0" bIns="0" rtlCol="0" anchor="ctr"/>
           <a:lstStyle/>
           <a:p>
-            <a:pPr rtl="1" algn="l" indent="0" marL="0">
+            <a:pPr marL="0" indent="0" algn="l" rtl="1">
               <a:buNone/>
             </a:pPr>
             <a:r>
@@ -13297,7 +13461,7 @@
           <a:bodyPr wrap="square" lIns="0" tIns="0" rIns="0" bIns="0" rtlCol="0" anchor="ctr"/>
           <a:lstStyle/>
           <a:p>
-            <a:pPr rtl="1" algn="l" indent="0" marL="0">
+            <a:pPr marL="0" indent="0" algn="l" rtl="1">
               <a:lnSpc>
                 <a:spcPct val="115000"/>
               </a:lnSpc>
@@ -13344,13 +13508,20 @@
             <a:prstDash val="solid"/>
           </a:ln>
           <a:effectLst>
-            <a:outerShdw sx="100000" sy="100000" kx="0" ky="0" algn="bl" rotWithShape="0" blurRad="76200" dist="25400" dir="5400000">
+            <a:outerShdw blurRad="76200" dist="25400" dir="5400000" algn="bl" rotWithShape="0">
               <a:srgbClr val="000000">
                 <a:alpha val="12000"/>
               </a:srgbClr>
             </a:outerShdw>
           </a:effectLst>
         </p:spPr>
+        <p:txBody>
+          <a:bodyPr/>
+          <a:lstStyle/>
+          <a:p>
+            <a:endParaRPr lang="en-IL"/>
+          </a:p>
+        </p:txBody>
       </p:sp>
       <p:sp>
         <p:nvSpPr>
@@ -13371,24 +13542,31 @@
           </a:solidFill>
           <a:ln/>
           <a:effectLst>
-            <a:outerShdw sx="100000" sy="100000" kx="0" ky="0" algn="bl" rotWithShape="0" blurRad="76200" dist="25400" dir="5400000">
+            <a:outerShdw blurRad="76200" dist="25400" dir="5400000" algn="bl" rotWithShape="0">
               <a:srgbClr val="000000">
                 <a:alpha val="12000"/>
               </a:srgbClr>
             </a:outerShdw>
           </a:effectLst>
         </p:spPr>
+        <p:txBody>
+          <a:bodyPr/>
+          <a:lstStyle/>
+          <a:p>
+            <a:endParaRPr lang="en-IL"/>
+          </a:p>
+        </p:txBody>
       </p:sp>
       <p:pic>
         <p:nvPicPr>
-          <p:cNvPr id="14" name="Image 1" descr="preencoded.png">    </p:cNvPr>
+          <p:cNvPr id="14" name="Image 1" descr="preencoded.png"/>
           <p:cNvPicPr>
             <a:picLocks noChangeAspect="1"/>
           </p:cNvPicPr>
           <p:nvPr/>
         </p:nvPicPr>
         <p:blipFill>
-          <a:blip r:embed="rId2"/>
+          <a:blip r:embed="rId4"/>
           <a:stretch>
             <a:fillRect/>
           </a:stretch>
@@ -13424,7 +13602,7 @@
           <a:bodyPr wrap="square" lIns="0" tIns="0" rIns="0" bIns="0" rtlCol="0" anchor="ctr"/>
           <a:lstStyle/>
           <a:p>
-            <a:pPr rtl="1" algn="l" indent="0" marL="0">
+            <a:pPr marL="0" indent="0" algn="l" rtl="1">
               <a:buNone/>
             </a:pPr>
             <a:r>
@@ -13463,7 +13641,7 @@
           <a:bodyPr wrap="square" lIns="0" tIns="0" rIns="0" bIns="0" rtlCol="0" anchor="ctr"/>
           <a:lstStyle/>
           <a:p>
-            <a:pPr rtl="1" algn="l" indent="0" marL="0">
+            <a:pPr marL="0" indent="0" algn="l" rtl="1">
               <a:lnSpc>
                 <a:spcPct val="115000"/>
               </a:lnSpc>
@@ -13510,13 +13688,20 @@
             <a:prstDash val="solid"/>
           </a:ln>
           <a:effectLst>
-            <a:outerShdw sx="100000" sy="100000" kx="0" ky="0" algn="bl" rotWithShape="0" blurRad="76200" dist="25400" dir="5400000">
+            <a:outerShdw blurRad="76200" dist="25400" dir="5400000" algn="bl" rotWithShape="0">
               <a:srgbClr val="000000">
                 <a:alpha val="12000"/>
               </a:srgbClr>
             </a:outerShdw>
           </a:effectLst>
         </p:spPr>
+        <p:txBody>
+          <a:bodyPr/>
+          <a:lstStyle/>
+          <a:p>
+            <a:endParaRPr lang="en-IL"/>
+          </a:p>
+        </p:txBody>
       </p:sp>
       <p:sp>
         <p:nvSpPr>
@@ -13537,24 +13722,31 @@
           </a:solidFill>
           <a:ln/>
           <a:effectLst>
-            <a:outerShdw sx="100000" sy="100000" kx="0" ky="0" algn="bl" rotWithShape="0" blurRad="76200" dist="25400" dir="5400000">
+            <a:outerShdw blurRad="76200" dist="25400" dir="5400000" algn="bl" rotWithShape="0">
               <a:srgbClr val="000000">
                 <a:alpha val="12000"/>
               </a:srgbClr>
             </a:outerShdw>
           </a:effectLst>
         </p:spPr>
+        <p:txBody>
+          <a:bodyPr/>
+          <a:lstStyle/>
+          <a:p>
+            <a:endParaRPr lang="en-IL"/>
+          </a:p>
+        </p:txBody>
       </p:sp>
       <p:pic>
         <p:nvPicPr>
-          <p:cNvPr id="19" name="Image 2" descr="preencoded.png">    </p:cNvPr>
+          <p:cNvPr id="19" name="Image 2" descr="preencoded.png"/>
           <p:cNvPicPr>
             <a:picLocks noChangeAspect="1"/>
           </p:cNvPicPr>
           <p:nvPr/>
         </p:nvPicPr>
         <p:blipFill>
-          <a:blip r:embed="rId3"/>
+          <a:blip r:embed="rId5"/>
           <a:stretch>
             <a:fillRect/>
           </a:stretch>
@@ -13590,7 +13782,7 @@
           <a:bodyPr wrap="square" lIns="0" tIns="0" rIns="0" bIns="0" rtlCol="0" anchor="ctr"/>
           <a:lstStyle/>
           <a:p>
-            <a:pPr rtl="1" algn="l" indent="0" marL="0">
+            <a:pPr marL="0" indent="0" algn="l" rtl="1">
               <a:buNone/>
             </a:pPr>
             <a:r>
@@ -13629,7 +13821,7 @@
           <a:bodyPr wrap="square" lIns="0" tIns="0" rIns="0" bIns="0" rtlCol="0" anchor="ctr"/>
           <a:lstStyle/>
           <a:p>
-            <a:pPr rtl="1" algn="l" indent="0" marL="0">
+            <a:pPr marL="0" indent="0" algn="l" rtl="1">
               <a:lnSpc>
                 <a:spcPct val="115000"/>
               </a:lnSpc>
@@ -13676,13 +13868,20 @@
             <a:prstDash val="solid"/>
           </a:ln>
           <a:effectLst>
-            <a:outerShdw sx="100000" sy="100000" kx="0" ky="0" algn="bl" rotWithShape="0" blurRad="76200" dist="25400" dir="5400000">
+            <a:outerShdw blurRad="76200" dist="25400" dir="5400000" algn="bl" rotWithShape="0">
               <a:srgbClr val="000000">
                 <a:alpha val="12000"/>
               </a:srgbClr>
             </a:outerShdw>
           </a:effectLst>
         </p:spPr>
+        <p:txBody>
+          <a:bodyPr/>
+          <a:lstStyle/>
+          <a:p>
+            <a:endParaRPr lang="en-IL"/>
+          </a:p>
+        </p:txBody>
       </p:sp>
       <p:sp>
         <p:nvSpPr>
@@ -13703,24 +13902,31 @@
           </a:solidFill>
           <a:ln/>
           <a:effectLst>
-            <a:outerShdw sx="100000" sy="100000" kx="0" ky="0" algn="bl" rotWithShape="0" blurRad="76200" dist="25400" dir="5400000">
+            <a:outerShdw blurRad="76200" dist="25400" dir="5400000" algn="bl" rotWithShape="0">
               <a:srgbClr val="000000">
                 <a:alpha val="12000"/>
               </a:srgbClr>
             </a:outerShdw>
           </a:effectLst>
         </p:spPr>
+        <p:txBody>
+          <a:bodyPr/>
+          <a:lstStyle/>
+          <a:p>
+            <a:endParaRPr lang="en-IL"/>
+          </a:p>
+        </p:txBody>
       </p:sp>
       <p:pic>
         <p:nvPicPr>
-          <p:cNvPr id="24" name="Image 3" descr="preencoded.png">    </p:cNvPr>
+          <p:cNvPr id="24" name="Image 3" descr="preencoded.png"/>
           <p:cNvPicPr>
             <a:picLocks noChangeAspect="1"/>
           </p:cNvPicPr>
           <p:nvPr/>
         </p:nvPicPr>
         <p:blipFill>
-          <a:blip r:embed="rId4"/>
+          <a:blip r:embed="rId6"/>
           <a:stretch>
             <a:fillRect/>
           </a:stretch>
@@ -13756,7 +13962,7 @@
           <a:bodyPr wrap="square" lIns="0" tIns="0" rIns="0" bIns="0" rtlCol="0" anchor="ctr"/>
           <a:lstStyle/>
           <a:p>
-            <a:pPr rtl="1" algn="l" indent="0" marL="0">
+            <a:pPr marL="0" indent="0" algn="l" rtl="1">
               <a:buNone/>
             </a:pPr>
             <a:r>
@@ -13795,7 +14001,7 @@
           <a:bodyPr wrap="square" lIns="0" tIns="0" rIns="0" bIns="0" rtlCol="0" anchor="ctr"/>
           <a:lstStyle/>
           <a:p>
-            <a:pPr rtl="1" algn="l" indent="0" marL="0">
+            <a:pPr marL="0" indent="0" algn="l" rtl="1">
               <a:lnSpc>
                 <a:spcPct val="115000"/>
               </a:lnSpc>
@@ -13832,6 +14038,7 @@
         <a:solidFill>
           <a:srgbClr val="0B3B45"/>
         </a:solidFill>
+        <a:effectLst/>
       </p:bgPr>
     </p:bg>
     <p:spTree>
@@ -13871,6 +14078,13 @@
             <a:prstDash val="solid"/>
           </a:ln>
         </p:spPr>
+        <p:txBody>
+          <a:bodyPr/>
+          <a:lstStyle/>
+          <a:p>
+            <a:endParaRPr lang="en-IL"/>
+          </a:p>
+        </p:txBody>
       </p:sp>
       <p:sp>
         <p:nvSpPr>
@@ -13895,6 +14109,13 @@
             <a:prstDash val="solid"/>
           </a:ln>
         </p:spPr>
+        <p:txBody>
+          <a:bodyPr/>
+          <a:lstStyle/>
+          <a:p>
+            <a:endParaRPr lang="en-IL"/>
+          </a:p>
+        </p:txBody>
       </p:sp>
       <p:sp>
         <p:nvSpPr>
@@ -13919,6 +14140,13 @@
             <a:prstDash val="solid"/>
           </a:ln>
         </p:spPr>
+        <p:txBody>
+          <a:bodyPr/>
+          <a:lstStyle/>
+          <a:p>
+            <a:endParaRPr lang="en-IL"/>
+          </a:p>
+        </p:txBody>
       </p:sp>
       <p:sp>
         <p:nvSpPr>
@@ -13943,6 +14171,13 @@
             <a:prstDash val="solid"/>
           </a:ln>
         </p:spPr>
+        <p:txBody>
+          <a:bodyPr/>
+          <a:lstStyle/>
+          <a:p>
+            <a:endParaRPr lang="en-IL"/>
+          </a:p>
+        </p:txBody>
       </p:sp>
       <p:sp>
         <p:nvSpPr>
@@ -13963,24 +14198,31 @@
           </a:solidFill>
           <a:ln/>
           <a:effectLst>
-            <a:outerShdw sx="100000" sy="100000" kx="0" ky="0" algn="bl" rotWithShape="0" blurRad="76200" dist="25400" dir="5400000">
+            <a:outerShdw blurRad="76200" dist="25400" dir="5400000" algn="bl" rotWithShape="0">
               <a:srgbClr val="000000">
                 <a:alpha val="12000"/>
               </a:srgbClr>
             </a:outerShdw>
           </a:effectLst>
         </p:spPr>
+        <p:txBody>
+          <a:bodyPr/>
+          <a:lstStyle/>
+          <a:p>
+            <a:endParaRPr lang="en-IL"/>
+          </a:p>
+        </p:txBody>
       </p:sp>
       <p:pic>
         <p:nvPicPr>
-          <p:cNvPr id="7" name="Image 0" descr="preencoded.png">    </p:cNvPr>
+          <p:cNvPr id="7" name="Image 0" descr="preencoded.png"/>
           <p:cNvPicPr>
             <a:picLocks noChangeAspect="1"/>
           </p:cNvPicPr>
           <p:nvPr/>
         </p:nvPicPr>
         <p:blipFill>
-          <a:blip r:embed="rId1"/>
+          <a:blip r:embed="rId3"/>
           <a:stretch>
             <a:fillRect/>
           </a:stretch>
@@ -14016,7 +14258,7 @@
           <a:bodyPr wrap="square" lIns="0" tIns="0" rIns="0" bIns="0" rtlCol="0" anchor="ctr"/>
           <a:lstStyle/>
           <a:p>
-            <a:pPr rtl="1" algn="l" indent="0" marL="0">
+            <a:pPr marL="0" indent="0" algn="l" rtl="1">
               <a:buNone/>
             </a:pPr>
             <a:r>
@@ -14055,7 +14297,7 @@
           <a:bodyPr wrap="square" lIns="0" tIns="0" rIns="0" bIns="0" rtlCol="0" anchor="ctr"/>
           <a:lstStyle/>
           <a:p>
-            <a:pPr rtl="1" algn="l" indent="0" marL="0">
+            <a:pPr marL="0" indent="0" algn="l" rtl="1">
               <a:buNone/>
             </a:pPr>
             <a:r>
@@ -14094,7 +14336,7 @@
           <a:bodyPr wrap="square" lIns="0" tIns="0" rIns="0" bIns="0" rtlCol="0" anchor="ctr"/>
           <a:lstStyle/>
           <a:p>
-            <a:pPr algn="l" indent="0" marL="0">
+            <a:pPr marL="0" indent="0" algn="l">
               <a:buNone/>
             </a:pPr>
             <a:r>
@@ -14108,9 +14350,6 @@
               </a:rPr>
               <a:t>github.com/YanikGotie/hebrew-rights-retrieval   ·   </a:t>
             </a:r>
-            <a:pPr algn="l" indent="0" marL="0">
-              <a:buNone/>
-            </a:pPr>
             <a:r>
               <a:rPr lang="en-US" sz="1400" b="1" dirty="0">
                 <a:solidFill>
@@ -14152,13 +14391,20 @@
             <a:prstDash val="solid"/>
           </a:ln>
           <a:effectLst>
-            <a:outerShdw sx="100000" sy="100000" kx="0" ky="0" algn="bl" rotWithShape="0" blurRad="76200" dist="25400" dir="5400000">
+            <a:outerShdw blurRad="76200" dist="25400" dir="5400000" algn="bl" rotWithShape="0">
               <a:srgbClr val="000000">
                 <a:alpha val="12000"/>
               </a:srgbClr>
             </a:outerShdw>
           </a:effectLst>
         </p:spPr>
+        <p:txBody>
+          <a:bodyPr/>
+          <a:lstStyle/>
+          <a:p>
+            <a:endParaRPr lang="en-IL"/>
+          </a:p>
+        </p:txBody>
       </p:sp>
       <p:sp>
         <p:nvSpPr>
@@ -14179,24 +14425,31 @@
           </a:solidFill>
           <a:ln/>
           <a:effectLst>
-            <a:outerShdw sx="100000" sy="100000" kx="0" ky="0" algn="bl" rotWithShape="0" blurRad="76200" dist="25400" dir="5400000">
+            <a:outerShdw blurRad="76200" dist="25400" dir="5400000" algn="bl" rotWithShape="0">
               <a:srgbClr val="000000">
                 <a:alpha val="12000"/>
               </a:srgbClr>
             </a:outerShdw>
           </a:effectLst>
         </p:spPr>
+        <p:txBody>
+          <a:bodyPr/>
+          <a:lstStyle/>
+          <a:p>
+            <a:endParaRPr lang="en-IL"/>
+          </a:p>
+        </p:txBody>
       </p:sp>
       <p:pic>
         <p:nvPicPr>
-          <p:cNvPr id="13" name="Image 1" descr="preencoded.png">    </p:cNvPr>
+          <p:cNvPr id="13" name="Image 1" descr="preencoded.png"/>
           <p:cNvPicPr>
             <a:picLocks noChangeAspect="1"/>
           </p:cNvPicPr>
           <p:nvPr/>
         </p:nvPicPr>
         <p:blipFill>
-          <a:blip r:embed="rId2"/>
+          <a:blip r:embed="rId4"/>
           <a:stretch>
             <a:fillRect/>
           </a:stretch>
@@ -14232,7 +14485,7 @@
           <a:bodyPr wrap="square" lIns="0" tIns="0" rIns="0" bIns="0" rtlCol="0" anchor="ctr"/>
           <a:lstStyle/>
           <a:p>
-            <a:pPr rtl="1" algn="l" indent="0" marL="0">
+            <a:pPr marL="0" indent="0" algn="l" rtl="1">
               <a:buNone/>
             </a:pPr>
             <a:r>
@@ -14271,7 +14524,7 @@
           <a:bodyPr wrap="square" lIns="0" tIns="0" rIns="0" bIns="0" rtlCol="0" anchor="ctr"/>
           <a:lstStyle/>
           <a:p>
-            <a:pPr rtl="1" algn="l" indent="0" marL="0">
+            <a:pPr marL="0" indent="0" algn="l" rtl="1">
               <a:lnSpc>
                 <a:spcPct val="110000"/>
               </a:lnSpc>
@@ -14308,6 +14561,7 @@
         <a:solidFill>
           <a:srgbClr val="FFFFFF"/>
         </a:solidFill>
+        <a:effectLst/>
       </p:bgPr>
     </p:bg>
     <p:spTree>
@@ -14345,6 +14599,13 @@
             <a:prstDash val="solid"/>
           </a:ln>
         </p:spPr>
+        <p:txBody>
+          <a:bodyPr/>
+          <a:lstStyle/>
+          <a:p>
+            <a:endParaRPr lang="en-IL"/>
+          </a:p>
+        </p:txBody>
       </p:sp>
       <p:sp>
         <p:nvSpPr>
@@ -14365,6 +14626,13 @@
           </a:solidFill>
           <a:ln/>
         </p:spPr>
+        <p:txBody>
+          <a:bodyPr/>
+          <a:lstStyle/>
+          <a:p>
+            <a:endParaRPr lang="en-IL"/>
+          </a:p>
+        </p:txBody>
       </p:sp>
       <p:sp>
         <p:nvSpPr>
@@ -14387,11 +14655,11 @@
           <a:bodyPr wrap="square" lIns="0" tIns="0" rIns="0" bIns="0" rtlCol="0" anchor="ctr"/>
           <a:lstStyle/>
           <a:p>
-            <a:pPr rtl="1" algn="r" indent="0" marL="0">
+            <a:pPr marL="0" indent="0" algn="r" rtl="1">
               <a:buNone/>
             </a:pPr>
             <a:r>
-              <a:rPr lang="en-US" sz="1200" b="1" spc="100" kern="0" dirty="0">
+              <a:rPr lang="en-US" sz="1200" b="1" kern="0" spc="100" dirty="0">
                 <a:solidFill>
                   <a:srgbClr val="0E8A8F"/>
                 </a:solidFill>
@@ -14426,7 +14694,7 @@
           <a:bodyPr wrap="square" lIns="0" tIns="0" rIns="0" bIns="0" rtlCol="0" anchor="ctr"/>
           <a:lstStyle/>
           <a:p>
-            <a:pPr rtl="1" algn="r" indent="0" marL="0">
+            <a:pPr marL="0" indent="0" algn="r" rtl="1">
               <a:buNone/>
             </a:pPr>
             <a:r>
@@ -14465,7 +14733,7 @@
           <a:bodyPr wrap="square" lIns="0" tIns="0" rIns="0" bIns="0" rtlCol="0" anchor="ctr"/>
           <a:lstStyle/>
           <a:p>
-            <a:pPr rtl="1" algn="l" indent="0" marL="0">
+            <a:pPr marL="0" indent="0" algn="l" rtl="1">
               <a:buNone/>
             </a:pPr>
             <a:r>
@@ -14504,7 +14772,7 @@
           <a:bodyPr wrap="square" lIns="0" tIns="0" rIns="0" bIns="0" rtlCol="0" anchor="ctr"/>
           <a:lstStyle/>
           <a:p>
-            <a:pPr rtl="1" algn="r" indent="0" marL="0">
+            <a:pPr marL="0" indent="0" algn="r" rtl="1">
               <a:buNone/>
             </a:pPr>
             <a:r>
@@ -14548,13 +14816,20 @@
             <a:prstDash val="solid"/>
           </a:ln>
           <a:effectLst>
-            <a:outerShdw sx="100000" sy="100000" kx="0" ky="0" algn="bl" rotWithShape="0" blurRad="76200" dist="25400" dir="5400000">
+            <a:outerShdw blurRad="76200" dist="25400" dir="5400000" algn="bl" rotWithShape="0">
               <a:srgbClr val="000000">
                 <a:alpha val="12000"/>
               </a:srgbClr>
             </a:outerShdw>
           </a:effectLst>
         </p:spPr>
+        <p:txBody>
+          <a:bodyPr/>
+          <a:lstStyle/>
+          <a:p>
+            <a:endParaRPr lang="en-IL"/>
+          </a:p>
+        </p:txBody>
       </p:sp>
       <p:sp>
         <p:nvSpPr>
@@ -14575,24 +14850,31 @@
           </a:solidFill>
           <a:ln/>
           <a:effectLst>
-            <a:outerShdw sx="100000" sy="100000" kx="0" ky="0" algn="bl" rotWithShape="0" blurRad="76200" dist="25400" dir="5400000">
+            <a:outerShdw blurRad="76200" dist="25400" dir="5400000" algn="bl" rotWithShape="0">
               <a:srgbClr val="000000">
                 <a:alpha val="12000"/>
               </a:srgbClr>
             </a:outerShdw>
           </a:effectLst>
         </p:spPr>
+        <p:txBody>
+          <a:bodyPr/>
+          <a:lstStyle/>
+          <a:p>
+            <a:endParaRPr lang="en-IL"/>
+          </a:p>
+        </p:txBody>
       </p:sp>
       <p:pic>
         <p:nvPicPr>
-          <p:cNvPr id="10" name="Image 0" descr="preencoded.png">    </p:cNvPr>
+          <p:cNvPr id="10" name="Image 0" descr="preencoded.png"/>
           <p:cNvPicPr>
             <a:picLocks noChangeAspect="1"/>
           </p:cNvPicPr>
           <p:nvPr/>
         </p:nvPicPr>
         <p:blipFill>
-          <a:blip r:embed="rId1"/>
+          <a:blip r:embed="rId3"/>
           <a:stretch>
             <a:fillRect/>
           </a:stretch>
@@ -14628,7 +14910,7 @@
           <a:bodyPr wrap="square" lIns="0" tIns="0" rIns="0" bIns="0" rtlCol="0" anchor="ctr"/>
           <a:lstStyle/>
           <a:p>
-            <a:pPr rtl="1" algn="r" indent="0" marL="0">
+            <a:pPr marL="0" indent="0" algn="r" rtl="1">
               <a:buNone/>
             </a:pPr>
             <a:r>
@@ -14667,7 +14949,7 @@
           <a:bodyPr wrap="square" lIns="0" tIns="0" rIns="0" bIns="0" rtlCol="0" anchor="ctr"/>
           <a:lstStyle/>
           <a:p>
-            <a:pPr algn="l" indent="0" marL="0">
+            <a:pPr marL="0" indent="0" algn="l">
               <a:lnSpc>
                 <a:spcPct val="135000"/>
               </a:lnSpc>
@@ -14687,7 +14969,7 @@
             <a:endParaRPr lang="en-US" sz="1600" dirty="0"/>
           </a:p>
           <a:p>
-            <a:pPr algn="l" indent="0" marL="0">
+            <a:pPr marL="0" indent="0" algn="l">
               <a:lnSpc>
                 <a:spcPct val="135000"/>
               </a:lnSpc>
@@ -14707,7 +14989,7 @@
             <a:endParaRPr lang="en-US" sz="1600" dirty="0"/>
           </a:p>
           <a:p>
-            <a:pPr algn="l" indent="0" marL="0">
+            <a:pPr marL="0" indent="0" algn="l">
               <a:lnSpc>
                 <a:spcPct val="135000"/>
               </a:lnSpc>
@@ -14754,13 +15036,20 @@
             <a:prstDash val="solid"/>
           </a:ln>
           <a:effectLst>
-            <a:outerShdw sx="100000" sy="100000" kx="0" ky="0" algn="bl" rotWithShape="0" blurRad="76200" dist="25400" dir="5400000">
+            <a:outerShdw blurRad="76200" dist="25400" dir="5400000" algn="bl" rotWithShape="0">
               <a:srgbClr val="000000">
                 <a:alpha val="12000"/>
               </a:srgbClr>
             </a:outerShdw>
           </a:effectLst>
         </p:spPr>
+        <p:txBody>
+          <a:bodyPr/>
+          <a:lstStyle/>
+          <a:p>
+            <a:endParaRPr lang="en-IL"/>
+          </a:p>
+        </p:txBody>
       </p:sp>
       <p:sp>
         <p:nvSpPr>
@@ -14781,24 +15070,31 @@
           </a:solidFill>
           <a:ln/>
           <a:effectLst>
-            <a:outerShdw sx="100000" sy="100000" kx="0" ky="0" algn="bl" rotWithShape="0" blurRad="76200" dist="25400" dir="5400000">
+            <a:outerShdw blurRad="76200" dist="25400" dir="5400000" algn="bl" rotWithShape="0">
               <a:srgbClr val="000000">
                 <a:alpha val="12000"/>
               </a:srgbClr>
             </a:outerShdw>
           </a:effectLst>
         </p:spPr>
+        <p:txBody>
+          <a:bodyPr/>
+          <a:lstStyle/>
+          <a:p>
+            <a:endParaRPr lang="en-IL"/>
+          </a:p>
+        </p:txBody>
       </p:sp>
       <p:pic>
         <p:nvPicPr>
-          <p:cNvPr id="15" name="Image 1" descr="preencoded.png">    </p:cNvPr>
+          <p:cNvPr id="15" name="Image 1" descr="preencoded.png"/>
           <p:cNvPicPr>
             <a:picLocks noChangeAspect="1"/>
           </p:cNvPicPr>
           <p:nvPr/>
         </p:nvPicPr>
         <p:blipFill>
-          <a:blip r:embed="rId2"/>
+          <a:blip r:embed="rId4"/>
           <a:stretch>
             <a:fillRect/>
           </a:stretch>
@@ -14834,7 +15130,7 @@
           <a:bodyPr wrap="square" lIns="0" tIns="0" rIns="0" bIns="0" rtlCol="0" anchor="ctr"/>
           <a:lstStyle/>
           <a:p>
-            <a:pPr rtl="1" algn="r" indent="0" marL="0">
+            <a:pPr marL="0" indent="0" algn="r" rtl="1">
               <a:buNone/>
             </a:pPr>
             <a:r>
@@ -14873,7 +15169,7 @@
           <a:bodyPr wrap="square" lIns="0" tIns="0" rIns="0" bIns="0" rtlCol="0" anchor="ctr"/>
           <a:lstStyle/>
           <a:p>
-            <a:pPr algn="l" indent="0" marL="0">
+            <a:pPr marL="0" indent="0" algn="l">
               <a:lnSpc>
                 <a:spcPct val="135000"/>
               </a:lnSpc>
@@ -14893,7 +15189,7 @@
             <a:endParaRPr lang="en-US" sz="1600" dirty="0"/>
           </a:p>
           <a:p>
-            <a:pPr algn="l" indent="0" marL="0">
+            <a:pPr marL="0" indent="0" algn="l">
               <a:lnSpc>
                 <a:spcPct val="135000"/>
               </a:lnSpc>
@@ -14913,7 +15209,7 @@
             <a:endParaRPr lang="en-US" sz="1600" dirty="0"/>
           </a:p>
           <a:p>
-            <a:pPr algn="l" indent="0" marL="0">
+            <a:pPr marL="0" indent="0" algn="l">
               <a:lnSpc>
                 <a:spcPct val="135000"/>
               </a:lnSpc>
@@ -14955,7 +15251,7 @@
           <a:bodyPr wrap="square" lIns="0" tIns="0" rIns="0" bIns="0" rtlCol="0" anchor="ctr"/>
           <a:lstStyle/>
           <a:p>
-            <a:pPr rtl="1" algn="ctr" indent="0" marL="0">
+            <a:pPr marL="0" indent="0" algn="ctr" rtl="1">
               <a:buNone/>
             </a:pPr>
             <a:r>
@@ -14989,6 +15285,7 @@
         <a:solidFill>
           <a:srgbClr val="10303A"/>
         </a:solidFill>
+        <a:effectLst/>
       </p:bgPr>
     </p:bg>
     <p:spTree>
@@ -15026,6 +15323,13 @@
             <a:prstDash val="solid"/>
           </a:ln>
         </p:spPr>
+        <p:txBody>
+          <a:bodyPr/>
+          <a:lstStyle/>
+          <a:p>
+            <a:endParaRPr lang="en-IL"/>
+          </a:p>
+        </p:txBody>
       </p:sp>
       <p:sp>
         <p:nvSpPr>
@@ -15046,6 +15350,13 @@
           </a:solidFill>
           <a:ln/>
         </p:spPr>
+        <p:txBody>
+          <a:bodyPr/>
+          <a:lstStyle/>
+          <a:p>
+            <a:endParaRPr lang="en-IL"/>
+          </a:p>
+        </p:txBody>
       </p:sp>
       <p:sp>
         <p:nvSpPr>
@@ -15068,7 +15379,7 @@
           <a:bodyPr wrap="square" lIns="0" tIns="0" rIns="0" bIns="0" rtlCol="0" anchor="ctr"/>
           <a:lstStyle/>
           <a:p>
-            <a:pPr rtl="1" algn="r" indent="0" marL="0">
+            <a:pPr marL="0" indent="0" algn="r" rtl="1">
               <a:buNone/>
             </a:pPr>
             <a:r>
@@ -15107,7 +15418,7 @@
           <a:bodyPr wrap="square" lIns="0" tIns="0" rIns="0" bIns="0" rtlCol="0" anchor="ctr"/>
           <a:lstStyle/>
           <a:p>
-            <a:pPr rtl="1" algn="r" indent="0" marL="0">
+            <a:pPr marL="0" indent="0" algn="r" rtl="1">
               <a:buNone/>
             </a:pPr>
             <a:r>
@@ -15119,7 +15430,29 @@
                 <a:ea typeface="Cambria" pitchFamily="34" charset="-122"/>
                 <a:cs typeface="Cambria" pitchFamily="34" charset="-120"/>
               </a:rPr>
-              <a:t>האם אחזור מבוסס-משמעות עוזר — והאם שילובו עם חיפוש מילים עוזר יותר?</a:t>
+              <a:t>האם אחזור מבוסס-משמעות </a:t>
+            </a:r>
+            <a:r>
+              <a:rPr lang="en-US" sz="2700" b="1" dirty="0" err="1">
+                <a:solidFill>
+                  <a:srgbClr val="FFFFFF"/>
+                </a:solidFill>
+                <a:latin typeface="Cambria" pitchFamily="34" charset="0"/>
+                <a:ea typeface="Cambria" pitchFamily="34" charset="-122"/>
+                <a:cs typeface="Cambria" pitchFamily="34" charset="-120"/>
+              </a:rPr>
+              <a:t>עוזר</a:t>
+            </a:r>
+            <a:r>
+              <a:rPr lang="en-US" sz="2700" b="1" dirty="0">
+                <a:solidFill>
+                  <a:srgbClr val="FFFFFF"/>
+                </a:solidFill>
+                <a:latin typeface="Cambria" pitchFamily="34" charset="0"/>
+                <a:ea typeface="Cambria" pitchFamily="34" charset="-122"/>
+                <a:cs typeface="Cambria" pitchFamily="34" charset="-120"/>
+              </a:rPr>
+              <a:t> - והאם שילובו עם חיפוש מילים עוזר יותר?</a:t>
             </a:r>
             <a:endParaRPr lang="en-US" sz="2700" dirty="0"/>
           </a:p>
@@ -15151,13 +15484,20 @@
             <a:prstDash val="solid"/>
           </a:ln>
           <a:effectLst>
-            <a:outerShdw sx="100000" sy="100000" kx="0" ky="0" algn="bl" rotWithShape="0" blurRad="76200" dist="25400" dir="5400000">
+            <a:outerShdw blurRad="76200" dist="25400" dir="5400000" algn="bl" rotWithShape="0">
               <a:srgbClr val="000000">
                 <a:alpha val="12000"/>
               </a:srgbClr>
             </a:outerShdw>
           </a:effectLst>
         </p:spPr>
+        <p:txBody>
+          <a:bodyPr/>
+          <a:lstStyle/>
+          <a:p>
+            <a:endParaRPr lang="en-IL"/>
+          </a:p>
+        </p:txBody>
       </p:sp>
       <p:sp>
         <p:nvSpPr>
@@ -15180,6 +15520,13 @@
           </a:solidFill>
           <a:ln/>
         </p:spPr>
+        <p:txBody>
+          <a:bodyPr/>
+          <a:lstStyle/>
+          <a:p>
+            <a:endParaRPr lang="en-IL"/>
+          </a:p>
+        </p:txBody>
       </p:sp>
       <p:sp>
         <p:nvSpPr>
@@ -15202,7 +15549,7 @@
           <a:bodyPr wrap="square" lIns="0" tIns="0" rIns="0" bIns="0" rtlCol="0" anchor="ctr"/>
           <a:lstStyle/>
           <a:p>
-            <a:pPr rtl="1" algn="ctr" indent="0" marL="0">
+            <a:pPr marL="0" indent="0" algn="ctr" rtl="1">
               <a:buNone/>
             </a:pPr>
             <a:r>
@@ -15241,7 +15588,7 @@
           <a:bodyPr wrap="square" lIns="0" tIns="0" rIns="0" bIns="0" rtlCol="0" anchor="ctr"/>
           <a:lstStyle/>
           <a:p>
-            <a:pPr rtl="1" algn="l" indent="0" marL="0">
+            <a:pPr marL="0" indent="0" algn="l" rtl="1">
               <a:buNone/>
             </a:pPr>
             <a:r>
@@ -15280,7 +15627,7 @@
           <a:bodyPr wrap="square" lIns="0" tIns="0" rIns="0" bIns="0" rtlCol="0" anchor="ctr"/>
           <a:lstStyle/>
           <a:p>
-            <a:pPr rtl="1" algn="l" indent="0" marL="0">
+            <a:pPr marL="0" indent="0" algn="l" rtl="1">
               <a:lnSpc>
                 <a:spcPct val="125000"/>
               </a:lnSpc>
@@ -15327,13 +15674,20 @@
             <a:prstDash val="solid"/>
           </a:ln>
           <a:effectLst>
-            <a:outerShdw sx="100000" sy="100000" kx="0" ky="0" algn="bl" rotWithShape="0" blurRad="76200" dist="25400" dir="5400000">
+            <a:outerShdw blurRad="76200" dist="25400" dir="5400000" algn="bl" rotWithShape="0">
               <a:srgbClr val="000000">
                 <a:alpha val="12000"/>
               </a:srgbClr>
             </a:outerShdw>
           </a:effectLst>
         </p:spPr>
+        <p:txBody>
+          <a:bodyPr/>
+          <a:lstStyle/>
+          <a:p>
+            <a:endParaRPr lang="en-IL"/>
+          </a:p>
+        </p:txBody>
       </p:sp>
       <p:sp>
         <p:nvSpPr>
@@ -15356,6 +15710,13 @@
           </a:solidFill>
           <a:ln/>
         </p:spPr>
+        <p:txBody>
+          <a:bodyPr/>
+          <a:lstStyle/>
+          <a:p>
+            <a:endParaRPr lang="en-IL"/>
+          </a:p>
+        </p:txBody>
       </p:sp>
       <p:sp>
         <p:nvSpPr>
@@ -15378,7 +15739,7 @@
           <a:bodyPr wrap="square" lIns="0" tIns="0" rIns="0" bIns="0" rtlCol="0" anchor="ctr"/>
           <a:lstStyle/>
           <a:p>
-            <a:pPr rtl="1" algn="ctr" indent="0" marL="0">
+            <a:pPr marL="0" indent="0" algn="ctr" rtl="1">
               <a:buNone/>
             </a:pPr>
             <a:r>
@@ -15417,7 +15778,7 @@
           <a:bodyPr wrap="square" lIns="0" tIns="0" rIns="0" bIns="0" rtlCol="0" anchor="ctr"/>
           <a:lstStyle/>
           <a:p>
-            <a:pPr rtl="1" algn="l" indent="0" marL="0">
+            <a:pPr marL="0" indent="0" algn="l" rtl="1">
               <a:buNone/>
             </a:pPr>
             <a:r>
@@ -15456,7 +15817,7 @@
           <a:bodyPr wrap="square" lIns="0" tIns="0" rIns="0" bIns="0" rtlCol="0" anchor="ctr"/>
           <a:lstStyle/>
           <a:p>
-            <a:pPr rtl="1" algn="l" indent="0" marL="0">
+            <a:pPr marL="0" indent="0" algn="l" rtl="1">
               <a:lnSpc>
                 <a:spcPct val="125000"/>
               </a:lnSpc>
@@ -15498,20 +15859,9 @@
           <a:bodyPr wrap="square" lIns="0" tIns="0" rIns="0" bIns="0" rtlCol="0" anchor="ctr"/>
           <a:lstStyle/>
           <a:p>
-            <a:pPr rtl="1" algn="ctr" indent="0" marL="0">
+            <a:pPr marL="0" indent="0" algn="ctr" defTabSz="914400" rtl="0" eaLnBrk="1" latinLnBrk="0" hangingPunct="1">
               <a:buNone/>
             </a:pPr>
-            <a:r>
-              <a:rPr lang="en-US" sz="1400" i="1" dirty="0">
-                <a:solidFill>
-                  <a:srgbClr val="E0852F"/>
-                </a:solidFill>
-                <a:latin typeface="Calibri" pitchFamily="34" charset="0"/>
-                <a:ea typeface="Calibri" pitchFamily="34" charset="-122"/>
-                <a:cs typeface="Calibri" pitchFamily="34" charset="-120"/>
-              </a:rPr>
-              <a:t>ספוילר: השערה אחת מתאשרת, אחת נדחית — והניגוד הזה הוא הממצא.</a:t>
-            </a:r>
             <a:endParaRPr lang="en-US" sz="1400" dirty="0"/>
           </a:p>
         </p:txBody>
@@ -15532,6 +15882,7 @@
         <a:solidFill>
           <a:srgbClr val="FFFFFF"/>
         </a:solidFill>
+        <a:effectLst/>
       </p:bgPr>
     </p:bg>
     <p:spTree>
@@ -15569,6 +15920,14 @@
             <a:prstDash val="solid"/>
           </a:ln>
         </p:spPr>
+        <p:txBody>
+          <a:bodyPr/>
+          <a:lstStyle/>
+          <a:p>
+            <a:pPr algn="r" rtl="1"/>
+            <a:endParaRPr lang="en-IL"/>
+          </a:p>
+        </p:txBody>
       </p:sp>
       <p:sp>
         <p:nvSpPr>
@@ -15589,6 +15948,14 @@
           </a:solidFill>
           <a:ln/>
         </p:spPr>
+        <p:txBody>
+          <a:bodyPr/>
+          <a:lstStyle/>
+          <a:p>
+            <a:pPr algn="r" rtl="1"/>
+            <a:endParaRPr lang="en-IL"/>
+          </a:p>
+        </p:txBody>
       </p:sp>
       <p:sp>
         <p:nvSpPr>
@@ -15611,11 +15978,11 @@
           <a:bodyPr wrap="square" lIns="0" tIns="0" rIns="0" bIns="0" rtlCol="0" anchor="ctr"/>
           <a:lstStyle/>
           <a:p>
-            <a:pPr rtl="1" algn="r" indent="0" marL="0">
+            <a:pPr marL="0" indent="0" algn="r" rtl="1">
               <a:buNone/>
             </a:pPr>
             <a:r>
-              <a:rPr lang="en-US" sz="1200" b="1" spc="100" kern="0" dirty="0">
+              <a:rPr lang="en-US" sz="1200" b="1" kern="0" spc="100" dirty="0">
                 <a:solidFill>
                   <a:srgbClr val="0E8A8F"/>
                 </a:solidFill>
@@ -15650,7 +16017,7 @@
           <a:bodyPr wrap="square" lIns="0" tIns="0" rIns="0" bIns="0" rtlCol="0" anchor="ctr"/>
           <a:lstStyle/>
           <a:p>
-            <a:pPr rtl="1" algn="r" indent="0" marL="0">
+            <a:pPr marL="0" indent="0" algn="r" rtl="1">
               <a:buNone/>
             </a:pPr>
             <a:r>
@@ -15689,7 +16056,7 @@
           <a:bodyPr wrap="square" lIns="0" tIns="0" rIns="0" bIns="0" rtlCol="0" anchor="ctr"/>
           <a:lstStyle/>
           <a:p>
-            <a:pPr rtl="1" algn="l" indent="0" marL="0">
+            <a:pPr marL="0" indent="0" algn="r" rtl="1">
               <a:buNone/>
             </a:pPr>
             <a:r>
@@ -15733,13 +16100,21 @@
             <a:prstDash val="solid"/>
           </a:ln>
           <a:effectLst>
-            <a:outerShdw sx="100000" sy="100000" kx="0" ky="0" algn="bl" rotWithShape="0" blurRad="76200" dist="25400" dir="5400000">
+            <a:outerShdw blurRad="76200" dist="25400" dir="5400000" algn="bl" rotWithShape="0">
               <a:srgbClr val="000000">
                 <a:alpha val="12000"/>
               </a:srgbClr>
             </a:outerShdw>
           </a:effectLst>
         </p:spPr>
+        <p:txBody>
+          <a:bodyPr/>
+          <a:lstStyle/>
+          <a:p>
+            <a:pPr algn="r" rtl="1"/>
+            <a:endParaRPr lang="en-IL"/>
+          </a:p>
+        </p:txBody>
       </p:sp>
       <p:sp>
         <p:nvSpPr>
@@ -15760,24 +16135,32 @@
           </a:solidFill>
           <a:ln/>
           <a:effectLst>
-            <a:outerShdw sx="100000" sy="100000" kx="0" ky="0" algn="bl" rotWithShape="0" blurRad="76200" dist="25400" dir="5400000">
+            <a:outerShdw blurRad="76200" dist="25400" dir="5400000" algn="bl" rotWithShape="0">
               <a:srgbClr val="000000">
                 <a:alpha val="12000"/>
               </a:srgbClr>
             </a:outerShdw>
           </a:effectLst>
         </p:spPr>
+        <p:txBody>
+          <a:bodyPr/>
+          <a:lstStyle/>
+          <a:p>
+            <a:pPr algn="r" rtl="1"/>
+            <a:endParaRPr lang="en-IL"/>
+          </a:p>
+        </p:txBody>
       </p:sp>
       <p:pic>
         <p:nvPicPr>
-          <p:cNvPr id="9" name="Image 0" descr="preencoded.png">    </p:cNvPr>
+          <p:cNvPr id="9" name="Image 0" descr="preencoded.png"/>
           <p:cNvPicPr>
             <a:picLocks noChangeAspect="1"/>
           </p:cNvPicPr>
           <p:nvPr/>
         </p:nvPicPr>
         <p:blipFill>
-          <a:blip r:embed="rId1"/>
+          <a:blip r:embed="rId3"/>
           <a:stretch>
             <a:fillRect/>
           </a:stretch>
@@ -15813,7 +16196,7 @@
           <a:bodyPr wrap="square" lIns="0" tIns="0" rIns="0" bIns="0" rtlCol="0" anchor="ctr"/>
           <a:lstStyle/>
           <a:p>
-            <a:pPr rtl="1" algn="ctr" indent="0" marL="0">
+            <a:pPr marL="0" indent="0" algn="r" rtl="1">
               <a:buNone/>
             </a:pPr>
             <a:r>
@@ -15852,7 +16235,7 @@
           <a:bodyPr wrap="square" lIns="0" tIns="0" rIns="0" bIns="0" rtlCol="0" anchor="ctr"/>
           <a:lstStyle/>
           <a:p>
-            <a:pPr rtl="1" algn="ctr" indent="0" marL="0">
+            <a:pPr marL="0" indent="0" algn="r" rtl="1">
               <a:buNone/>
             </a:pPr>
             <a:r>
@@ -15891,7 +16274,7 @@
           <a:bodyPr wrap="square" lIns="0" tIns="0" rIns="0" bIns="0" rtlCol="0" anchor="ctr"/>
           <a:lstStyle/>
           <a:p>
-            <a:pPr rtl="1" algn="ctr" indent="0" marL="0">
+            <a:pPr marL="0" indent="0" algn="r" rtl="1">
               <a:buNone/>
             </a:pPr>
             <a:r>
@@ -15935,13 +16318,21 @@
             <a:prstDash val="solid"/>
           </a:ln>
           <a:effectLst>
-            <a:outerShdw sx="100000" sy="100000" kx="0" ky="0" algn="bl" rotWithShape="0" blurRad="76200" dist="25400" dir="5400000">
+            <a:outerShdw blurRad="76200" dist="25400" dir="5400000" algn="bl" rotWithShape="0">
               <a:srgbClr val="000000">
                 <a:alpha val="12000"/>
               </a:srgbClr>
             </a:outerShdw>
           </a:effectLst>
         </p:spPr>
+        <p:txBody>
+          <a:bodyPr/>
+          <a:lstStyle/>
+          <a:p>
+            <a:pPr algn="r" rtl="1"/>
+            <a:endParaRPr lang="en-IL"/>
+          </a:p>
+        </p:txBody>
       </p:sp>
       <p:sp>
         <p:nvSpPr>
@@ -15962,24 +16353,32 @@
           </a:solidFill>
           <a:ln/>
           <a:effectLst>
-            <a:outerShdw sx="100000" sy="100000" kx="0" ky="0" algn="bl" rotWithShape="0" blurRad="76200" dist="25400" dir="5400000">
+            <a:outerShdw blurRad="76200" dist="25400" dir="5400000" algn="bl" rotWithShape="0">
               <a:srgbClr val="000000">
                 <a:alpha val="12000"/>
               </a:srgbClr>
             </a:outerShdw>
           </a:effectLst>
         </p:spPr>
+        <p:txBody>
+          <a:bodyPr/>
+          <a:lstStyle/>
+          <a:p>
+            <a:pPr algn="r" rtl="1"/>
+            <a:endParaRPr lang="en-IL"/>
+          </a:p>
+        </p:txBody>
       </p:sp>
       <p:pic>
         <p:nvPicPr>
-          <p:cNvPr id="15" name="Image 1" descr="preencoded.png">    </p:cNvPr>
+          <p:cNvPr id="15" name="Image 1" descr="preencoded.png"/>
           <p:cNvPicPr>
             <a:picLocks noChangeAspect="1"/>
           </p:cNvPicPr>
           <p:nvPr/>
         </p:nvPicPr>
         <p:blipFill>
-          <a:blip r:embed="rId2"/>
+          <a:blip r:embed="rId4"/>
           <a:stretch>
             <a:fillRect/>
           </a:stretch>
@@ -16015,7 +16414,7 @@
           <a:bodyPr wrap="square" lIns="0" tIns="0" rIns="0" bIns="0" rtlCol="0" anchor="ctr"/>
           <a:lstStyle/>
           <a:p>
-            <a:pPr rtl="1" algn="ctr" indent="0" marL="0">
+            <a:pPr marL="0" indent="0" algn="r" rtl="1">
               <a:buNone/>
             </a:pPr>
             <a:r>
@@ -16054,7 +16453,7 @@
           <a:bodyPr wrap="square" lIns="0" tIns="0" rIns="0" bIns="0" rtlCol="0" anchor="ctr"/>
           <a:lstStyle/>
           <a:p>
-            <a:pPr rtl="1" algn="ctr" indent="0" marL="0">
+            <a:pPr marL="0" indent="0" algn="r" rtl="1">
               <a:buNone/>
             </a:pPr>
             <a:r>
@@ -16093,7 +16492,7 @@
           <a:bodyPr wrap="square" lIns="0" tIns="0" rIns="0" bIns="0" rtlCol="0" anchor="ctr"/>
           <a:lstStyle/>
           <a:p>
-            <a:pPr rtl="1" algn="ctr" indent="0" marL="0">
+            <a:pPr marL="0" indent="0" algn="r" rtl="1">
               <a:buNone/>
             </a:pPr>
             <a:r>
@@ -16137,13 +16536,21 @@
             <a:prstDash val="solid"/>
           </a:ln>
           <a:effectLst>
-            <a:outerShdw sx="100000" sy="100000" kx="0" ky="0" algn="bl" rotWithShape="0" blurRad="76200" dist="25400" dir="5400000">
+            <a:outerShdw blurRad="76200" dist="25400" dir="5400000" algn="bl" rotWithShape="0">
               <a:srgbClr val="000000">
                 <a:alpha val="12000"/>
               </a:srgbClr>
             </a:outerShdw>
           </a:effectLst>
         </p:spPr>
+        <p:txBody>
+          <a:bodyPr/>
+          <a:lstStyle/>
+          <a:p>
+            <a:pPr algn="r" rtl="1"/>
+            <a:endParaRPr lang="en-IL"/>
+          </a:p>
+        </p:txBody>
       </p:sp>
       <p:sp>
         <p:nvSpPr>
@@ -16164,24 +16571,32 @@
           </a:solidFill>
           <a:ln/>
           <a:effectLst>
-            <a:outerShdw sx="100000" sy="100000" kx="0" ky="0" algn="bl" rotWithShape="0" blurRad="76200" dist="25400" dir="5400000">
+            <a:outerShdw blurRad="76200" dist="25400" dir="5400000" algn="bl" rotWithShape="0">
               <a:srgbClr val="000000">
                 <a:alpha val="12000"/>
               </a:srgbClr>
             </a:outerShdw>
           </a:effectLst>
         </p:spPr>
+        <p:txBody>
+          <a:bodyPr/>
+          <a:lstStyle/>
+          <a:p>
+            <a:pPr algn="r" rtl="1"/>
+            <a:endParaRPr lang="en-IL"/>
+          </a:p>
+        </p:txBody>
       </p:sp>
       <p:pic>
         <p:nvPicPr>
-          <p:cNvPr id="21" name="Image 2" descr="preencoded.png">    </p:cNvPr>
+          <p:cNvPr id="21" name="Image 2" descr="preencoded.png"/>
           <p:cNvPicPr>
             <a:picLocks noChangeAspect="1"/>
           </p:cNvPicPr>
           <p:nvPr/>
         </p:nvPicPr>
         <p:blipFill>
-          <a:blip r:embed="rId3"/>
+          <a:blip r:embed="rId5"/>
           <a:stretch>
             <a:fillRect/>
           </a:stretch>
@@ -16217,7 +16632,7 @@
           <a:bodyPr wrap="square" lIns="0" tIns="0" rIns="0" bIns="0" rtlCol="0" anchor="ctr"/>
           <a:lstStyle/>
           <a:p>
-            <a:pPr rtl="1" algn="ctr" indent="0" marL="0">
+            <a:pPr marL="0" indent="0" algn="r" rtl="1">
               <a:buNone/>
             </a:pPr>
             <a:r>
@@ -16256,7 +16671,7 @@
           <a:bodyPr wrap="square" lIns="0" tIns="0" rIns="0" bIns="0" rtlCol="0" anchor="ctr"/>
           <a:lstStyle/>
           <a:p>
-            <a:pPr rtl="1" algn="ctr" indent="0" marL="0">
+            <a:pPr marL="0" indent="0" algn="r" rtl="1">
               <a:buNone/>
             </a:pPr>
             <a:r>
@@ -16295,7 +16710,7 @@
           <a:bodyPr wrap="square" lIns="0" tIns="0" rIns="0" bIns="0" rtlCol="0" anchor="ctr"/>
           <a:lstStyle/>
           <a:p>
-            <a:pPr rtl="1" algn="ctr" indent="0" marL="0">
+            <a:pPr marL="0" indent="0" algn="r" rtl="1">
               <a:buNone/>
             </a:pPr>
             <a:r>
@@ -16339,13 +16754,21 @@
             <a:prstDash val="solid"/>
           </a:ln>
           <a:effectLst>
-            <a:outerShdw sx="100000" sy="100000" kx="0" ky="0" algn="bl" rotWithShape="0" blurRad="76200" dist="25400" dir="5400000">
+            <a:outerShdw blurRad="76200" dist="25400" dir="5400000" algn="bl" rotWithShape="0">
               <a:srgbClr val="000000">
                 <a:alpha val="12000"/>
               </a:srgbClr>
             </a:outerShdw>
           </a:effectLst>
         </p:spPr>
+        <p:txBody>
+          <a:bodyPr/>
+          <a:lstStyle/>
+          <a:p>
+            <a:pPr algn="r" rtl="1"/>
+            <a:endParaRPr lang="en-IL"/>
+          </a:p>
+        </p:txBody>
       </p:sp>
       <p:sp>
         <p:nvSpPr>
@@ -16366,24 +16789,32 @@
           </a:solidFill>
           <a:ln/>
           <a:effectLst>
-            <a:outerShdw sx="100000" sy="100000" kx="0" ky="0" algn="bl" rotWithShape="0" blurRad="76200" dist="25400" dir="5400000">
+            <a:outerShdw blurRad="76200" dist="25400" dir="5400000" algn="bl" rotWithShape="0">
               <a:srgbClr val="000000">
                 <a:alpha val="12000"/>
               </a:srgbClr>
             </a:outerShdw>
           </a:effectLst>
         </p:spPr>
+        <p:txBody>
+          <a:bodyPr/>
+          <a:lstStyle/>
+          <a:p>
+            <a:pPr algn="r" rtl="1"/>
+            <a:endParaRPr lang="en-IL"/>
+          </a:p>
+        </p:txBody>
       </p:sp>
       <p:pic>
         <p:nvPicPr>
-          <p:cNvPr id="27" name="Image 3" descr="preencoded.png">    </p:cNvPr>
+          <p:cNvPr id="27" name="Image 3" descr="preencoded.png"/>
           <p:cNvPicPr>
             <a:picLocks noChangeAspect="1"/>
           </p:cNvPicPr>
           <p:nvPr/>
         </p:nvPicPr>
         <p:blipFill>
-          <a:blip r:embed="rId4"/>
+          <a:blip r:embed="rId6"/>
           <a:stretch>
             <a:fillRect/>
           </a:stretch>
@@ -16419,7 +16850,7 @@
           <a:bodyPr wrap="square" lIns="0" tIns="0" rIns="0" bIns="0" rtlCol="0" anchor="ctr"/>
           <a:lstStyle/>
           <a:p>
-            <a:pPr rtl="1" algn="ctr" indent="0" marL="0">
+            <a:pPr marL="0" indent="0" algn="r" rtl="1">
               <a:buNone/>
             </a:pPr>
             <a:r>
@@ -16458,7 +16889,7 @@
           <a:bodyPr wrap="square" lIns="0" tIns="0" rIns="0" bIns="0" rtlCol="0" anchor="ctr"/>
           <a:lstStyle/>
           <a:p>
-            <a:pPr rtl="1" algn="ctr" indent="0" marL="0">
+            <a:pPr marL="0" indent="0" algn="r" rtl="1">
               <a:buNone/>
             </a:pPr>
             <a:r>
@@ -16497,7 +16928,7 @@
           <a:bodyPr wrap="square" lIns="0" tIns="0" rIns="0" bIns="0" rtlCol="0" anchor="ctr"/>
           <a:lstStyle/>
           <a:p>
-            <a:pPr rtl="1" algn="ctr" indent="0" marL="0">
+            <a:pPr marL="0" indent="0" algn="r" rtl="1">
               <a:buNone/>
             </a:pPr>
             <a:r>
@@ -16541,13 +16972,21 @@
             <a:prstDash val="solid"/>
           </a:ln>
           <a:effectLst>
-            <a:outerShdw sx="100000" sy="100000" kx="0" ky="0" algn="bl" rotWithShape="0" blurRad="76200" dist="25400" dir="5400000">
+            <a:outerShdw blurRad="76200" dist="25400" dir="5400000" algn="bl" rotWithShape="0">
               <a:srgbClr val="000000">
                 <a:alpha val="12000"/>
               </a:srgbClr>
             </a:outerShdw>
           </a:effectLst>
         </p:spPr>
+        <p:txBody>
+          <a:bodyPr/>
+          <a:lstStyle/>
+          <a:p>
+            <a:pPr algn="r" rtl="1"/>
+            <a:endParaRPr lang="en-IL"/>
+          </a:p>
+        </p:txBody>
       </p:sp>
       <p:sp>
         <p:nvSpPr>
@@ -16568,24 +17007,32 @@
           </a:solidFill>
           <a:ln/>
           <a:effectLst>
-            <a:outerShdw sx="100000" sy="100000" kx="0" ky="0" algn="bl" rotWithShape="0" blurRad="76200" dist="25400" dir="5400000">
+            <a:outerShdw blurRad="76200" dist="25400" dir="5400000" algn="bl" rotWithShape="0">
               <a:srgbClr val="000000">
                 <a:alpha val="12000"/>
               </a:srgbClr>
             </a:outerShdw>
           </a:effectLst>
         </p:spPr>
+        <p:txBody>
+          <a:bodyPr/>
+          <a:lstStyle/>
+          <a:p>
+            <a:pPr algn="r" rtl="1"/>
+            <a:endParaRPr lang="en-IL"/>
+          </a:p>
+        </p:txBody>
       </p:sp>
       <p:pic>
         <p:nvPicPr>
-          <p:cNvPr id="33" name="Image 4" descr="preencoded.png">    </p:cNvPr>
+          <p:cNvPr id="33" name="Image 4" descr="preencoded.png"/>
           <p:cNvPicPr>
             <a:picLocks noChangeAspect="1"/>
           </p:cNvPicPr>
           <p:nvPr/>
         </p:nvPicPr>
         <p:blipFill>
-          <a:blip r:embed="rId5"/>
+          <a:blip r:embed="rId7"/>
           <a:stretch>
             <a:fillRect/>
           </a:stretch>
@@ -16621,7 +17068,7 @@
           <a:bodyPr wrap="square" lIns="0" tIns="0" rIns="0" bIns="0" rtlCol="0" anchor="ctr"/>
           <a:lstStyle/>
           <a:p>
-            <a:pPr rtl="1" algn="ctr" indent="0" marL="0">
+            <a:pPr marL="0" indent="0" algn="r" rtl="1">
               <a:buNone/>
             </a:pPr>
             <a:r>
@@ -16660,7 +17107,7 @@
           <a:bodyPr wrap="square" lIns="0" tIns="0" rIns="0" bIns="0" rtlCol="0" anchor="ctr"/>
           <a:lstStyle/>
           <a:p>
-            <a:pPr rtl="1" algn="ctr" indent="0" marL="0">
+            <a:pPr marL="0" indent="0" algn="r" rtl="1">
               <a:buNone/>
             </a:pPr>
             <a:r>
@@ -16699,7 +17146,7 @@
           <a:bodyPr wrap="square" lIns="0" tIns="0" rIns="0" bIns="0" rtlCol="0" anchor="ctr"/>
           <a:lstStyle/>
           <a:p>
-            <a:pPr algn="ctr" indent="0" marL="0">
+            <a:pPr marL="0" indent="0" algn="r" rtl="1">
               <a:buNone/>
             </a:pPr>
             <a:r>
@@ -16713,9 +17160,6 @@
               </a:rPr>
               <a:t>ממשק אחד, פקודה אחת:   </a:t>
             </a:r>
-            <a:pPr algn="ctr" indent="0" marL="0">
-              <a:buNone/>
-            </a:pPr>
             <a:r>
               <a:rPr lang="en-US" sz="1400" b="1" dirty="0">
                 <a:solidFill>
@@ -16747,6 +17191,7 @@
         <a:solidFill>
           <a:srgbClr val="FFFFFF"/>
         </a:solidFill>
+        <a:effectLst/>
       </p:bgPr>
     </p:bg>
     <p:spTree>
@@ -16784,6 +17229,13 @@
             <a:prstDash val="solid"/>
           </a:ln>
         </p:spPr>
+        <p:txBody>
+          <a:bodyPr/>
+          <a:lstStyle/>
+          <a:p>
+            <a:endParaRPr lang="en-IL"/>
+          </a:p>
+        </p:txBody>
       </p:sp>
       <p:sp>
         <p:nvSpPr>
@@ -16804,6 +17256,13 @@
           </a:solidFill>
           <a:ln/>
         </p:spPr>
+        <p:txBody>
+          <a:bodyPr/>
+          <a:lstStyle/>
+          <a:p>
+            <a:endParaRPr lang="en-IL"/>
+          </a:p>
+        </p:txBody>
       </p:sp>
       <p:sp>
         <p:nvSpPr>
@@ -16826,11 +17285,11 @@
           <a:bodyPr wrap="square" lIns="0" tIns="0" rIns="0" bIns="0" rtlCol="0" anchor="ctr"/>
           <a:lstStyle/>
           <a:p>
-            <a:pPr rtl="1" algn="r" indent="0" marL="0">
+            <a:pPr marL="0" indent="0" algn="r" rtl="1">
               <a:buNone/>
             </a:pPr>
             <a:r>
-              <a:rPr lang="en-US" sz="1200" b="1" spc="100" kern="0" dirty="0">
+              <a:rPr lang="en-US" sz="1200" b="1" kern="0" spc="100" dirty="0">
                 <a:solidFill>
                   <a:srgbClr val="0E8A8F"/>
                 </a:solidFill>
@@ -16865,7 +17324,7 @@
           <a:bodyPr wrap="square" lIns="0" tIns="0" rIns="0" bIns="0" rtlCol="0" anchor="ctr"/>
           <a:lstStyle/>
           <a:p>
-            <a:pPr rtl="1" algn="r" indent="0" marL="0">
+            <a:pPr marL="0" indent="0" algn="r" rtl="1">
               <a:buNone/>
             </a:pPr>
             <a:r>
@@ -16904,7 +17363,7 @@
           <a:bodyPr wrap="square" lIns="0" tIns="0" rIns="0" bIns="0" rtlCol="0" anchor="ctr"/>
           <a:lstStyle/>
           <a:p>
-            <a:pPr rtl="1" algn="l" indent="0" marL="0">
+            <a:pPr marL="0" indent="0" algn="l" rtl="1">
               <a:buNone/>
             </a:pPr>
             <a:r>
@@ -16948,13 +17407,20 @@
             <a:prstDash val="solid"/>
           </a:ln>
           <a:effectLst>
-            <a:outerShdw sx="100000" sy="100000" kx="0" ky="0" algn="bl" rotWithShape="0" blurRad="76200" dist="25400" dir="5400000">
+            <a:outerShdw blurRad="76200" dist="25400" dir="5400000" algn="bl" rotWithShape="0">
               <a:srgbClr val="000000">
                 <a:alpha val="12000"/>
               </a:srgbClr>
             </a:outerShdw>
           </a:effectLst>
         </p:spPr>
+        <p:txBody>
+          <a:bodyPr/>
+          <a:lstStyle/>
+          <a:p>
+            <a:endParaRPr lang="en-IL"/>
+          </a:p>
+        </p:txBody>
       </p:sp>
       <p:sp>
         <p:nvSpPr>
@@ -16977,7 +17443,7 @@
           <a:bodyPr wrap="square" lIns="0" tIns="0" rIns="0" bIns="0" rtlCol="0" anchor="ctr"/>
           <a:lstStyle/>
           <a:p>
-            <a:pPr rtl="1" algn="ctr" indent="0" marL="0">
+            <a:pPr marL="0" indent="0" algn="ctr" rtl="1">
               <a:buNone/>
             </a:pPr>
             <a:r>
@@ -17016,7 +17482,7 @@
           <a:bodyPr wrap="square" lIns="0" tIns="0" rIns="0" bIns="0" rtlCol="0" anchor="ctr"/>
           <a:lstStyle/>
           <a:p>
-            <a:pPr rtl="1" algn="ctr" indent="0" marL="0">
+            <a:pPr marL="0" indent="0" algn="ctr" rtl="1">
               <a:buNone/>
             </a:pPr>
             <a:r>
@@ -17060,13 +17526,20 @@
             <a:prstDash val="solid"/>
           </a:ln>
           <a:effectLst>
-            <a:outerShdw sx="100000" sy="100000" kx="0" ky="0" algn="bl" rotWithShape="0" blurRad="76200" dist="25400" dir="5400000">
+            <a:outerShdw blurRad="76200" dist="25400" dir="5400000" algn="bl" rotWithShape="0">
               <a:srgbClr val="000000">
                 <a:alpha val="12000"/>
               </a:srgbClr>
             </a:outerShdw>
           </a:effectLst>
         </p:spPr>
+        <p:txBody>
+          <a:bodyPr/>
+          <a:lstStyle/>
+          <a:p>
+            <a:endParaRPr lang="en-IL"/>
+          </a:p>
+        </p:txBody>
       </p:sp>
       <p:sp>
         <p:nvSpPr>
@@ -17089,7 +17562,7 @@
           <a:bodyPr wrap="square" lIns="0" tIns="0" rIns="0" bIns="0" rtlCol="0" anchor="ctr"/>
           <a:lstStyle/>
           <a:p>
-            <a:pPr rtl="1" algn="ctr" indent="0" marL="0">
+            <a:pPr marL="0" indent="0" algn="ctr" rtl="1">
               <a:buNone/>
             </a:pPr>
             <a:r>
@@ -17128,7 +17601,7 @@
           <a:bodyPr wrap="square" lIns="0" tIns="0" rIns="0" bIns="0" rtlCol="0" anchor="ctr"/>
           <a:lstStyle/>
           <a:p>
-            <a:pPr rtl="1" algn="ctr" indent="0" marL="0">
+            <a:pPr marL="0" indent="0" algn="ctr" rtl="1">
               <a:buNone/>
             </a:pPr>
             <a:r>
@@ -17172,13 +17645,20 @@
             <a:prstDash val="solid"/>
           </a:ln>
           <a:effectLst>
-            <a:outerShdw sx="100000" sy="100000" kx="0" ky="0" algn="bl" rotWithShape="0" blurRad="76200" dist="25400" dir="5400000">
+            <a:outerShdw blurRad="76200" dist="25400" dir="5400000" algn="bl" rotWithShape="0">
               <a:srgbClr val="000000">
                 <a:alpha val="12000"/>
               </a:srgbClr>
             </a:outerShdw>
           </a:effectLst>
         </p:spPr>
+        <p:txBody>
+          <a:bodyPr/>
+          <a:lstStyle/>
+          <a:p>
+            <a:endParaRPr lang="en-IL"/>
+          </a:p>
+        </p:txBody>
       </p:sp>
       <p:sp>
         <p:nvSpPr>
@@ -17201,7 +17681,7 @@
           <a:bodyPr wrap="square" lIns="0" tIns="0" rIns="0" bIns="0" rtlCol="0" anchor="ctr"/>
           <a:lstStyle/>
           <a:p>
-            <a:pPr rtl="1" algn="ctr" indent="0" marL="0">
+            <a:pPr marL="0" indent="0" algn="ctr" rtl="1">
               <a:buNone/>
             </a:pPr>
             <a:r>
@@ -17240,7 +17720,7 @@
           <a:bodyPr wrap="square" lIns="0" tIns="0" rIns="0" bIns="0" rtlCol="0" anchor="ctr"/>
           <a:lstStyle/>
           <a:p>
-            <a:pPr rtl="1" algn="ctr" indent="0" marL="0">
+            <a:pPr marL="0" indent="0" algn="ctr" rtl="1">
               <a:buNone/>
             </a:pPr>
             <a:r>
@@ -17284,13 +17764,20 @@
             <a:prstDash val="solid"/>
           </a:ln>
           <a:effectLst>
-            <a:outerShdw sx="100000" sy="100000" kx="0" ky="0" algn="bl" rotWithShape="0" blurRad="76200" dist="25400" dir="5400000">
+            <a:outerShdw blurRad="76200" dist="25400" dir="5400000" algn="bl" rotWithShape="0">
               <a:srgbClr val="000000">
                 <a:alpha val="12000"/>
               </a:srgbClr>
             </a:outerShdw>
           </a:effectLst>
         </p:spPr>
+        <p:txBody>
+          <a:bodyPr/>
+          <a:lstStyle/>
+          <a:p>
+            <a:endParaRPr lang="en-IL"/>
+          </a:p>
+        </p:txBody>
       </p:sp>
       <p:sp>
         <p:nvSpPr>
@@ -17313,7 +17800,7 @@
           <a:bodyPr wrap="square" lIns="0" tIns="0" rIns="0" bIns="0" rtlCol="0" anchor="ctr"/>
           <a:lstStyle/>
           <a:p>
-            <a:pPr rtl="1" algn="ctr" indent="0" marL="0">
+            <a:pPr marL="0" indent="0" algn="ctr" rtl="1">
               <a:buNone/>
             </a:pPr>
             <a:r>
@@ -17352,7 +17839,7 @@
           <a:bodyPr wrap="square" lIns="0" tIns="0" rIns="0" bIns="0" rtlCol="0" anchor="ctr"/>
           <a:lstStyle/>
           <a:p>
-            <a:pPr rtl="1" algn="ctr" indent="0" marL="0">
+            <a:pPr marL="0" indent="0" algn="ctr" rtl="1">
               <a:buNone/>
             </a:pPr>
             <a:r>
@@ -17396,13 +17883,20 @@
             <a:prstDash val="solid"/>
           </a:ln>
           <a:effectLst>
-            <a:outerShdw sx="100000" sy="100000" kx="0" ky="0" algn="bl" rotWithShape="0" blurRad="76200" dist="25400" dir="5400000">
+            <a:outerShdw blurRad="76200" dist="25400" dir="5400000" algn="bl" rotWithShape="0">
               <a:srgbClr val="000000">
                 <a:alpha val="12000"/>
               </a:srgbClr>
             </a:outerShdw>
           </a:effectLst>
         </p:spPr>
+        <p:txBody>
+          <a:bodyPr/>
+          <a:lstStyle/>
+          <a:p>
+            <a:endParaRPr lang="en-IL"/>
+          </a:p>
+        </p:txBody>
       </p:sp>
       <p:sp>
         <p:nvSpPr>
@@ -17423,24 +17917,31 @@
           </a:solidFill>
           <a:ln/>
           <a:effectLst>
-            <a:outerShdw sx="100000" sy="100000" kx="0" ky="0" algn="bl" rotWithShape="0" blurRad="76200" dist="25400" dir="5400000">
+            <a:outerShdw blurRad="76200" dist="25400" dir="5400000" algn="bl" rotWithShape="0">
               <a:srgbClr val="000000">
                 <a:alpha val="12000"/>
               </a:srgbClr>
             </a:outerShdw>
           </a:effectLst>
         </p:spPr>
+        <p:txBody>
+          <a:bodyPr/>
+          <a:lstStyle/>
+          <a:p>
+            <a:endParaRPr lang="en-IL"/>
+          </a:p>
+        </p:txBody>
       </p:sp>
       <p:pic>
         <p:nvPicPr>
-          <p:cNvPr id="21" name="Image 0" descr="preencoded.png">    </p:cNvPr>
+          <p:cNvPr id="21" name="Image 0" descr="preencoded.png"/>
           <p:cNvPicPr>
             <a:picLocks noChangeAspect="1"/>
           </p:cNvPicPr>
           <p:nvPr/>
         </p:nvPicPr>
         <p:blipFill>
-          <a:blip r:embed="rId1"/>
+          <a:blip r:embed="rId3"/>
           <a:stretch>
             <a:fillRect/>
           </a:stretch>
@@ -17476,7 +17977,7 @@
           <a:bodyPr wrap="square" lIns="0" tIns="0" rIns="0" bIns="0" rtlCol="0" anchor="ctr"/>
           <a:lstStyle/>
           <a:p>
-            <a:pPr rtl="1" algn="l" indent="0" marL="0">
+            <a:pPr marL="0" indent="0" algn="l" rtl="1">
               <a:buNone/>
             </a:pPr>
             <a:r>
@@ -17515,7 +18016,7 @@
           <a:bodyPr wrap="square" lIns="0" tIns="0" rIns="0" bIns="0" rtlCol="0" anchor="ctr"/>
           <a:lstStyle/>
           <a:p>
-            <a:pPr algn="l" marL="342900" indent="-342900">
+            <a:pPr marL="342900" indent="-342900" algn="r" rtl="1">
               <a:lnSpc>
                 <a:spcPct val="120000"/>
               </a:lnSpc>
@@ -17536,7 +18037,7 @@
             <a:endParaRPr lang="en-US" sz="1350" dirty="0"/>
           </a:p>
           <a:p>
-            <a:pPr algn="l" marL="342900" indent="-342900">
+            <a:pPr marL="342900" indent="-342900" algn="r" rtl="1">
               <a:lnSpc>
                 <a:spcPct val="120000"/>
               </a:lnSpc>
@@ -17557,7 +18058,7 @@
             <a:endParaRPr lang="en-US" sz="1350" dirty="0"/>
           </a:p>
           <a:p>
-            <a:pPr algn="l" marL="342900" indent="-342900">
+            <a:pPr marL="342900" indent="-342900" algn="r" rtl="1">
               <a:lnSpc>
                 <a:spcPct val="120000"/>
               </a:lnSpc>
@@ -17605,13 +18106,20 @@
             <a:prstDash val="solid"/>
           </a:ln>
           <a:effectLst>
-            <a:outerShdw sx="100000" sy="100000" kx="0" ky="0" algn="bl" rotWithShape="0" blurRad="76200" dist="25400" dir="5400000">
+            <a:outerShdw blurRad="76200" dist="25400" dir="5400000" algn="bl" rotWithShape="0">
               <a:srgbClr val="000000">
                 <a:alpha val="12000"/>
               </a:srgbClr>
             </a:outerShdw>
           </a:effectLst>
         </p:spPr>
+        <p:txBody>
+          <a:bodyPr/>
+          <a:lstStyle/>
+          <a:p>
+            <a:endParaRPr lang="en-IL"/>
+          </a:p>
+        </p:txBody>
       </p:sp>
       <p:sp>
         <p:nvSpPr>
@@ -17632,24 +18140,31 @@
           </a:solidFill>
           <a:ln/>
           <a:effectLst>
-            <a:outerShdw sx="100000" sy="100000" kx="0" ky="0" algn="bl" rotWithShape="0" blurRad="76200" dist="25400" dir="5400000">
+            <a:outerShdw blurRad="76200" dist="25400" dir="5400000" algn="bl" rotWithShape="0">
               <a:srgbClr val="000000">
                 <a:alpha val="12000"/>
               </a:srgbClr>
             </a:outerShdw>
           </a:effectLst>
         </p:spPr>
+        <p:txBody>
+          <a:bodyPr/>
+          <a:lstStyle/>
+          <a:p>
+            <a:endParaRPr lang="en-IL"/>
+          </a:p>
+        </p:txBody>
       </p:sp>
       <p:pic>
         <p:nvPicPr>
-          <p:cNvPr id="26" name="Image 1" descr="preencoded.png">    </p:cNvPr>
+          <p:cNvPr id="26" name="Image 1" descr="preencoded.png"/>
           <p:cNvPicPr>
             <a:picLocks noChangeAspect="1"/>
           </p:cNvPicPr>
           <p:nvPr/>
         </p:nvPicPr>
         <p:blipFill>
-          <a:blip r:embed="rId2"/>
+          <a:blip r:embed="rId4"/>
           <a:stretch>
             <a:fillRect/>
           </a:stretch>
@@ -17685,7 +18200,7 @@
           <a:bodyPr wrap="square" lIns="0" tIns="0" rIns="0" bIns="0" rtlCol="0" anchor="ctr"/>
           <a:lstStyle/>
           <a:p>
-            <a:pPr rtl="1" algn="l" indent="0" marL="0">
+            <a:pPr marL="0" indent="0" algn="l" rtl="1">
               <a:buNone/>
             </a:pPr>
             <a:r>
@@ -17724,7 +18239,7 @@
           <a:bodyPr wrap="square" lIns="0" tIns="0" rIns="0" bIns="0" rtlCol="0" anchor="ctr"/>
           <a:lstStyle/>
           <a:p>
-            <a:pPr algn="l" marL="342900" indent="-342900">
+            <a:pPr marL="342900" indent="-342900" algn="r" rtl="1">
               <a:lnSpc>
                 <a:spcPct val="120000"/>
               </a:lnSpc>
@@ -17745,7 +18260,7 @@
             <a:endParaRPr lang="en-US" sz="1350" dirty="0"/>
           </a:p>
           <a:p>
-            <a:pPr algn="l" marL="342900" indent="-342900">
+            <a:pPr marL="342900" indent="-342900" algn="r" rtl="1">
               <a:lnSpc>
                 <a:spcPct val="120000"/>
               </a:lnSpc>
@@ -17766,7 +18281,7 @@
             <a:endParaRPr lang="en-US" sz="1350" dirty="0"/>
           </a:p>
           <a:p>
-            <a:pPr algn="l" marL="342900" indent="-342900">
+            <a:pPr marL="342900" indent="-342900" algn="r" rtl="1">
               <a:lnSpc>
                 <a:spcPct val="120000"/>
               </a:lnSpc>
@@ -17809,7 +18324,7 @@
           <a:bodyPr wrap="square" lIns="0" tIns="0" rIns="0" bIns="0" rtlCol="0" anchor="ctr"/>
           <a:lstStyle/>
           <a:p>
-            <a:pPr rtl="1" algn="l" indent="0" marL="0">
+            <a:pPr marL="0" indent="0" algn="l" rtl="1">
               <a:buNone/>
             </a:pPr>
             <a:r>
@@ -17843,6 +18358,7 @@
         <a:solidFill>
           <a:srgbClr val="FFFFFF"/>
         </a:solidFill>
+        <a:effectLst/>
       </p:bgPr>
     </p:bg>
     <p:spTree>
@@ -17880,6 +18396,13 @@
             <a:prstDash val="solid"/>
           </a:ln>
         </p:spPr>
+        <p:txBody>
+          <a:bodyPr/>
+          <a:lstStyle/>
+          <a:p>
+            <a:endParaRPr lang="en-IL"/>
+          </a:p>
+        </p:txBody>
       </p:sp>
       <p:sp>
         <p:nvSpPr>
@@ -17900,6 +18423,13 @@
           </a:solidFill>
           <a:ln/>
         </p:spPr>
+        <p:txBody>
+          <a:bodyPr/>
+          <a:lstStyle/>
+          <a:p>
+            <a:endParaRPr lang="en-IL"/>
+          </a:p>
+        </p:txBody>
       </p:sp>
       <p:sp>
         <p:nvSpPr>
@@ -17922,11 +18452,11 @@
           <a:bodyPr wrap="square" lIns="0" tIns="0" rIns="0" bIns="0" rtlCol="0" anchor="ctr"/>
           <a:lstStyle/>
           <a:p>
-            <a:pPr rtl="1" algn="r" indent="0" marL="0">
+            <a:pPr marL="0" indent="0" algn="r" rtl="1">
               <a:buNone/>
             </a:pPr>
             <a:r>
-              <a:rPr lang="en-US" sz="1200" b="1" spc="100" kern="0" dirty="0">
+              <a:rPr lang="en-US" sz="1200" b="1" kern="0" spc="100" dirty="0">
                 <a:solidFill>
                   <a:srgbClr val="0E8A8F"/>
                 </a:solidFill>
@@ -17961,7 +18491,7 @@
           <a:bodyPr wrap="square" lIns="0" tIns="0" rIns="0" bIns="0" rtlCol="0" anchor="ctr"/>
           <a:lstStyle/>
           <a:p>
-            <a:pPr rtl="1" algn="r" indent="0" marL="0">
+            <a:pPr marL="0" indent="0" algn="r" rtl="1">
               <a:buNone/>
             </a:pPr>
             <a:r>
@@ -18000,7 +18530,7 @@
           <a:bodyPr wrap="square" lIns="0" tIns="0" rIns="0" bIns="0" rtlCol="0" anchor="ctr"/>
           <a:lstStyle/>
           <a:p>
-            <a:pPr rtl="1" algn="l" indent="0" marL="0">
+            <a:pPr marL="0" indent="0" algn="l" rtl="1">
               <a:buNone/>
             </a:pPr>
             <a:r>
@@ -18039,7 +18569,7 @@
           <a:bodyPr wrap="square" lIns="0" tIns="0" rIns="0" bIns="0" rtlCol="0" anchor="ctr"/>
           <a:lstStyle/>
           <a:p>
-            <a:pPr rtl="1" algn="l" indent="0" marL="0">
+            <a:pPr marL="0" indent="0" algn="l" rtl="1">
               <a:buNone/>
             </a:pPr>
             <a:r>
@@ -18083,13 +18613,20 @@
             <a:prstDash val="solid"/>
           </a:ln>
           <a:effectLst>
-            <a:outerShdw sx="100000" sy="100000" kx="0" ky="0" algn="bl" rotWithShape="0" blurRad="76200" dist="25400" dir="5400000">
+            <a:outerShdw blurRad="76200" dist="25400" dir="5400000" algn="bl" rotWithShape="0">
               <a:srgbClr val="000000">
                 <a:alpha val="12000"/>
               </a:srgbClr>
             </a:outerShdw>
           </a:effectLst>
         </p:spPr>
+        <p:txBody>
+          <a:bodyPr/>
+          <a:lstStyle/>
+          <a:p>
+            <a:endParaRPr lang="en-IL"/>
+          </a:p>
+        </p:txBody>
       </p:sp>
       <p:sp>
         <p:nvSpPr>
@@ -18112,7 +18649,7 @@
           <a:bodyPr wrap="square" lIns="1270" tIns="1270" rIns="1270" bIns="1270" rtlCol="0" anchor="ctr"/>
           <a:lstStyle/>
           <a:p>
-            <a:pPr rtl="1" algn="l" indent="0" marL="0">
+            <a:pPr marL="0" indent="0" algn="l" rtl="1">
               <a:buNone/>
             </a:pPr>
             <a:r>
@@ -18151,7 +18688,7 @@
           <a:bodyPr wrap="square" lIns="635" tIns="635" rIns="635" bIns="635" rtlCol="0" anchor="ctr"/>
           <a:lstStyle/>
           <a:p>
-            <a:pPr rtl="1" algn="l" indent="0" marL="0">
+            <a:pPr marL="0" indent="0" algn="l" rtl="1">
               <a:buNone/>
             </a:pPr>
             <a:r>
@@ -18195,13 +18732,20 @@
             <a:prstDash val="solid"/>
           </a:ln>
           <a:effectLst>
-            <a:outerShdw sx="100000" sy="100000" kx="0" ky="0" algn="bl" rotWithShape="0" blurRad="76200" dist="25400" dir="5400000">
+            <a:outerShdw blurRad="76200" dist="25400" dir="5400000" algn="bl" rotWithShape="0">
               <a:srgbClr val="000000">
                 <a:alpha val="12000"/>
               </a:srgbClr>
             </a:outerShdw>
           </a:effectLst>
         </p:spPr>
+        <p:txBody>
+          <a:bodyPr/>
+          <a:lstStyle/>
+          <a:p>
+            <a:endParaRPr lang="en-IL"/>
+          </a:p>
+        </p:txBody>
       </p:sp>
       <p:sp>
         <p:nvSpPr>
@@ -18224,7 +18768,7 @@
           <a:bodyPr wrap="square" lIns="1270" tIns="1270" rIns="1270" bIns="1270" rtlCol="0" anchor="ctr"/>
           <a:lstStyle/>
           <a:p>
-            <a:pPr rtl="1" algn="l" indent="0" marL="0">
+            <a:pPr marL="0" indent="0" algn="l" rtl="1">
               <a:buNone/>
             </a:pPr>
             <a:r>
@@ -18263,7 +18807,7 @@
           <a:bodyPr wrap="square" lIns="635" tIns="635" rIns="635" bIns="635" rtlCol="0" anchor="ctr"/>
           <a:lstStyle/>
           <a:p>
-            <a:pPr rtl="1" algn="l" indent="0" marL="0">
+            <a:pPr marL="0" indent="0" algn="l" rtl="1">
               <a:buNone/>
             </a:pPr>
             <a:r>
@@ -18307,13 +18851,20 @@
             <a:prstDash val="solid"/>
           </a:ln>
           <a:effectLst>
-            <a:outerShdw sx="100000" sy="100000" kx="0" ky="0" algn="bl" rotWithShape="0" blurRad="76200" dist="25400" dir="5400000">
+            <a:outerShdw blurRad="76200" dist="25400" dir="5400000" algn="bl" rotWithShape="0">
               <a:srgbClr val="000000">
                 <a:alpha val="12000"/>
               </a:srgbClr>
             </a:outerShdw>
           </a:effectLst>
         </p:spPr>
+        <p:txBody>
+          <a:bodyPr/>
+          <a:lstStyle/>
+          <a:p>
+            <a:endParaRPr lang="en-IL"/>
+          </a:p>
+        </p:txBody>
       </p:sp>
       <p:sp>
         <p:nvSpPr>
@@ -18336,7 +18887,7 @@
           <a:bodyPr wrap="square" lIns="1270" tIns="1270" rIns="1270" bIns="1270" rtlCol="0" anchor="ctr"/>
           <a:lstStyle/>
           <a:p>
-            <a:pPr rtl="1" algn="l" indent="0" marL="0">
+            <a:pPr marL="0" indent="0" algn="l" rtl="1">
               <a:buNone/>
             </a:pPr>
             <a:r>
@@ -18375,7 +18926,7 @@
           <a:bodyPr wrap="square" lIns="635" tIns="635" rIns="635" bIns="635" rtlCol="0" anchor="ctr"/>
           <a:lstStyle/>
           <a:p>
-            <a:pPr rtl="1" algn="l" indent="0" marL="0">
+            <a:pPr marL="0" indent="0" algn="l" rtl="1">
               <a:buNone/>
             </a:pPr>
             <a:r>
@@ -18419,13 +18970,20 @@
             <a:prstDash val="solid"/>
           </a:ln>
           <a:effectLst>
-            <a:outerShdw sx="100000" sy="100000" kx="0" ky="0" algn="bl" rotWithShape="0" blurRad="76200" dist="25400" dir="5400000">
+            <a:outerShdw blurRad="76200" dist="25400" dir="5400000" algn="bl" rotWithShape="0">
               <a:srgbClr val="000000">
                 <a:alpha val="12000"/>
               </a:srgbClr>
             </a:outerShdw>
           </a:effectLst>
         </p:spPr>
+        <p:txBody>
+          <a:bodyPr/>
+          <a:lstStyle/>
+          <a:p>
+            <a:endParaRPr lang="en-IL"/>
+          </a:p>
+        </p:txBody>
       </p:sp>
       <p:sp>
         <p:nvSpPr>
@@ -18448,7 +19006,7 @@
           <a:bodyPr wrap="square" lIns="1270" tIns="1270" rIns="1270" bIns="1270" rtlCol="0" anchor="ctr"/>
           <a:lstStyle/>
           <a:p>
-            <a:pPr rtl="1" algn="l" indent="0" marL="0">
+            <a:pPr marL="0" indent="0" algn="l" rtl="1">
               <a:buNone/>
             </a:pPr>
             <a:r>
@@ -18487,7 +19045,7 @@
           <a:bodyPr wrap="square" lIns="635" tIns="635" rIns="635" bIns="635" rtlCol="0" anchor="ctr"/>
           <a:lstStyle/>
           <a:p>
-            <a:pPr rtl="1" algn="l" indent="0" marL="0">
+            <a:pPr marL="0" indent="0" algn="l" rtl="1">
               <a:buNone/>
             </a:pPr>
             <a:r>
@@ -18526,7 +19084,7 @@
           <a:bodyPr wrap="square" lIns="0" tIns="0" rIns="0" bIns="0" rtlCol="0" anchor="ctr"/>
           <a:lstStyle/>
           <a:p>
-            <a:pPr rtl="1" algn="r" indent="0" marL="0">
+            <a:pPr marL="0" indent="0" algn="r" rtl="1">
               <a:buNone/>
             </a:pPr>
             <a:r>
@@ -18560,6 +19118,7 @@
         <a:solidFill>
           <a:srgbClr val="FFFFFF"/>
         </a:solidFill>
+        <a:effectLst/>
       </p:bgPr>
     </p:bg>
     <p:spTree>
@@ -18597,6 +19156,13 @@
             <a:prstDash val="solid"/>
           </a:ln>
         </p:spPr>
+        <p:txBody>
+          <a:bodyPr/>
+          <a:lstStyle/>
+          <a:p>
+            <a:endParaRPr lang="en-IL"/>
+          </a:p>
+        </p:txBody>
       </p:sp>
       <p:sp>
         <p:nvSpPr>
@@ -18617,6 +19183,13 @@
           </a:solidFill>
           <a:ln/>
         </p:spPr>
+        <p:txBody>
+          <a:bodyPr/>
+          <a:lstStyle/>
+          <a:p>
+            <a:endParaRPr lang="en-IL"/>
+          </a:p>
+        </p:txBody>
       </p:sp>
       <p:sp>
         <p:nvSpPr>
@@ -18639,11 +19212,11 @@
           <a:bodyPr wrap="square" lIns="0" tIns="0" rIns="0" bIns="0" rtlCol="0" anchor="ctr"/>
           <a:lstStyle/>
           <a:p>
-            <a:pPr rtl="1" algn="r" indent="0" marL="0">
+            <a:pPr marL="0" indent="0" algn="r" rtl="1">
               <a:buNone/>
             </a:pPr>
             <a:r>
-              <a:rPr lang="en-US" sz="1200" b="1" spc="100" kern="0" dirty="0">
+              <a:rPr lang="en-US" sz="1200" b="1" kern="0" spc="100" dirty="0">
                 <a:solidFill>
                   <a:srgbClr val="0E8A8F"/>
                 </a:solidFill>
@@ -18678,7 +19251,7 @@
           <a:bodyPr wrap="square" lIns="0" tIns="0" rIns="0" bIns="0" rtlCol="0" anchor="ctr"/>
           <a:lstStyle/>
           <a:p>
-            <a:pPr rtl="1" algn="r" indent="0" marL="0">
+            <a:pPr marL="0" indent="0" algn="r" rtl="1">
               <a:buNone/>
             </a:pPr>
             <a:r>
@@ -18717,7 +19290,7 @@
           <a:bodyPr wrap="square" lIns="0" tIns="0" rIns="0" bIns="0" rtlCol="0" anchor="ctr"/>
           <a:lstStyle/>
           <a:p>
-            <a:pPr rtl="1" algn="l" indent="0" marL="0">
+            <a:pPr marL="0" indent="0" algn="l" rtl="1">
               <a:buNone/>
             </a:pPr>
             <a:r>
@@ -18761,13 +19334,20 @@
             <a:prstDash val="solid"/>
           </a:ln>
           <a:effectLst>
-            <a:outerShdw sx="100000" sy="100000" kx="0" ky="0" algn="bl" rotWithShape="0" blurRad="76200" dist="25400" dir="5400000">
+            <a:outerShdw blurRad="76200" dist="25400" dir="5400000" algn="bl" rotWithShape="0">
               <a:srgbClr val="000000">
                 <a:alpha val="12000"/>
               </a:srgbClr>
             </a:outerShdw>
           </a:effectLst>
         </p:spPr>
+        <p:txBody>
+          <a:bodyPr/>
+          <a:lstStyle/>
+          <a:p>
+            <a:endParaRPr lang="en-IL"/>
+          </a:p>
+        </p:txBody>
       </p:sp>
       <p:sp>
         <p:nvSpPr>
@@ -18790,7 +19370,7 @@
           <a:bodyPr wrap="square" lIns="0" tIns="0" rIns="0" bIns="0" rtlCol="0" anchor="ctr"/>
           <a:lstStyle/>
           <a:p>
-            <a:pPr rtl="1" algn="l" indent="0" marL="0">
+            <a:pPr marL="0" indent="0" algn="l" rtl="1">
               <a:buNone/>
             </a:pPr>
             <a:r>
@@ -18829,7 +19409,7 @@
           <a:bodyPr wrap="square" lIns="0" tIns="0" rIns="0" bIns="0" rtlCol="0" anchor="ctr"/>
           <a:lstStyle/>
           <a:p>
-            <a:pPr rtl="1" algn="l" indent="0" marL="0">
+            <a:pPr marL="0" indent="0" algn="l" rtl="1">
               <a:buNone/>
             </a:pPr>
             <a:r>
@@ -18868,7 +19448,7 @@
           <a:bodyPr wrap="square" lIns="0" tIns="0" rIns="0" bIns="0" rtlCol="0" anchor="ctr"/>
           <a:lstStyle/>
           <a:p>
-            <a:pPr rtl="1" algn="r" indent="0" marL="0">
+            <a:pPr marL="0" indent="0" algn="r" rtl="1">
               <a:buNone/>
             </a:pPr>
             <a:r>
@@ -18908,6 +19488,13 @@
             <a:prstDash val="solid"/>
           </a:ln>
         </p:spPr>
+        <p:txBody>
+          <a:bodyPr/>
+          <a:lstStyle/>
+          <a:p>
+            <a:endParaRPr lang="en-IL"/>
+          </a:p>
+        </p:txBody>
       </p:sp>
       <p:sp>
         <p:nvSpPr>
@@ -18930,7 +19517,7 @@
           <a:bodyPr wrap="square" lIns="0" tIns="0" rIns="0" bIns="0" rtlCol="0" anchor="ctr"/>
           <a:lstStyle/>
           <a:p>
-            <a:pPr rtl="1" algn="l" indent="0" marL="0">
+            <a:pPr marL="0" indent="0" algn="l" rtl="1">
               <a:buNone/>
             </a:pPr>
             <a:r>
@@ -18969,7 +19556,7 @@
           <a:bodyPr wrap="square" lIns="0" tIns="0" rIns="0" bIns="0" rtlCol="0" anchor="ctr"/>
           <a:lstStyle/>
           <a:p>
-            <a:pPr rtl="1" algn="r" indent="0" marL="0">
+            <a:pPr marL="0" indent="0" algn="r" rtl="1">
               <a:buNone/>
             </a:pPr>
             <a:r>
@@ -19009,6 +19596,13 @@
             <a:prstDash val="solid"/>
           </a:ln>
         </p:spPr>
+        <p:txBody>
+          <a:bodyPr/>
+          <a:lstStyle/>
+          <a:p>
+            <a:endParaRPr lang="en-IL"/>
+          </a:p>
+        </p:txBody>
       </p:sp>
       <p:sp>
         <p:nvSpPr>
@@ -19031,7 +19625,7 @@
           <a:bodyPr wrap="square" lIns="0" tIns="0" rIns="0" bIns="0" rtlCol="0" anchor="ctr"/>
           <a:lstStyle/>
           <a:p>
-            <a:pPr rtl="1" algn="l" indent="0" marL="0">
+            <a:pPr marL="0" indent="0" algn="l" rtl="1">
               <a:buNone/>
             </a:pPr>
             <a:r>
@@ -19070,7 +19664,7 @@
           <a:bodyPr wrap="square" lIns="0" tIns="0" rIns="0" bIns="0" rtlCol="0" anchor="ctr"/>
           <a:lstStyle/>
           <a:p>
-            <a:pPr rtl="1" algn="r" indent="0" marL="0">
+            <a:pPr marL="0" indent="0" algn="r" rtl="1">
               <a:buNone/>
             </a:pPr>
             <a:r>
@@ -19110,6 +19704,13 @@
             <a:prstDash val="solid"/>
           </a:ln>
         </p:spPr>
+        <p:txBody>
+          <a:bodyPr/>
+          <a:lstStyle/>
+          <a:p>
+            <a:endParaRPr lang="en-IL"/>
+          </a:p>
+        </p:txBody>
       </p:sp>
       <p:sp>
         <p:nvSpPr>
@@ -19132,7 +19733,7 @@
           <a:bodyPr wrap="square" lIns="0" tIns="0" rIns="0" bIns="0" rtlCol="0" anchor="ctr"/>
           <a:lstStyle/>
           <a:p>
-            <a:pPr rtl="1" algn="l" indent="0" marL="0">
+            <a:pPr marL="0" indent="0" algn="l" rtl="1">
               <a:buNone/>
             </a:pPr>
             <a:r>
@@ -19171,7 +19772,7 @@
           <a:bodyPr wrap="square" lIns="0" tIns="0" rIns="0" bIns="0" rtlCol="0" anchor="ctr"/>
           <a:lstStyle/>
           <a:p>
-            <a:pPr rtl="1" algn="r" indent="0" marL="0">
+            <a:pPr marL="0" indent="0" algn="r" rtl="1">
               <a:buNone/>
             </a:pPr>
             <a:r>
@@ -19211,6 +19812,13 @@
             <a:prstDash val="solid"/>
           </a:ln>
         </p:spPr>
+        <p:txBody>
+          <a:bodyPr/>
+          <a:lstStyle/>
+          <a:p>
+            <a:endParaRPr lang="en-IL"/>
+          </a:p>
+        </p:txBody>
       </p:sp>
       <p:sp>
         <p:nvSpPr>
@@ -19233,7 +19841,7 @@
           <a:bodyPr wrap="square" lIns="0" tIns="0" rIns="0" bIns="0" rtlCol="0" anchor="ctr"/>
           <a:lstStyle/>
           <a:p>
-            <a:pPr rtl="1" algn="l" indent="0" marL="0">
+            <a:pPr marL="0" indent="0" algn="l" rtl="1">
               <a:buNone/>
             </a:pPr>
             <a:r>
@@ -19272,7 +19880,7 @@
           <a:bodyPr wrap="square" lIns="0" tIns="0" rIns="0" bIns="0" rtlCol="0" anchor="ctr"/>
           <a:lstStyle/>
           <a:p>
-            <a:pPr rtl="1" algn="r" indent="0" marL="0">
+            <a:pPr marL="0" indent="0" algn="r" rtl="1">
               <a:buNone/>
             </a:pPr>
             <a:r>
@@ -19312,6 +19920,13 @@
             <a:prstDash val="solid"/>
           </a:ln>
         </p:spPr>
+        <p:txBody>
+          <a:bodyPr/>
+          <a:lstStyle/>
+          <a:p>
+            <a:endParaRPr lang="en-IL"/>
+          </a:p>
+        </p:txBody>
       </p:sp>
       <p:sp>
         <p:nvSpPr>
@@ -19339,13 +19954,20 @@
             <a:prstDash val="solid"/>
           </a:ln>
           <a:effectLst>
-            <a:outerShdw sx="100000" sy="100000" kx="0" ky="0" algn="bl" rotWithShape="0" blurRad="76200" dist="25400" dir="5400000">
+            <a:outerShdw blurRad="76200" dist="25400" dir="5400000" algn="bl" rotWithShape="0">
               <a:srgbClr val="000000">
                 <a:alpha val="12000"/>
               </a:srgbClr>
             </a:outerShdw>
           </a:effectLst>
         </p:spPr>
+        <p:txBody>
+          <a:bodyPr/>
+          <a:lstStyle/>
+          <a:p>
+            <a:endParaRPr lang="en-IL"/>
+          </a:p>
+        </p:txBody>
       </p:sp>
       <p:sp>
         <p:nvSpPr>
@@ -19366,24 +19988,31 @@
           </a:solidFill>
           <a:ln/>
           <a:effectLst>
-            <a:outerShdw sx="100000" sy="100000" kx="0" ky="0" algn="bl" rotWithShape="0" blurRad="76200" dist="25400" dir="5400000">
+            <a:outerShdw blurRad="76200" dist="25400" dir="5400000" algn="bl" rotWithShape="0">
               <a:srgbClr val="000000">
                 <a:alpha val="12000"/>
               </a:srgbClr>
             </a:outerShdw>
           </a:effectLst>
         </p:spPr>
+        <p:txBody>
+          <a:bodyPr/>
+          <a:lstStyle/>
+          <a:p>
+            <a:endParaRPr lang="en-IL"/>
+          </a:p>
+        </p:txBody>
       </p:sp>
       <p:pic>
         <p:nvPicPr>
-          <p:cNvPr id="26" name="Image 0" descr="preencoded.png">    </p:cNvPr>
+          <p:cNvPr id="26" name="Image 0" descr="preencoded.png"/>
           <p:cNvPicPr>
             <a:picLocks noChangeAspect="1"/>
           </p:cNvPicPr>
           <p:nvPr/>
         </p:nvPicPr>
         <p:blipFill>
-          <a:blip r:embed="rId1"/>
+          <a:blip r:embed="rId3"/>
           <a:stretch>
             <a:fillRect/>
           </a:stretch>
@@ -19419,7 +20048,7 @@
           <a:bodyPr wrap="square" lIns="0" tIns="0" rIns="0" bIns="0" rtlCol="0" anchor="ctr"/>
           <a:lstStyle/>
           <a:p>
-            <a:pPr rtl="1" algn="l" indent="0" marL="0">
+            <a:pPr marL="0" indent="0" algn="l" rtl="1">
               <a:buNone/>
             </a:pPr>
             <a:r>
@@ -19458,7 +20087,7 @@
           <a:bodyPr wrap="square" lIns="0" tIns="0" rIns="0" bIns="0" rtlCol="0" anchor="ctr"/>
           <a:lstStyle/>
           <a:p>
-            <a:pPr rtl="1" algn="l" indent="0" marL="0">
+            <a:pPr marL="0" indent="0" algn="l" rtl="1">
               <a:buNone/>
             </a:pPr>
             <a:r>
@@ -19497,7 +20126,7 @@
           <a:bodyPr wrap="square" lIns="0" tIns="0" rIns="0" bIns="0" rtlCol="0" anchor="ctr"/>
           <a:lstStyle/>
           <a:p>
-            <a:pPr rtl="1" algn="l" indent="0" marL="0">
+            <a:pPr marL="0" indent="0" algn="l" rtl="1">
               <a:buNone/>
             </a:pPr>
             <a:r>
@@ -19536,7 +20165,7 @@
           <a:bodyPr wrap="square" lIns="0" tIns="0" rIns="0" bIns="0" rtlCol="0" anchor="ctr"/>
           <a:lstStyle/>
           <a:p>
-            <a:pPr rtl="1" algn="r" indent="0" marL="0">
+            <a:pPr marL="0" indent="0" algn="r" rtl="1">
               <a:buNone/>
             </a:pPr>
             <a:r>
@@ -19575,6 +20204,13 @@
           </a:solidFill>
           <a:ln/>
         </p:spPr>
+        <p:txBody>
+          <a:bodyPr/>
+          <a:lstStyle/>
+          <a:p>
+            <a:endParaRPr lang="en-IL"/>
+          </a:p>
+        </p:txBody>
       </p:sp>
       <p:sp>
         <p:nvSpPr>
@@ -19597,7 +20233,7 @@
           <a:bodyPr wrap="square" lIns="0" tIns="0" rIns="0" bIns="0" rtlCol="0" anchor="ctr"/>
           <a:lstStyle/>
           <a:p>
-            <a:pPr rtl="1" algn="l" indent="0" marL="0">
+            <a:pPr marL="0" indent="0" algn="l" rtl="1">
               <a:buNone/>
             </a:pPr>
             <a:r>
@@ -19636,7 +20272,7 @@
           <a:bodyPr wrap="square" lIns="0" tIns="0" rIns="0" bIns="0" rtlCol="0" anchor="ctr"/>
           <a:lstStyle/>
           <a:p>
-            <a:pPr rtl="1" algn="r" indent="0" marL="0">
+            <a:pPr marL="0" indent="0" algn="r" rtl="1">
               <a:buNone/>
             </a:pPr>
             <a:r>
@@ -19675,6 +20311,13 @@
           </a:solidFill>
           <a:ln/>
         </p:spPr>
+        <p:txBody>
+          <a:bodyPr/>
+          <a:lstStyle/>
+          <a:p>
+            <a:endParaRPr lang="en-IL"/>
+          </a:p>
+        </p:txBody>
       </p:sp>
       <p:sp>
         <p:nvSpPr>
@@ -19697,7 +20340,7 @@
           <a:bodyPr wrap="square" lIns="0" tIns="0" rIns="0" bIns="0" rtlCol="0" anchor="ctr"/>
           <a:lstStyle/>
           <a:p>
-            <a:pPr rtl="1" algn="l" indent="0" marL="0">
+            <a:pPr marL="0" indent="0" algn="l" rtl="1">
               <a:buNone/>
             </a:pPr>
             <a:r>
@@ -19736,7 +20379,7 @@
           <a:bodyPr wrap="square" lIns="0" tIns="0" rIns="0" bIns="0" rtlCol="0" anchor="ctr"/>
           <a:lstStyle/>
           <a:p>
-            <a:pPr rtl="1" algn="r" indent="0" marL="0">
+            <a:pPr marL="0" indent="0" algn="r" rtl="1">
               <a:buNone/>
             </a:pPr>
             <a:r>
@@ -19775,6 +20418,13 @@
           </a:solidFill>
           <a:ln/>
         </p:spPr>
+        <p:txBody>
+          <a:bodyPr/>
+          <a:lstStyle/>
+          <a:p>
+            <a:endParaRPr lang="en-IL"/>
+          </a:p>
+        </p:txBody>
       </p:sp>
       <p:sp>
         <p:nvSpPr>
@@ -19797,7 +20447,7 @@
           <a:bodyPr wrap="square" lIns="0" tIns="0" rIns="0" bIns="0" rtlCol="0" anchor="ctr"/>
           <a:lstStyle/>
           <a:p>
-            <a:pPr rtl="1" algn="l" indent="0" marL="0">
+            <a:pPr marL="0" indent="0" algn="l" rtl="1">
               <a:buNone/>
             </a:pPr>
             <a:r>
@@ -19836,7 +20486,7 @@
           <a:bodyPr wrap="square" lIns="0" tIns="0" rIns="0" bIns="0" rtlCol="0" anchor="ctr"/>
           <a:lstStyle/>
           <a:p>
-            <a:pPr rtl="1" algn="r" indent="0" marL="0">
+            <a:pPr marL="0" indent="0" algn="r" rtl="1">
               <a:buNone/>
             </a:pPr>
             <a:r>
@@ -19875,6 +20525,13 @@
           </a:solidFill>
           <a:ln/>
         </p:spPr>
+        <p:txBody>
+          <a:bodyPr/>
+          <a:lstStyle/>
+          <a:p>
+            <a:endParaRPr lang="en-IL"/>
+          </a:p>
+        </p:txBody>
       </p:sp>
       <p:sp>
         <p:nvSpPr>
@@ -19897,7 +20554,7 @@
           <a:bodyPr wrap="square" lIns="0" tIns="0" rIns="0" bIns="0" rtlCol="0" anchor="ctr"/>
           <a:lstStyle/>
           <a:p>
-            <a:pPr rtl="1" algn="l" indent="0" marL="0">
+            <a:pPr marL="0" indent="0" algn="l" rtl="1">
               <a:buNone/>
             </a:pPr>
             <a:r>
@@ -19936,7 +20593,7 @@
           <a:bodyPr wrap="square" lIns="0" tIns="0" rIns="0" bIns="0" rtlCol="0" anchor="ctr"/>
           <a:lstStyle/>
           <a:p>
-            <a:pPr rtl="1" algn="r" indent="0" marL="0">
+            <a:pPr marL="0" indent="0" algn="r" rtl="1">
               <a:buNone/>
             </a:pPr>
             <a:r>
@@ -19975,6 +20632,13 @@
           </a:solidFill>
           <a:ln/>
         </p:spPr>
+        <p:txBody>
+          <a:bodyPr/>
+          <a:lstStyle/>
+          <a:p>
+            <a:endParaRPr lang="en-IL"/>
+          </a:p>
+        </p:txBody>
       </p:sp>
       <p:sp>
         <p:nvSpPr>
@@ -19997,7 +20661,7 @@
           <a:bodyPr wrap="square" lIns="0" tIns="0" rIns="0" bIns="0" rtlCol="0" anchor="ctr"/>
           <a:lstStyle/>
           <a:p>
-            <a:pPr rtl="1" algn="l" indent="0" marL="0">
+            <a:pPr marL="0" indent="0" algn="l" rtl="1">
               <a:buNone/>
             </a:pPr>
             <a:r>
@@ -20036,7 +20700,7 @@
           <a:bodyPr wrap="square" lIns="0" tIns="0" rIns="0" bIns="0" rtlCol="0" anchor="ctr"/>
           <a:lstStyle/>
           <a:p>
-            <a:pPr rtl="1" algn="r" indent="0" marL="0">
+            <a:pPr marL="0" indent="0" algn="r" rtl="1">
               <a:buNone/>
             </a:pPr>
             <a:r>
@@ -20075,6 +20739,13 @@
           </a:solidFill>
           <a:ln/>
         </p:spPr>
+        <p:txBody>
+          <a:bodyPr/>
+          <a:lstStyle/>
+          <a:p>
+            <a:endParaRPr lang="en-IL"/>
+          </a:p>
+        </p:txBody>
       </p:sp>
       <p:sp>
         <p:nvSpPr>
@@ -20097,7 +20768,7 @@
           <a:bodyPr wrap="square" lIns="0" tIns="0" rIns="0" bIns="0" rtlCol="0" anchor="ctr"/>
           <a:lstStyle/>
           <a:p>
-            <a:pPr rtl="1" algn="l" indent="0" marL="0">
+            <a:pPr marL="0" indent="0" algn="l" rtl="1">
               <a:buNone/>
             </a:pPr>
             <a:r>
@@ -20131,6 +20802,7 @@
         <a:solidFill>
           <a:srgbClr val="FFFFFF"/>
         </a:solidFill>
+        <a:effectLst/>
       </p:bgPr>
     </p:bg>
     <p:spTree>
@@ -20168,6 +20840,13 @@
             <a:prstDash val="solid"/>
           </a:ln>
         </p:spPr>
+        <p:txBody>
+          <a:bodyPr/>
+          <a:lstStyle/>
+          <a:p>
+            <a:endParaRPr lang="en-IL"/>
+          </a:p>
+        </p:txBody>
       </p:sp>
       <p:sp>
         <p:nvSpPr>
@@ -20188,6 +20867,13 @@
           </a:solidFill>
           <a:ln/>
         </p:spPr>
+        <p:txBody>
+          <a:bodyPr/>
+          <a:lstStyle/>
+          <a:p>
+            <a:endParaRPr lang="en-IL"/>
+          </a:p>
+        </p:txBody>
       </p:sp>
       <p:sp>
         <p:nvSpPr>
@@ -20210,11 +20896,11 @@
           <a:bodyPr wrap="square" lIns="0" tIns="0" rIns="0" bIns="0" rtlCol="0" anchor="ctr"/>
           <a:lstStyle/>
           <a:p>
-            <a:pPr rtl="1" algn="r" indent="0" marL="0">
+            <a:pPr marL="0" indent="0" algn="r" rtl="1">
               <a:buNone/>
             </a:pPr>
             <a:r>
-              <a:rPr lang="en-US" sz="1200" b="1" spc="100" kern="0" dirty="0">
+              <a:rPr lang="en-US" sz="1200" b="1" kern="0" spc="100" dirty="0">
                 <a:solidFill>
                   <a:srgbClr val="0E8A8F"/>
                 </a:solidFill>
@@ -20249,7 +20935,7 @@
           <a:bodyPr wrap="square" lIns="0" tIns="0" rIns="0" bIns="0" rtlCol="0" anchor="ctr"/>
           <a:lstStyle/>
           <a:p>
-            <a:pPr rtl="1" algn="r" indent="0" marL="0">
+            <a:pPr marL="0" indent="0" algn="r" rtl="1">
               <a:buNone/>
             </a:pPr>
             <a:r>
@@ -20288,7 +20974,7 @@
           <a:bodyPr wrap="square" lIns="0" tIns="0" rIns="0" bIns="0" rtlCol="0" anchor="ctr"/>
           <a:lstStyle/>
           <a:p>
-            <a:pPr rtl="1" algn="l" indent="0" marL="0">
+            <a:pPr marL="0" indent="0" algn="l" rtl="1">
               <a:buNone/>
             </a:pPr>
             <a:r>
@@ -20327,7 +21013,7 @@
           <a:bodyPr wrap="square" lIns="0" tIns="0" rIns="0" bIns="0" rtlCol="0" anchor="ctr"/>
           <a:lstStyle/>
           <a:p>
-            <a:pPr rtl="1" algn="l" indent="0" marL="0">
+            <a:pPr marL="0" indent="0" algn="l" rtl="1">
               <a:buNone/>
             </a:pPr>
             <a:r>
@@ -20371,13 +21057,20 @@
             <a:prstDash val="solid"/>
           </a:ln>
           <a:effectLst>
-            <a:outerShdw sx="100000" sy="100000" kx="0" ky="0" algn="bl" rotWithShape="0" blurRad="76200" dist="25400" dir="5400000">
+            <a:outerShdw blurRad="76200" dist="25400" dir="5400000" algn="bl" rotWithShape="0">
               <a:srgbClr val="000000">
                 <a:alpha val="12000"/>
               </a:srgbClr>
             </a:outerShdw>
           </a:effectLst>
         </p:spPr>
+        <p:txBody>
+          <a:bodyPr/>
+          <a:lstStyle/>
+          <a:p>
+            <a:endParaRPr lang="en-IL"/>
+          </a:p>
+        </p:txBody>
       </p:sp>
       <p:sp>
         <p:nvSpPr>
@@ -20398,24 +21091,31 @@
           </a:solidFill>
           <a:ln/>
           <a:effectLst>
-            <a:outerShdw sx="100000" sy="100000" kx="0" ky="0" algn="bl" rotWithShape="0" blurRad="76200" dist="25400" dir="5400000">
+            <a:outerShdw blurRad="76200" dist="25400" dir="5400000" algn="bl" rotWithShape="0">
               <a:srgbClr val="000000">
                 <a:alpha val="12000"/>
               </a:srgbClr>
             </a:outerShdw>
           </a:effectLst>
         </p:spPr>
+        <p:txBody>
+          <a:bodyPr/>
+          <a:lstStyle/>
+          <a:p>
+            <a:endParaRPr lang="en-IL"/>
+          </a:p>
+        </p:txBody>
       </p:sp>
       <p:pic>
         <p:nvPicPr>
-          <p:cNvPr id="10" name="Image 0" descr="preencoded.png">    </p:cNvPr>
+          <p:cNvPr id="10" name="Image 0" descr="preencoded.png"/>
           <p:cNvPicPr>
             <a:picLocks noChangeAspect="1"/>
           </p:cNvPicPr>
           <p:nvPr/>
         </p:nvPicPr>
         <p:blipFill>
-          <a:blip r:embed="rId1"/>
+          <a:blip r:embed="rId3"/>
           <a:stretch>
             <a:fillRect/>
           </a:stretch>
@@ -20451,7 +21151,7 @@
           <a:bodyPr wrap="square" lIns="0" tIns="0" rIns="0" bIns="0" rtlCol="0" anchor="ctr"/>
           <a:lstStyle/>
           <a:p>
-            <a:pPr rtl="1" algn="l" indent="0" marL="0">
+            <a:pPr marL="0" indent="0" algn="l" rtl="1">
               <a:buNone/>
             </a:pPr>
             <a:r>
@@ -20490,7 +21190,7 @@
           <a:bodyPr wrap="square" lIns="0" tIns="0" rIns="0" bIns="0" rtlCol="0" anchor="ctr"/>
           <a:lstStyle/>
           <a:p>
-            <a:pPr rtl="1" algn="l" indent="0" marL="0">
+            <a:pPr marL="0" indent="0" algn="l" rtl="1">
               <a:buNone/>
             </a:pPr>
             <a:r>
@@ -20529,7 +21229,7 @@
           <a:bodyPr wrap="square" lIns="0" tIns="0" rIns="0" bIns="0" rtlCol="0" anchor="ctr"/>
           <a:lstStyle/>
           <a:p>
-            <a:pPr rtl="1" algn="ctr" indent="0" marL="0">
+            <a:pPr marL="0" indent="0" algn="ctr" rtl="1">
               <a:buNone/>
             </a:pPr>
             <a:r>
@@ -20568,7 +21268,7 @@
           <a:bodyPr wrap="square" lIns="0" tIns="0" rIns="0" bIns="0" rtlCol="0" anchor="ctr"/>
           <a:lstStyle/>
           <a:p>
-            <a:pPr rtl="1" algn="l" indent="0" marL="0">
+            <a:pPr marL="0" indent="0" algn="l" rtl="1">
               <a:buNone/>
             </a:pPr>
             <a:r>
@@ -20607,7 +21307,7 @@
           <a:bodyPr wrap="square" lIns="0" tIns="0" rIns="0" bIns="0" rtlCol="0" anchor="ctr"/>
           <a:lstStyle/>
           <a:p>
-            <a:pPr rtl="1" algn="l" indent="0" marL="0">
+            <a:pPr marL="0" indent="0" algn="l" rtl="1">
               <a:buNone/>
             </a:pPr>
             <a:r>
@@ -20646,7 +21346,7 @@
           <a:bodyPr wrap="square" lIns="0" tIns="0" rIns="0" bIns="0" rtlCol="0" anchor="ctr"/>
           <a:lstStyle/>
           <a:p>
-            <a:pPr rtl="1" algn="ctr" indent="0" marL="0">
+            <a:pPr marL="0" indent="0" algn="ctr" rtl="1">
               <a:buNone/>
             </a:pPr>
             <a:r>
@@ -20685,7 +21385,7 @@
           <a:bodyPr wrap="square" lIns="0" tIns="0" rIns="0" bIns="0" rtlCol="0" anchor="ctr"/>
           <a:lstStyle/>
           <a:p>
-            <a:pPr rtl="1" algn="l" indent="0" marL="0">
+            <a:pPr marL="0" indent="0" algn="l" rtl="1">
               <a:buNone/>
             </a:pPr>
             <a:r>
@@ -20724,7 +21424,7 @@
           <a:bodyPr wrap="square" lIns="0" tIns="0" rIns="0" bIns="0" rtlCol="0" anchor="ctr"/>
           <a:lstStyle/>
           <a:p>
-            <a:pPr rtl="1" algn="l" indent="0" marL="0">
+            <a:pPr marL="0" indent="0" algn="l" rtl="1">
               <a:buNone/>
             </a:pPr>
             <a:r>
@@ -20763,7 +21463,7 @@
           <a:bodyPr wrap="square" lIns="0" tIns="0" rIns="0" bIns="0" rtlCol="0" anchor="ctr"/>
           <a:lstStyle/>
           <a:p>
-            <a:pPr rtl="1" algn="ctr" indent="0" marL="0">
+            <a:pPr marL="0" indent="0" algn="ctr" rtl="1">
               <a:buNone/>
             </a:pPr>
             <a:r>
@@ -20802,7 +21502,7 @@
           <a:bodyPr wrap="square" lIns="0" tIns="0" rIns="0" bIns="0" rtlCol="0" anchor="ctr"/>
           <a:lstStyle/>
           <a:p>
-            <a:pPr rtl="1" algn="l" indent="0" marL="0">
+            <a:pPr marL="0" indent="0" algn="l" rtl="1">
               <a:buNone/>
             </a:pPr>
             <a:r>
@@ -20841,7 +21541,7 @@
           <a:bodyPr wrap="square" lIns="0" tIns="0" rIns="0" bIns="0" rtlCol="0" anchor="ctr"/>
           <a:lstStyle/>
           <a:p>
-            <a:pPr rtl="1" algn="l" indent="0" marL="0">
+            <a:pPr marL="0" indent="0" algn="l" rtl="1">
               <a:buNone/>
             </a:pPr>
             <a:r>
@@ -20880,7 +21580,7 @@
           <a:bodyPr wrap="square" lIns="0" tIns="0" rIns="0" bIns="0" rtlCol="0" anchor="ctr"/>
           <a:lstStyle/>
           <a:p>
-            <a:pPr rtl="1" algn="ctr" indent="0" marL="0">
+            <a:pPr marL="0" indent="0" algn="ctr" rtl="1">
               <a:buNone/>
             </a:pPr>
             <a:r>
@@ -20919,7 +21619,7 @@
           <a:bodyPr wrap="square" lIns="0" tIns="0" rIns="0" bIns="0" rtlCol="0" anchor="ctr"/>
           <a:lstStyle/>
           <a:p>
-            <a:pPr rtl="1" algn="l" indent="0" marL="0">
+            <a:pPr marL="0" indent="0" algn="l" rtl="1">
               <a:buNone/>
             </a:pPr>
             <a:r>
@@ -20958,7 +21658,7 @@
           <a:bodyPr wrap="square" lIns="0" tIns="0" rIns="0" bIns="0" rtlCol="0" anchor="ctr"/>
           <a:lstStyle/>
           <a:p>
-            <a:pPr rtl="1" algn="l" indent="0" marL="0">
+            <a:pPr marL="0" indent="0" algn="l" rtl="1">
               <a:buNone/>
             </a:pPr>
             <a:r>
@@ -20997,7 +21697,7 @@
           <a:bodyPr wrap="square" lIns="0" tIns="0" rIns="0" bIns="0" rtlCol="0" anchor="ctr"/>
           <a:lstStyle/>
           <a:p>
-            <a:pPr rtl="1" algn="ctr" indent="0" marL="0">
+            <a:pPr marL="0" indent="0" algn="ctr" rtl="1">
               <a:buNone/>
             </a:pPr>
             <a:r>
@@ -21036,7 +21736,7 @@
           <a:bodyPr wrap="square" lIns="0" tIns="0" rIns="0" bIns="0" rtlCol="0" anchor="ctr"/>
           <a:lstStyle/>
           <a:p>
-            <a:pPr rtl="1" algn="l" indent="0" marL="0">
+            <a:pPr marL="0" indent="0" algn="l" rtl="1">
               <a:buNone/>
             </a:pPr>
             <a:r>
@@ -21080,13 +21780,20 @@
             <a:prstDash val="solid"/>
           </a:ln>
           <a:effectLst>
-            <a:outerShdw sx="100000" sy="100000" kx="0" ky="0" algn="bl" rotWithShape="0" blurRad="76200" dist="25400" dir="5400000">
+            <a:outerShdw blurRad="76200" dist="25400" dir="5400000" algn="bl" rotWithShape="0">
               <a:srgbClr val="000000">
                 <a:alpha val="12000"/>
               </a:srgbClr>
             </a:outerShdw>
           </a:effectLst>
         </p:spPr>
+        <p:txBody>
+          <a:bodyPr/>
+          <a:lstStyle/>
+          <a:p>
+            <a:endParaRPr lang="en-IL"/>
+          </a:p>
+        </p:txBody>
       </p:sp>
       <p:sp>
         <p:nvSpPr>
@@ -21109,7 +21816,7 @@
           <a:bodyPr wrap="square" lIns="0" tIns="0" rIns="0" bIns="0" rtlCol="0" anchor="ctr"/>
           <a:lstStyle/>
           <a:p>
-            <a:pPr rtl="1" algn="l" indent="0" marL="0">
+            <a:pPr marL="0" indent="0" algn="l" rtl="1">
               <a:buNone/>
             </a:pPr>
             <a:r>
@@ -21148,7 +21855,7 @@
           <a:bodyPr wrap="square" lIns="0" tIns="0" rIns="0" bIns="0" rtlCol="0" anchor="ctr"/>
           <a:lstStyle/>
           <a:p>
-            <a:pPr rtl="1" algn="r" indent="0" marL="0">
+            <a:pPr marL="0" indent="0" algn="r" rtl="1">
               <a:buNone/>
             </a:pPr>
             <a:r>
@@ -21187,7 +21894,7 @@
           <a:bodyPr wrap="square" lIns="0" tIns="0" rIns="0" bIns="0" rtlCol="0" anchor="ctr"/>
           <a:lstStyle/>
           <a:p>
-            <a:pPr rtl="1" algn="ctr" indent="0" marL="0">
+            <a:pPr marL="0" indent="0" algn="ctr" rtl="1">
               <a:buNone/>
             </a:pPr>
             <a:r>
@@ -21226,7 +21933,7 @@
           <a:bodyPr wrap="square" lIns="0" tIns="0" rIns="0" bIns="0" rtlCol="0" anchor="ctr"/>
           <a:lstStyle/>
           <a:p>
-            <a:pPr rtl="1" algn="l" indent="0" marL="0">
+            <a:pPr marL="0" indent="0" algn="l" rtl="1">
               <a:buNone/>
             </a:pPr>
             <a:r>
@@ -21265,7 +21972,7 @@
           <a:bodyPr wrap="square" lIns="0" tIns="0" rIns="0" bIns="0" rtlCol="0" anchor="ctr"/>
           <a:lstStyle/>
           <a:p>
-            <a:pPr rtl="1" algn="l" indent="0" marL="0">
+            <a:pPr marL="0" indent="0" algn="l" rtl="1">
               <a:buNone/>
             </a:pPr>
             <a:r>
@@ -21304,7 +22011,7 @@
           <a:bodyPr wrap="square" lIns="0" tIns="0" rIns="0" bIns="0" rtlCol="0" anchor="ctr"/>
           <a:lstStyle/>
           <a:p>
-            <a:pPr rtl="1" algn="l" indent="0" marL="0">
+            <a:pPr marL="0" indent="0" algn="l" rtl="1">
               <a:buNone/>
             </a:pPr>
             <a:r>
@@ -21343,7 +22050,7 @@
           <a:bodyPr wrap="square" lIns="0" tIns="0" rIns="0" bIns="0" rtlCol="0" anchor="ctr"/>
           <a:lstStyle/>
           <a:p>
-            <a:pPr rtl="1" algn="l" indent="0" marL="0">
+            <a:pPr marL="0" indent="0" algn="l" rtl="1">
               <a:buNone/>
             </a:pPr>
             <a:r>
@@ -21377,6 +22084,7 @@
         <a:solidFill>
           <a:srgbClr val="FFFFFF"/>
         </a:solidFill>
+        <a:effectLst/>
       </p:bgPr>
     </p:bg>
     <p:spTree>
@@ -21414,6 +22122,13 @@
             <a:prstDash val="solid"/>
           </a:ln>
         </p:spPr>
+        <p:txBody>
+          <a:bodyPr/>
+          <a:lstStyle/>
+          <a:p>
+            <a:endParaRPr lang="en-IL"/>
+          </a:p>
+        </p:txBody>
       </p:sp>
       <p:sp>
         <p:nvSpPr>
@@ -21434,6 +22149,13 @@
           </a:solidFill>
           <a:ln/>
         </p:spPr>
+        <p:txBody>
+          <a:bodyPr/>
+          <a:lstStyle/>
+          <a:p>
+            <a:endParaRPr lang="en-IL"/>
+          </a:p>
+        </p:txBody>
       </p:sp>
       <p:sp>
         <p:nvSpPr>
@@ -21456,11 +22178,11 @@
           <a:bodyPr wrap="square" lIns="0" tIns="0" rIns="0" bIns="0" rtlCol="0" anchor="ctr"/>
           <a:lstStyle/>
           <a:p>
-            <a:pPr rtl="1" algn="r" indent="0" marL="0">
+            <a:pPr marL="0" indent="0" algn="r" rtl="1">
               <a:buNone/>
             </a:pPr>
             <a:r>
-              <a:rPr lang="en-US" sz="1200" b="1" spc="100" kern="0" dirty="0">
+              <a:rPr lang="en-US" sz="1200" b="1" kern="0" spc="100" dirty="0">
                 <a:solidFill>
                   <a:srgbClr val="0E8A8F"/>
                 </a:solidFill>
@@ -21495,7 +22217,7 @@
           <a:bodyPr wrap="square" lIns="0" tIns="0" rIns="0" bIns="0" rtlCol="0" anchor="ctr"/>
           <a:lstStyle/>
           <a:p>
-            <a:pPr rtl="1" algn="r" indent="0" marL="0">
+            <a:pPr marL="0" indent="0" algn="r" rtl="1">
               <a:buNone/>
             </a:pPr>
             <a:r>
@@ -21534,7 +22256,7 @@
           <a:bodyPr wrap="square" lIns="0" tIns="0" rIns="0" bIns="0" rtlCol="0" anchor="ctr"/>
           <a:lstStyle/>
           <a:p>
-            <a:pPr rtl="1" algn="l" indent="0" marL="0">
+            <a:pPr marL="0" indent="0" algn="l" rtl="1">
               <a:buNone/>
             </a:pPr>
             <a:r>
@@ -21578,13 +22300,20 @@
             <a:prstDash val="solid"/>
           </a:ln>
           <a:effectLst>
-            <a:outerShdw sx="100000" sy="100000" kx="0" ky="0" algn="bl" rotWithShape="0" blurRad="76200" dist="25400" dir="5400000">
+            <a:outerShdw blurRad="76200" dist="25400" dir="5400000" algn="bl" rotWithShape="0">
               <a:srgbClr val="000000">
                 <a:alpha val="12000"/>
               </a:srgbClr>
             </a:outerShdw>
           </a:effectLst>
         </p:spPr>
+        <p:txBody>
+          <a:bodyPr/>
+          <a:lstStyle/>
+          <a:p>
+            <a:endParaRPr lang="en-IL"/>
+          </a:p>
+        </p:txBody>
       </p:sp>
       <p:sp>
         <p:nvSpPr>
@@ -21605,24 +22334,31 @@
           </a:solidFill>
           <a:ln/>
           <a:effectLst>
-            <a:outerShdw sx="100000" sy="100000" kx="0" ky="0" algn="bl" rotWithShape="0" blurRad="76200" dist="25400" dir="5400000">
+            <a:outerShdw blurRad="76200" dist="25400" dir="5400000" algn="bl" rotWithShape="0">
               <a:srgbClr val="000000">
                 <a:alpha val="12000"/>
               </a:srgbClr>
             </a:outerShdw>
           </a:effectLst>
         </p:spPr>
+        <p:txBody>
+          <a:bodyPr/>
+          <a:lstStyle/>
+          <a:p>
+            <a:endParaRPr lang="en-IL"/>
+          </a:p>
+        </p:txBody>
       </p:sp>
       <p:pic>
         <p:nvPicPr>
-          <p:cNvPr id="9" name="Image 0" descr="preencoded.png">    </p:cNvPr>
+          <p:cNvPr id="9" name="Image 0" descr="preencoded.png"/>
           <p:cNvPicPr>
             <a:picLocks noChangeAspect="1"/>
           </p:cNvPicPr>
           <p:nvPr/>
         </p:nvPicPr>
         <p:blipFill>
-          <a:blip r:embed="rId1"/>
+          <a:blip r:embed="rId3"/>
           <a:stretch>
             <a:fillRect/>
           </a:stretch>
@@ -21658,7 +22394,7 @@
           <a:bodyPr wrap="square" lIns="0" tIns="0" rIns="0" bIns="0" rtlCol="0" anchor="ctr"/>
           <a:lstStyle/>
           <a:p>
-            <a:pPr rtl="1" algn="l" indent="0" marL="0">
+            <a:pPr marL="0" indent="0" algn="l" rtl="1">
               <a:buNone/>
             </a:pPr>
             <a:r>
@@ -21697,7 +22433,7 @@
           <a:bodyPr wrap="square" lIns="0" tIns="0" rIns="0" bIns="0" rtlCol="0" anchor="ctr"/>
           <a:lstStyle/>
           <a:p>
-            <a:pPr rtl="1" algn="l" indent="0" marL="0">
+            <a:pPr marL="0" indent="0" algn="l" rtl="1">
               <a:buNone/>
             </a:pPr>
             <a:r>
@@ -21736,7 +22472,7 @@
           <a:bodyPr wrap="square" lIns="0" tIns="0" rIns="0" bIns="0" rtlCol="0" anchor="ctr"/>
           <a:lstStyle/>
           <a:p>
-            <a:pPr rtl="1" algn="l" indent="0" marL="0">
+            <a:pPr marL="0" indent="0" algn="l" rtl="1">
               <a:buNone/>
             </a:pPr>
             <a:r>
@@ -21780,13 +22516,20 @@
             <a:prstDash val="solid"/>
           </a:ln>
           <a:effectLst>
-            <a:outerShdw sx="100000" sy="100000" kx="0" ky="0" algn="bl" rotWithShape="0" blurRad="76200" dist="25400" dir="5400000">
+            <a:outerShdw blurRad="76200" dist="25400" dir="5400000" algn="bl" rotWithShape="0">
               <a:srgbClr val="000000">
                 <a:alpha val="12000"/>
               </a:srgbClr>
             </a:outerShdw>
           </a:effectLst>
         </p:spPr>
+        <p:txBody>
+          <a:bodyPr/>
+          <a:lstStyle/>
+          <a:p>
+            <a:endParaRPr lang="en-IL"/>
+          </a:p>
+        </p:txBody>
       </p:sp>
       <p:sp>
         <p:nvSpPr>
@@ -21807,24 +22550,31 @@
           </a:solidFill>
           <a:ln/>
           <a:effectLst>
-            <a:outerShdw sx="100000" sy="100000" kx="0" ky="0" algn="bl" rotWithShape="0" blurRad="76200" dist="25400" dir="5400000">
+            <a:outerShdw blurRad="76200" dist="25400" dir="5400000" algn="bl" rotWithShape="0">
               <a:srgbClr val="000000">
                 <a:alpha val="12000"/>
               </a:srgbClr>
             </a:outerShdw>
           </a:effectLst>
         </p:spPr>
+        <p:txBody>
+          <a:bodyPr/>
+          <a:lstStyle/>
+          <a:p>
+            <a:endParaRPr lang="en-IL"/>
+          </a:p>
+        </p:txBody>
       </p:sp>
       <p:pic>
         <p:nvPicPr>
-          <p:cNvPr id="15" name="Image 1" descr="preencoded.png">    </p:cNvPr>
+          <p:cNvPr id="15" name="Image 1" descr="preencoded.png"/>
           <p:cNvPicPr>
             <a:picLocks noChangeAspect="1"/>
           </p:cNvPicPr>
           <p:nvPr/>
         </p:nvPicPr>
         <p:blipFill>
-          <a:blip r:embed="rId2"/>
+          <a:blip r:embed="rId4"/>
           <a:stretch>
             <a:fillRect/>
           </a:stretch>
@@ -21860,7 +22610,7 @@
           <a:bodyPr wrap="square" lIns="0" tIns="0" rIns="0" bIns="0" rtlCol="0" anchor="ctr"/>
           <a:lstStyle/>
           <a:p>
-            <a:pPr rtl="1" algn="l" indent="0" marL="0">
+            <a:pPr marL="0" indent="0" algn="l" rtl="1">
               <a:buNone/>
             </a:pPr>
             <a:r>
@@ -21899,7 +22649,7 @@
           <a:bodyPr wrap="square" lIns="0" tIns="0" rIns="0" bIns="0" rtlCol="0" anchor="ctr"/>
           <a:lstStyle/>
           <a:p>
-            <a:pPr rtl="1" algn="l" indent="0" marL="0">
+            <a:pPr marL="0" indent="0" algn="l" rtl="1">
               <a:buNone/>
             </a:pPr>
             <a:r>
@@ -21938,7 +22688,7 @@
           <a:bodyPr wrap="square" lIns="0" tIns="0" rIns="0" bIns="0" rtlCol="0" anchor="ctr"/>
           <a:lstStyle/>
           <a:p>
-            <a:pPr rtl="1" algn="l" indent="0" marL="0">
+            <a:pPr marL="0" indent="0" algn="l" rtl="1">
               <a:buNone/>
             </a:pPr>
             <a:r>
@@ -21982,13 +22732,20 @@
             <a:prstDash val="solid"/>
           </a:ln>
           <a:effectLst>
-            <a:outerShdw sx="100000" sy="100000" kx="0" ky="0" algn="bl" rotWithShape="0" blurRad="76200" dist="25400" dir="5400000">
+            <a:outerShdw blurRad="76200" dist="25400" dir="5400000" algn="bl" rotWithShape="0">
               <a:srgbClr val="000000">
                 <a:alpha val="12000"/>
               </a:srgbClr>
             </a:outerShdw>
           </a:effectLst>
         </p:spPr>
+        <p:txBody>
+          <a:bodyPr/>
+          <a:lstStyle/>
+          <a:p>
+            <a:endParaRPr lang="en-IL"/>
+          </a:p>
+        </p:txBody>
       </p:sp>
       <p:sp>
         <p:nvSpPr>
@@ -22009,24 +22766,31 @@
           </a:solidFill>
           <a:ln/>
           <a:effectLst>
-            <a:outerShdw sx="100000" sy="100000" kx="0" ky="0" algn="bl" rotWithShape="0" blurRad="76200" dist="25400" dir="5400000">
+            <a:outerShdw blurRad="76200" dist="25400" dir="5400000" algn="bl" rotWithShape="0">
               <a:srgbClr val="000000">
                 <a:alpha val="12000"/>
               </a:srgbClr>
             </a:outerShdw>
           </a:effectLst>
         </p:spPr>
+        <p:txBody>
+          <a:bodyPr/>
+          <a:lstStyle/>
+          <a:p>
+            <a:endParaRPr lang="en-IL"/>
+          </a:p>
+        </p:txBody>
       </p:sp>
       <p:pic>
         <p:nvPicPr>
-          <p:cNvPr id="21" name="Image 2" descr="preencoded.png">    </p:cNvPr>
+          <p:cNvPr id="21" name="Image 2" descr="preencoded.png"/>
           <p:cNvPicPr>
             <a:picLocks noChangeAspect="1"/>
           </p:cNvPicPr>
           <p:nvPr/>
         </p:nvPicPr>
         <p:blipFill>
-          <a:blip r:embed="rId3"/>
+          <a:blip r:embed="rId5"/>
           <a:stretch>
             <a:fillRect/>
           </a:stretch>
@@ -22062,7 +22826,7 @@
           <a:bodyPr wrap="square" lIns="0" tIns="0" rIns="0" bIns="0" rtlCol="0" anchor="ctr"/>
           <a:lstStyle/>
           <a:p>
-            <a:pPr rtl="1" algn="l" indent="0" marL="0">
+            <a:pPr marL="0" indent="0" algn="l" rtl="1">
               <a:buNone/>
             </a:pPr>
             <a:r>
@@ -22101,7 +22865,7 @@
           <a:bodyPr wrap="square" lIns="0" tIns="0" rIns="0" bIns="0" rtlCol="0" anchor="ctr"/>
           <a:lstStyle/>
           <a:p>
-            <a:pPr rtl="1" algn="l" indent="0" marL="0">
+            <a:pPr marL="0" indent="0" algn="l" rtl="1">
               <a:buNone/>
             </a:pPr>
             <a:r>
@@ -22140,7 +22904,7 @@
           <a:bodyPr wrap="square" lIns="0" tIns="0" rIns="0" bIns="0" rtlCol="0" anchor="ctr"/>
           <a:lstStyle/>
           <a:p>
-            <a:pPr rtl="1" algn="l" indent="0" marL="0">
+            <a:pPr marL="0" indent="0" algn="l" rtl="1">
               <a:buNone/>
             </a:pPr>
             <a:r>
@@ -22184,13 +22948,20 @@
             <a:prstDash val="solid"/>
           </a:ln>
           <a:effectLst>
-            <a:outerShdw sx="100000" sy="100000" kx="0" ky="0" algn="bl" rotWithShape="0" blurRad="76200" dist="25400" dir="5400000">
+            <a:outerShdw blurRad="76200" dist="25400" dir="5400000" algn="bl" rotWithShape="0">
               <a:srgbClr val="000000">
                 <a:alpha val="12000"/>
               </a:srgbClr>
             </a:outerShdw>
           </a:effectLst>
         </p:spPr>
+        <p:txBody>
+          <a:bodyPr/>
+          <a:lstStyle/>
+          <a:p>
+            <a:endParaRPr lang="en-IL"/>
+          </a:p>
+        </p:txBody>
       </p:sp>
       <p:sp>
         <p:nvSpPr>
@@ -22211,24 +22982,31 @@
           </a:solidFill>
           <a:ln/>
           <a:effectLst>
-            <a:outerShdw sx="100000" sy="100000" kx="0" ky="0" algn="bl" rotWithShape="0" blurRad="76200" dist="25400" dir="5400000">
+            <a:outerShdw blurRad="76200" dist="25400" dir="5400000" algn="bl" rotWithShape="0">
               <a:srgbClr val="000000">
                 <a:alpha val="12000"/>
               </a:srgbClr>
             </a:outerShdw>
           </a:effectLst>
         </p:spPr>
+        <p:txBody>
+          <a:bodyPr/>
+          <a:lstStyle/>
+          <a:p>
+            <a:endParaRPr lang="en-IL"/>
+          </a:p>
+        </p:txBody>
       </p:sp>
       <p:pic>
         <p:nvPicPr>
-          <p:cNvPr id="27" name="Image 3" descr="preencoded.png">    </p:cNvPr>
+          <p:cNvPr id="27" name="Image 3" descr="preencoded.png"/>
           <p:cNvPicPr>
             <a:picLocks noChangeAspect="1"/>
           </p:cNvPicPr>
           <p:nvPr/>
         </p:nvPicPr>
         <p:blipFill>
-          <a:blip r:embed="rId4"/>
+          <a:blip r:embed="rId6"/>
           <a:stretch>
             <a:fillRect/>
           </a:stretch>
@@ -22264,7 +23042,7 @@
           <a:bodyPr wrap="square" lIns="0" tIns="0" rIns="0" bIns="0" rtlCol="0" anchor="ctr"/>
           <a:lstStyle/>
           <a:p>
-            <a:pPr rtl="1" algn="l" indent="0" marL="0">
+            <a:pPr marL="0" indent="0" algn="l" rtl="1">
               <a:buNone/>
             </a:pPr>
             <a:r>
@@ -22303,7 +23081,7 @@
           <a:bodyPr wrap="square" lIns="0" tIns="0" rIns="0" bIns="0" rtlCol="0" anchor="ctr"/>
           <a:lstStyle/>
           <a:p>
-            <a:pPr rtl="1" algn="l" indent="0" marL="0">
+            <a:pPr marL="0" indent="0" algn="l" rtl="1">
               <a:buNone/>
             </a:pPr>
             <a:r>
@@ -22342,7 +23120,7 @@
           <a:bodyPr wrap="square" lIns="0" tIns="0" rIns="0" bIns="0" rtlCol="0" anchor="ctr"/>
           <a:lstStyle/>
           <a:p>
-            <a:pPr rtl="1" algn="l" indent="0" marL="0">
+            <a:pPr marL="0" indent="0" algn="l" rtl="1">
               <a:buNone/>
             </a:pPr>
             <a:r>
@@ -22386,13 +23164,20 @@
             <a:prstDash val="solid"/>
           </a:ln>
           <a:effectLst>
-            <a:outerShdw sx="100000" sy="100000" kx="0" ky="0" algn="bl" rotWithShape="0" blurRad="76200" dist="25400" dir="5400000">
+            <a:outerShdw blurRad="76200" dist="25400" dir="5400000" algn="bl" rotWithShape="0">
               <a:srgbClr val="000000">
                 <a:alpha val="12000"/>
               </a:srgbClr>
             </a:outerShdw>
           </a:effectLst>
         </p:spPr>
+        <p:txBody>
+          <a:bodyPr/>
+          <a:lstStyle/>
+          <a:p>
+            <a:endParaRPr lang="en-IL"/>
+          </a:p>
+        </p:txBody>
       </p:sp>
       <p:sp>
         <p:nvSpPr>
@@ -22413,24 +23198,31 @@
           </a:solidFill>
           <a:ln/>
           <a:effectLst>
-            <a:outerShdw sx="100000" sy="100000" kx="0" ky="0" algn="bl" rotWithShape="0" blurRad="76200" dist="25400" dir="5400000">
+            <a:outerShdw blurRad="76200" dist="25400" dir="5400000" algn="bl" rotWithShape="0">
               <a:srgbClr val="000000">
                 <a:alpha val="12000"/>
               </a:srgbClr>
             </a:outerShdw>
           </a:effectLst>
         </p:spPr>
+        <p:txBody>
+          <a:bodyPr/>
+          <a:lstStyle/>
+          <a:p>
+            <a:endParaRPr lang="en-IL"/>
+          </a:p>
+        </p:txBody>
       </p:sp>
       <p:pic>
         <p:nvPicPr>
-          <p:cNvPr id="33" name="Image 4" descr="preencoded.png">    </p:cNvPr>
+          <p:cNvPr id="33" name="Image 4" descr="preencoded.png"/>
           <p:cNvPicPr>
             <a:picLocks noChangeAspect="1"/>
           </p:cNvPicPr>
           <p:nvPr/>
         </p:nvPicPr>
         <p:blipFill>
-          <a:blip r:embed="rId5"/>
+          <a:blip r:embed="rId6"/>
           <a:stretch>
             <a:fillRect/>
           </a:stretch>
@@ -22466,7 +23258,7 @@
           <a:bodyPr wrap="square" lIns="0" tIns="0" rIns="0" bIns="0" rtlCol="0" anchor="ctr"/>
           <a:lstStyle/>
           <a:p>
-            <a:pPr rtl="1" algn="l" indent="0" marL="0">
+            <a:pPr marL="0" indent="0" algn="l" rtl="1">
               <a:buNone/>
             </a:pPr>
             <a:r>
@@ -22505,7 +23297,7 @@
           <a:bodyPr wrap="square" lIns="0" tIns="0" rIns="0" bIns="0" rtlCol="0" anchor="ctr"/>
           <a:lstStyle/>
           <a:p>
-            <a:pPr rtl="1" algn="l" indent="0" marL="0">
+            <a:pPr marL="0" indent="0" algn="l" rtl="1">
               <a:buNone/>
             </a:pPr>
             <a:r>
@@ -22544,7 +23336,7 @@
           <a:bodyPr wrap="square" lIns="0" tIns="0" rIns="0" bIns="0" rtlCol="0" anchor="ctr"/>
           <a:lstStyle/>
           <a:p>
-            <a:pPr rtl="1" algn="l" indent="0" marL="0">
+            <a:pPr marL="0" indent="0" algn="l" rtl="1">
               <a:buNone/>
             </a:pPr>
             <a:r>
@@ -22863,4 +23655,319 @@
     </a:ext>
   </a:extLst>
 </a:theme>
+</file>
+
+<file path=ppt/theme/theme2.xml><?xml version="1.0" encoding="utf-8"?>
+<a:theme xmlns:a="http://schemas.openxmlformats.org/drawingml/2006/main" name="Office Theme">
+  <a:themeElements>
+    <a:clrScheme name="Office">
+      <a:dk1>
+        <a:sysClr val="windowText" lastClr="000000"/>
+      </a:dk1>
+      <a:lt1>
+        <a:sysClr val="window" lastClr="FFFFFF"/>
+      </a:lt1>
+      <a:dk2>
+        <a:srgbClr val="0E2841"/>
+      </a:dk2>
+      <a:lt2>
+        <a:srgbClr val="E8E8E8"/>
+      </a:lt2>
+      <a:accent1>
+        <a:srgbClr val="156082"/>
+      </a:accent1>
+      <a:accent2>
+        <a:srgbClr val="E97132"/>
+      </a:accent2>
+      <a:accent3>
+        <a:srgbClr val="196B24"/>
+      </a:accent3>
+      <a:accent4>
+        <a:srgbClr val="0F9ED5"/>
+      </a:accent4>
+      <a:accent5>
+        <a:srgbClr val="A02B93"/>
+      </a:accent5>
+      <a:accent6>
+        <a:srgbClr val="4EA72E"/>
+      </a:accent6>
+      <a:hlink>
+        <a:srgbClr val="467886"/>
+      </a:hlink>
+      <a:folHlink>
+        <a:srgbClr val="96607D"/>
+      </a:folHlink>
+    </a:clrScheme>
+    <a:fontScheme name="Office">
+      <a:majorFont>
+        <a:latin typeface="Aptos Display" panose="02110004020202020204"/>
+        <a:ea typeface=""/>
+        <a:cs typeface=""/>
+        <a:font script="Jpan" typeface="游ゴシック Light"/>
+        <a:font script="Hang" typeface="맑은 고딕"/>
+        <a:font script="Hans" typeface="等线 Light"/>
+        <a:font script="Hant" typeface="新細明體"/>
+        <a:font script="Arab" typeface="Times New Roman"/>
+        <a:font script="Hebr" typeface="Times New Roman"/>
+        <a:font script="Thai" typeface="Angsana New"/>
+        <a:font script="Ethi" typeface="Nyala"/>
+        <a:font script="Beng" typeface="Vrinda"/>
+        <a:font script="Gujr" typeface="Shruti"/>
+        <a:font script="Khmr" typeface="MoolBoran"/>
+        <a:font script="Knda" typeface="Tunga"/>
+        <a:font script="Guru" typeface="Raavi"/>
+        <a:font script="Cans" typeface="Euphemia"/>
+        <a:font script="Cher" typeface="Plantagenet Cherokee"/>
+        <a:font script="Yiii" typeface="Microsoft Yi Baiti"/>
+        <a:font script="Tibt" typeface="Microsoft Himalaya"/>
+        <a:font script="Thaa" typeface="MV Boli"/>
+        <a:font script="Deva" typeface="Mangal"/>
+        <a:font script="Telu" typeface="Gautami"/>
+        <a:font script="Taml" typeface="Latha"/>
+        <a:font script="Syrc" typeface="Estrangelo Edessa"/>
+        <a:font script="Orya" typeface="Kalinga"/>
+        <a:font script="Mlym" typeface="Kartika"/>
+        <a:font script="Laoo" typeface="DokChampa"/>
+        <a:font script="Sinh" typeface="Iskoola Pota"/>
+        <a:font script="Mong" typeface="Mongolian Baiti"/>
+        <a:font script="Viet" typeface="Times New Roman"/>
+        <a:font script="Uigh" typeface="Microsoft Uighur"/>
+        <a:font script="Geor" typeface="Sylfaen"/>
+        <a:font script="Armn" typeface="Arial"/>
+        <a:font script="Bugi" typeface="Leelawadee UI"/>
+        <a:font script="Bopo" typeface="Microsoft JhengHei"/>
+        <a:font script="Java" typeface="Javanese Text"/>
+        <a:font script="Lisu" typeface="Segoe UI"/>
+        <a:font script="Mymr" typeface="Myanmar Text"/>
+        <a:font script="Nkoo" typeface="Ebrima"/>
+        <a:font script="Olck" typeface="Nirmala UI"/>
+        <a:font script="Osma" typeface="Ebrima"/>
+        <a:font script="Phag" typeface="Phagspa"/>
+        <a:font script="Syrn" typeface="Estrangelo Edessa"/>
+        <a:font script="Syrj" typeface="Estrangelo Edessa"/>
+        <a:font script="Syre" typeface="Estrangelo Edessa"/>
+        <a:font script="Sora" typeface="Nirmala UI"/>
+        <a:font script="Tale" typeface="Microsoft Tai Le"/>
+        <a:font script="Talu" typeface="Microsoft New Tai Lue"/>
+        <a:font script="Tfng" typeface="Ebrima"/>
+      </a:majorFont>
+      <a:minorFont>
+        <a:latin typeface="Aptos" panose="02110004020202020204"/>
+        <a:ea typeface=""/>
+        <a:cs typeface=""/>
+        <a:font script="Jpan" typeface="游ゴシック"/>
+        <a:font script="Hang" typeface="맑은 고딕"/>
+        <a:font script="Hans" typeface="等线"/>
+        <a:font script="Hant" typeface="新細明體"/>
+        <a:font script="Arab" typeface="Arial"/>
+        <a:font script="Hebr" typeface="Arial"/>
+        <a:font script="Thai" typeface="Cordia New"/>
+        <a:font script="Ethi" typeface="Nyala"/>
+        <a:font script="Beng" typeface="Vrinda"/>
+        <a:font script="Gujr" typeface="Shruti"/>
+        <a:font script="Khmr" typeface="DaunPenh"/>
+        <a:font script="Knda" typeface="Tunga"/>
+        <a:font script="Guru" typeface="Raavi"/>
+        <a:font script="Cans" typeface="Euphemia"/>
+        <a:font script="Cher" typeface="Plantagenet Cherokee"/>
+        <a:font script="Yiii" typeface="Microsoft Yi Baiti"/>
+        <a:font script="Tibt" typeface="Microsoft Himalaya"/>
+        <a:font script="Thaa" typeface="MV Boli"/>
+        <a:font script="Deva" typeface="Mangal"/>
+        <a:font script="Telu" typeface="Gautami"/>
+        <a:font script="Taml" typeface="Latha"/>
+        <a:font script="Syrc" typeface="Estrangelo Edessa"/>
+        <a:font script="Orya" typeface="Kalinga"/>
+        <a:font script="Mlym" typeface="Kartika"/>
+        <a:font script="Laoo" typeface="DokChampa"/>
+        <a:font script="Sinh" typeface="Iskoola Pota"/>
+        <a:font script="Mong" typeface="Mongolian Baiti"/>
+        <a:font script="Viet" typeface="Arial"/>
+        <a:font script="Uigh" typeface="Microsoft Uighur"/>
+        <a:font script="Geor" typeface="Sylfaen"/>
+        <a:font script="Armn" typeface="Arial"/>
+        <a:font script="Bugi" typeface="Leelawadee UI"/>
+        <a:font script="Bopo" typeface="Microsoft JhengHei"/>
+        <a:font script="Java" typeface="Javanese Text"/>
+        <a:font script="Lisu" typeface="Segoe UI"/>
+        <a:font script="Mymr" typeface="Myanmar Text"/>
+        <a:font script="Nkoo" typeface="Ebrima"/>
+        <a:font script="Olck" typeface="Nirmala UI"/>
+        <a:font script="Osma" typeface="Ebrima"/>
+        <a:font script="Phag" typeface="Phagspa"/>
+        <a:font script="Syrn" typeface="Estrangelo Edessa"/>
+        <a:font script="Syrj" typeface="Estrangelo Edessa"/>
+        <a:font script="Syre" typeface="Estrangelo Edessa"/>
+        <a:font script="Sora" typeface="Nirmala UI"/>
+        <a:font script="Tale" typeface="Microsoft Tai Le"/>
+        <a:font script="Talu" typeface="Microsoft New Tai Lue"/>
+        <a:font script="Tfng" typeface="Ebrima"/>
+      </a:minorFont>
+    </a:fontScheme>
+    <a:fmtScheme name="Office">
+      <a:fillStyleLst>
+        <a:solidFill>
+          <a:schemeClr val="phClr"/>
+        </a:solidFill>
+        <a:gradFill rotWithShape="1">
+          <a:gsLst>
+            <a:gs pos="0">
+              <a:schemeClr val="phClr">
+                <a:lumMod val="110000"/>
+                <a:satMod val="105000"/>
+                <a:tint val="67000"/>
+              </a:schemeClr>
+            </a:gs>
+            <a:gs pos="50000">
+              <a:schemeClr val="phClr">
+                <a:lumMod val="105000"/>
+                <a:satMod val="103000"/>
+                <a:tint val="73000"/>
+              </a:schemeClr>
+            </a:gs>
+            <a:gs pos="100000">
+              <a:schemeClr val="phClr">
+                <a:lumMod val="105000"/>
+                <a:satMod val="109000"/>
+                <a:tint val="81000"/>
+              </a:schemeClr>
+            </a:gs>
+          </a:gsLst>
+          <a:lin ang="5400000" scaled="0"/>
+        </a:gradFill>
+        <a:gradFill rotWithShape="1">
+          <a:gsLst>
+            <a:gs pos="0">
+              <a:schemeClr val="phClr">
+                <a:satMod val="103000"/>
+                <a:lumMod val="102000"/>
+                <a:tint val="94000"/>
+              </a:schemeClr>
+            </a:gs>
+            <a:gs pos="50000">
+              <a:schemeClr val="phClr">
+                <a:satMod val="110000"/>
+                <a:lumMod val="100000"/>
+                <a:shade val="100000"/>
+              </a:schemeClr>
+            </a:gs>
+            <a:gs pos="100000">
+              <a:schemeClr val="phClr">
+                <a:lumMod val="99000"/>
+                <a:satMod val="120000"/>
+                <a:shade val="78000"/>
+              </a:schemeClr>
+            </a:gs>
+          </a:gsLst>
+          <a:lin ang="5400000" scaled="0"/>
+        </a:gradFill>
+      </a:fillStyleLst>
+      <a:lnStyleLst>
+        <a:ln w="12700" cap="flat" cmpd="sng" algn="ctr">
+          <a:solidFill>
+            <a:schemeClr val="phClr"/>
+          </a:solidFill>
+          <a:prstDash val="solid"/>
+          <a:miter lim="800000"/>
+        </a:ln>
+        <a:ln w="19050" cap="flat" cmpd="sng" algn="ctr">
+          <a:solidFill>
+            <a:schemeClr val="phClr"/>
+          </a:solidFill>
+          <a:prstDash val="solid"/>
+          <a:miter lim="800000"/>
+        </a:ln>
+        <a:ln w="25400" cap="flat" cmpd="sng" algn="ctr">
+          <a:solidFill>
+            <a:schemeClr val="phClr"/>
+          </a:solidFill>
+          <a:prstDash val="solid"/>
+          <a:miter lim="800000"/>
+        </a:ln>
+      </a:lnStyleLst>
+      <a:effectStyleLst>
+        <a:effectStyle>
+          <a:effectLst/>
+        </a:effectStyle>
+        <a:effectStyle>
+          <a:effectLst/>
+        </a:effectStyle>
+        <a:effectStyle>
+          <a:effectLst>
+            <a:outerShdw blurRad="57150" dist="19050" dir="5400000" algn="ctr" rotWithShape="0">
+              <a:srgbClr val="000000">
+                <a:alpha val="63000"/>
+              </a:srgbClr>
+            </a:outerShdw>
+          </a:effectLst>
+        </a:effectStyle>
+      </a:effectStyleLst>
+      <a:bgFillStyleLst>
+        <a:solidFill>
+          <a:schemeClr val="phClr"/>
+        </a:solidFill>
+        <a:solidFill>
+          <a:schemeClr val="phClr">
+            <a:tint val="95000"/>
+            <a:satMod val="170000"/>
+          </a:schemeClr>
+        </a:solidFill>
+        <a:gradFill rotWithShape="1">
+          <a:gsLst>
+            <a:gs pos="0">
+              <a:schemeClr val="phClr">
+                <a:tint val="93000"/>
+                <a:satMod val="150000"/>
+                <a:shade val="98000"/>
+                <a:lumMod val="102000"/>
+              </a:schemeClr>
+            </a:gs>
+            <a:gs pos="50000">
+              <a:schemeClr val="phClr">
+                <a:tint val="98000"/>
+                <a:satMod val="130000"/>
+                <a:shade val="90000"/>
+                <a:lumMod val="103000"/>
+              </a:schemeClr>
+            </a:gs>
+            <a:gs pos="100000">
+              <a:schemeClr val="phClr">
+                <a:shade val="63000"/>
+                <a:satMod val="120000"/>
+              </a:schemeClr>
+            </a:gs>
+          </a:gsLst>
+          <a:lin ang="5400000" scaled="0"/>
+        </a:gradFill>
+      </a:bgFillStyleLst>
+    </a:fmtScheme>
+  </a:themeElements>
+  <a:objectDefaults>
+    <a:lnDef>
+      <a:spPr/>
+      <a:bodyPr/>
+      <a:lstStyle/>
+      <a:style>
+        <a:lnRef idx="2">
+          <a:schemeClr val="accent1"/>
+        </a:lnRef>
+        <a:fillRef idx="0">
+          <a:schemeClr val="accent1"/>
+        </a:fillRef>
+        <a:effectRef idx="1">
+          <a:schemeClr val="accent1"/>
+        </a:effectRef>
+        <a:fontRef idx="minor">
+          <a:schemeClr val="tx1"/>
+        </a:fontRef>
+      </a:style>
+    </a:lnDef>
+  </a:objectDefaults>
+  <a:extraClrSchemeLst/>
+  <a:extLst>
+    <a:ext uri="{05A4C25C-085E-4340-85A3-A5531E510DB2}">
+      <thm15:themeFamily xmlns:thm15="http://schemas.microsoft.com/office/thememl/2012/main" name="Office Theme" id="{2E142A2C-CD16-42D6-873A-C26D2A0506FA}" vid="{1BDDFF52-6CD6-40A5-AB3C-68EB2F1E4D0A}"/>
+    </a:ext>
+  </a:extLst>
+</a:theme>
 </file>